--- a/documentation/decks/PPD_Final_Presentation.pptx
+++ b/documentation/decks/PPD_Final_Presentation.pptx
@@ -4,28 +4,31 @@
   <p:sldMasterIdLst>
     <p:sldMasterId id="2147483648" r:id="rId1"/>
   </p:sldMasterIdLst>
+  <p:notesMasterIdLst>
+    <p:notesMasterId r:id="rId21"/>
+  </p:notesMasterIdLst>
   <p:sldIdLst>
-    <p:sldId id="256" r:id="rId7"/>
-    <p:sldId id="257" r:id="rId8"/>
-    <p:sldId id="258" r:id="rId9"/>
-    <p:sldId id="259" r:id="rId10"/>
-    <p:sldId id="260" r:id="rId11"/>
-    <p:sldId id="261" r:id="rId12"/>
-    <p:sldId id="262" r:id="rId13"/>
-    <p:sldId id="263" r:id="rId14"/>
-    <p:sldId id="264" r:id="rId15"/>
-    <p:sldId id="265" r:id="rId16"/>
-    <p:sldId id="266" r:id="rId17"/>
-    <p:sldId id="267" r:id="rId18"/>
-    <p:sldId id="268" r:id="rId19"/>
-    <p:sldId id="269" r:id="rId20"/>
-    <p:sldId id="270" r:id="rId21"/>
-    <p:sldId id="271" r:id="rId22"/>
-    <p:sldId id="272" r:id="rId23"/>
-    <p:sldId id="273" r:id="rId24"/>
-    <p:sldId id="274" r:id="rId25"/>
+    <p:sldId id="256" r:id="rId2"/>
+    <p:sldId id="257" r:id="rId3"/>
+    <p:sldId id="258" r:id="rId4"/>
+    <p:sldId id="259" r:id="rId5"/>
+    <p:sldId id="260" r:id="rId6"/>
+    <p:sldId id="261" r:id="rId7"/>
+    <p:sldId id="262" r:id="rId8"/>
+    <p:sldId id="263" r:id="rId9"/>
+    <p:sldId id="264" r:id="rId10"/>
+    <p:sldId id="265" r:id="rId11"/>
+    <p:sldId id="266" r:id="rId12"/>
+    <p:sldId id="267" r:id="rId13"/>
+    <p:sldId id="268" r:id="rId14"/>
+    <p:sldId id="269" r:id="rId15"/>
+    <p:sldId id="270" r:id="rId16"/>
+    <p:sldId id="271" r:id="rId17"/>
+    <p:sldId id="272" r:id="rId18"/>
+    <p:sldId id="273" r:id="rId19"/>
+    <p:sldId id="274" r:id="rId20"/>
   </p:sldIdLst>
-  <p:sldSz cx="12191695" cy="6858000" type="screen4x3"/>
+  <p:sldSz cx="12192000" cy="6858000"/>
   <p:notesSz cx="6858000" cy="9144000"/>
   <p:defaultTextStyle>
     <a:defPPr>
@@ -122,7 +125,723 @@
       </a:defRPr>
     </a:lvl9pPr>
   </p:defaultTextStyle>
+  <p:extLst>
+    <p:ext uri="{EFAFB233-063F-42B5-8137-9DF3F51BA10A}">
+      <p15:sldGuideLst xmlns:p15="http://schemas.microsoft.com/office/powerpoint/2012/main">
+        <p15:guide id="1" orient="horz" pos="2160">
+          <p15:clr>
+            <a:srgbClr val="A4A3A4"/>
+          </p15:clr>
+        </p15:guide>
+        <p15:guide id="2" pos="2880">
+          <p15:clr>
+            <a:srgbClr val="A4A3A4"/>
+          </p15:clr>
+        </p15:guide>
+      </p15:sldGuideLst>
+    </p:ext>
+  </p:extLst>
 </p:presentation>
+</file>
+
+<file path=ppt/revisionInfo.xml><?xml version="1.0" encoding="utf-8"?>
+<p1510:revInfo xmlns:a="http://schemas.openxmlformats.org/drawingml/2006/main" xmlns:r="http://schemas.openxmlformats.org/officeDocument/2006/relationships" xmlns:p1510="http://schemas.microsoft.com/office/powerpoint/2015/10/main">
+  <p1510:revLst>
+    <p1510:client id="{68A22D07-A27E-47C8-8E55-7BBCBF5982D4}" v="6" dt="2026-09-04T17:18:50.321"/>
+  </p1510:revLst>
+</p1510:revInfo>
+</file>
+
+<file path=ppt/changesInfos/changesInfo1.xml><?xml version="1.0" encoding="utf-8"?>
+<pc:chgInfo xmlns:a="http://schemas.openxmlformats.org/drawingml/2006/main" xmlns:r="http://schemas.openxmlformats.org/officeDocument/2006/relationships" xmlns:ac="http://schemas.microsoft.com/office/drawing/2013/main/command" xmlns:pc="http://schemas.microsoft.com/office/powerpoint/2013/main/command">
+  <pc:docChgLst>
+    <pc:chgData name="Adithya Sivakumar" userId="66f9b287-a2d3-4cb5-8dae-29884e733115" providerId="ADAL" clId="{937D3A49-D0E7-486D-BA98-5AD23D3FA812}"/>
+    <pc:docChg chg="undo redo custSel addSld delSld modSld modMainMaster">
+      <pc:chgData name="Adithya Sivakumar" userId="66f9b287-a2d3-4cb5-8dae-29884e733115" providerId="ADAL" clId="{937D3A49-D0E7-486D-BA98-5AD23D3FA812}" dt="2026-09-04T17:25:34.983" v="137" actId="22"/>
+      <pc:docMkLst>
+        <pc:docMk/>
+      </pc:docMkLst>
+      <pc:sldChg chg="addSp delSp modSp mod">
+        <pc:chgData name="Adithya Sivakumar" userId="66f9b287-a2d3-4cb5-8dae-29884e733115" providerId="ADAL" clId="{937D3A49-D0E7-486D-BA98-5AD23D3FA812}" dt="2026-09-04T17:19:54.445" v="63" actId="1076"/>
+        <pc:sldMkLst>
+          <pc:docMk/>
+          <pc:sldMk cId="0" sldId="256"/>
+        </pc:sldMkLst>
+        <pc:spChg chg="mod">
+          <ac:chgData name="Adithya Sivakumar" userId="66f9b287-a2d3-4cb5-8dae-29884e733115" providerId="ADAL" clId="{937D3A49-D0E7-486D-BA98-5AD23D3FA812}" dt="2026-09-04T17:19:54.445" v="63" actId="1076"/>
+          <ac:spMkLst>
+            <pc:docMk/>
+            <pc:sldMk cId="0" sldId="256"/>
+            <ac:spMk id="2" creationId="{00000000-0000-0000-0000-000000000000}"/>
+          </ac:spMkLst>
+        </pc:spChg>
+        <pc:spChg chg="mod">
+          <ac:chgData name="Adithya Sivakumar" userId="66f9b287-a2d3-4cb5-8dae-29884e733115" providerId="ADAL" clId="{937D3A49-D0E7-486D-BA98-5AD23D3FA812}" dt="2026-09-04T17:16:11.988" v="33" actId="1076"/>
+          <ac:spMkLst>
+            <pc:docMk/>
+            <pc:sldMk cId="0" sldId="256"/>
+            <ac:spMk id="3" creationId="{00000000-0000-0000-0000-000000000000}"/>
+          </ac:spMkLst>
+        </pc:spChg>
+        <pc:spChg chg="mod">
+          <ac:chgData name="Adithya Sivakumar" userId="66f9b287-a2d3-4cb5-8dae-29884e733115" providerId="ADAL" clId="{937D3A49-D0E7-486D-BA98-5AD23D3FA812}" dt="2026-09-04T17:17:40.549" v="47" actId="14100"/>
+          <ac:spMkLst>
+            <pc:docMk/>
+            <pc:sldMk cId="0" sldId="256"/>
+            <ac:spMk id="4" creationId="{00000000-0000-0000-0000-000000000000}"/>
+          </ac:spMkLst>
+        </pc:spChg>
+        <pc:spChg chg="mod">
+          <ac:chgData name="Adithya Sivakumar" userId="66f9b287-a2d3-4cb5-8dae-29884e733115" providerId="ADAL" clId="{937D3A49-D0E7-486D-BA98-5AD23D3FA812}" dt="2026-09-04T17:19:51.142" v="61" actId="948"/>
+          <ac:spMkLst>
+            <pc:docMk/>
+            <pc:sldMk cId="0" sldId="256"/>
+            <ac:spMk id="9" creationId="{00000000-0000-0000-0000-000000000000}"/>
+          </ac:spMkLst>
+        </pc:spChg>
+        <pc:spChg chg="mod">
+          <ac:chgData name="Adithya Sivakumar" userId="66f9b287-a2d3-4cb5-8dae-29884e733115" providerId="ADAL" clId="{937D3A49-D0E7-486D-BA98-5AD23D3FA812}" dt="2026-09-04T17:14:51.092" v="15" actId="1076"/>
+          <ac:spMkLst>
+            <pc:docMk/>
+            <pc:sldMk cId="0" sldId="256"/>
+            <ac:spMk id="10" creationId="{00000000-0000-0000-0000-000000000000}"/>
+          </ac:spMkLst>
+        </pc:spChg>
+        <pc:spChg chg="mod">
+          <ac:chgData name="Adithya Sivakumar" userId="66f9b287-a2d3-4cb5-8dae-29884e733115" providerId="ADAL" clId="{937D3A49-D0E7-486D-BA98-5AD23D3FA812}" dt="2026-09-04T17:14:40.956" v="14" actId="164"/>
+          <ac:spMkLst>
+            <pc:docMk/>
+            <pc:sldMk cId="0" sldId="256"/>
+            <ac:spMk id="11" creationId="{00000000-0000-0000-0000-000000000000}"/>
+          </ac:spMkLst>
+        </pc:spChg>
+        <pc:spChg chg="mod">
+          <ac:chgData name="Adithya Sivakumar" userId="66f9b287-a2d3-4cb5-8dae-29884e733115" providerId="ADAL" clId="{937D3A49-D0E7-486D-BA98-5AD23D3FA812}" dt="2026-09-04T17:14:40.956" v="14" actId="164"/>
+          <ac:spMkLst>
+            <pc:docMk/>
+            <pc:sldMk cId="0" sldId="256"/>
+            <ac:spMk id="12" creationId="{00000000-0000-0000-0000-000000000000}"/>
+          </ac:spMkLst>
+        </pc:spChg>
+        <pc:spChg chg="mod">
+          <ac:chgData name="Adithya Sivakumar" userId="66f9b287-a2d3-4cb5-8dae-29884e733115" providerId="ADAL" clId="{937D3A49-D0E7-486D-BA98-5AD23D3FA812}" dt="2026-09-04T17:14:40.956" v="14" actId="164"/>
+          <ac:spMkLst>
+            <pc:docMk/>
+            <pc:sldMk cId="0" sldId="256"/>
+            <ac:spMk id="13" creationId="{00000000-0000-0000-0000-000000000000}"/>
+          </ac:spMkLst>
+        </pc:spChg>
+        <pc:spChg chg="mod">
+          <ac:chgData name="Adithya Sivakumar" userId="66f9b287-a2d3-4cb5-8dae-29884e733115" providerId="ADAL" clId="{937D3A49-D0E7-486D-BA98-5AD23D3FA812}" dt="2026-09-04T17:18:55.774" v="58" actId="108"/>
+          <ac:spMkLst>
+            <pc:docMk/>
+            <pc:sldMk cId="0" sldId="256"/>
+            <ac:spMk id="14" creationId="{00000000-0000-0000-0000-000000000000}"/>
+          </ac:spMkLst>
+        </pc:spChg>
+        <pc:spChg chg="mod">
+          <ac:chgData name="Adithya Sivakumar" userId="66f9b287-a2d3-4cb5-8dae-29884e733115" providerId="ADAL" clId="{937D3A49-D0E7-486D-BA98-5AD23D3FA812}" dt="2026-09-04T17:16:59.925" v="44" actId="403"/>
+          <ac:spMkLst>
+            <pc:docMk/>
+            <pc:sldMk cId="0" sldId="256"/>
+            <ac:spMk id="15" creationId="{00000000-0000-0000-0000-000000000000}"/>
+          </ac:spMkLst>
+        </pc:spChg>
+        <pc:spChg chg="del">
+          <ac:chgData name="Adithya Sivakumar" userId="66f9b287-a2d3-4cb5-8dae-29884e733115" providerId="ADAL" clId="{937D3A49-D0E7-486D-BA98-5AD23D3FA812}" dt="2026-09-04T17:17:56.694" v="48" actId="478"/>
+          <ac:spMkLst>
+            <pc:docMk/>
+            <pc:sldMk cId="0" sldId="256"/>
+            <ac:spMk id="16" creationId="{00000000-0000-0000-0000-000000000000}"/>
+          </ac:spMkLst>
+        </pc:spChg>
+        <pc:grpChg chg="add mod">
+          <ac:chgData name="Adithya Sivakumar" userId="66f9b287-a2d3-4cb5-8dae-29884e733115" providerId="ADAL" clId="{937D3A49-D0E7-486D-BA98-5AD23D3FA812}" dt="2026-09-04T17:16:46.773" v="39" actId="1076"/>
+          <ac:grpSpMkLst>
+            <pc:docMk/>
+            <pc:sldMk cId="0" sldId="256"/>
+            <ac:grpSpMk id="18" creationId="{F48D39A4-8D71-351D-01A2-1DEF03C7DE2C}"/>
+          </ac:grpSpMkLst>
+        </pc:grpChg>
+      </pc:sldChg>
+      <pc:sldChg chg="modSp mod">
+        <pc:chgData name="Adithya Sivakumar" userId="66f9b287-a2d3-4cb5-8dae-29884e733115" providerId="ADAL" clId="{937D3A49-D0E7-486D-BA98-5AD23D3FA812}" dt="2026-09-04T17:25:02.994" v="136" actId="403"/>
+        <pc:sldMkLst>
+          <pc:docMk/>
+          <pc:sldMk cId="0" sldId="257"/>
+        </pc:sldMkLst>
+        <pc:spChg chg="mod">
+          <ac:chgData name="Adithya Sivakumar" userId="66f9b287-a2d3-4cb5-8dae-29884e733115" providerId="ADAL" clId="{937D3A49-D0E7-486D-BA98-5AD23D3FA812}" dt="2026-09-04T17:25:02.994" v="136" actId="403"/>
+          <ac:spMkLst>
+            <pc:docMk/>
+            <pc:sldMk cId="0" sldId="257"/>
+            <ac:spMk id="10" creationId="{00000000-0000-0000-0000-000000000000}"/>
+          </ac:spMkLst>
+        </pc:spChg>
+        <pc:spChg chg="mod">
+          <ac:chgData name="Adithya Sivakumar" userId="66f9b287-a2d3-4cb5-8dae-29884e733115" providerId="ADAL" clId="{937D3A49-D0E7-486D-BA98-5AD23D3FA812}" dt="2026-09-04T17:23:53.968" v="115" actId="14100"/>
+          <ac:spMkLst>
+            <pc:docMk/>
+            <pc:sldMk cId="0" sldId="257"/>
+            <ac:spMk id="16" creationId="{00000000-0000-0000-0000-000000000000}"/>
+          </ac:spMkLst>
+        </pc:spChg>
+        <pc:spChg chg="mod">
+          <ac:chgData name="Adithya Sivakumar" userId="66f9b287-a2d3-4cb5-8dae-29884e733115" providerId="ADAL" clId="{937D3A49-D0E7-486D-BA98-5AD23D3FA812}" dt="2026-09-04T17:24:29.782" v="123" actId="113"/>
+          <ac:spMkLst>
+            <pc:docMk/>
+            <pc:sldMk cId="0" sldId="257"/>
+            <ac:spMk id="17" creationId="{00000000-0000-0000-0000-000000000000}"/>
+          </ac:spMkLst>
+        </pc:spChg>
+        <pc:spChg chg="mod">
+          <ac:chgData name="Adithya Sivakumar" userId="66f9b287-a2d3-4cb5-8dae-29884e733115" providerId="ADAL" clId="{937D3A49-D0E7-486D-BA98-5AD23D3FA812}" dt="2026-09-04T17:23:56.855" v="116" actId="14100"/>
+          <ac:spMkLst>
+            <pc:docMk/>
+            <pc:sldMk cId="0" sldId="257"/>
+            <ac:spMk id="20" creationId="{00000000-0000-0000-0000-000000000000}"/>
+          </ac:spMkLst>
+        </pc:spChg>
+        <pc:spChg chg="mod">
+          <ac:chgData name="Adithya Sivakumar" userId="66f9b287-a2d3-4cb5-8dae-29884e733115" providerId="ADAL" clId="{937D3A49-D0E7-486D-BA98-5AD23D3FA812}" dt="2026-09-04T17:24:31.928" v="124" actId="113"/>
+          <ac:spMkLst>
+            <pc:docMk/>
+            <pc:sldMk cId="0" sldId="257"/>
+            <ac:spMk id="21" creationId="{00000000-0000-0000-0000-000000000000}"/>
+          </ac:spMkLst>
+        </pc:spChg>
+        <pc:spChg chg="mod">
+          <ac:chgData name="Adithya Sivakumar" userId="66f9b287-a2d3-4cb5-8dae-29884e733115" providerId="ADAL" clId="{937D3A49-D0E7-486D-BA98-5AD23D3FA812}" dt="2026-09-04T17:24:05.704" v="117" actId="14100"/>
+          <ac:spMkLst>
+            <pc:docMk/>
+            <pc:sldMk cId="0" sldId="257"/>
+            <ac:spMk id="24" creationId="{00000000-0000-0000-0000-000000000000}"/>
+          </ac:spMkLst>
+        </pc:spChg>
+        <pc:spChg chg="mod">
+          <ac:chgData name="Adithya Sivakumar" userId="66f9b287-a2d3-4cb5-8dae-29884e733115" providerId="ADAL" clId="{937D3A49-D0E7-486D-BA98-5AD23D3FA812}" dt="2026-09-04T17:24:33.488" v="125" actId="113"/>
+          <ac:spMkLst>
+            <pc:docMk/>
+            <pc:sldMk cId="0" sldId="257"/>
+            <ac:spMk id="25" creationId="{00000000-0000-0000-0000-000000000000}"/>
+          </ac:spMkLst>
+        </pc:spChg>
+        <pc:spChg chg="mod">
+          <ac:chgData name="Adithya Sivakumar" userId="66f9b287-a2d3-4cb5-8dae-29884e733115" providerId="ADAL" clId="{937D3A49-D0E7-486D-BA98-5AD23D3FA812}" dt="2026-09-04T17:24:11.435" v="119" actId="1076"/>
+          <ac:spMkLst>
+            <pc:docMk/>
+            <pc:sldMk cId="0" sldId="257"/>
+            <ac:spMk id="27" creationId="{00000000-0000-0000-0000-000000000000}"/>
+          </ac:spMkLst>
+        </pc:spChg>
+        <pc:spChg chg="mod">
+          <ac:chgData name="Adithya Sivakumar" userId="66f9b287-a2d3-4cb5-8dae-29884e733115" providerId="ADAL" clId="{937D3A49-D0E7-486D-BA98-5AD23D3FA812}" dt="2026-09-04T17:24:15.101" v="120" actId="14100"/>
+          <ac:spMkLst>
+            <pc:docMk/>
+            <pc:sldMk cId="0" sldId="257"/>
+            <ac:spMk id="28" creationId="{00000000-0000-0000-0000-000000000000}"/>
+          </ac:spMkLst>
+        </pc:spChg>
+        <pc:spChg chg="mod">
+          <ac:chgData name="Adithya Sivakumar" userId="66f9b287-a2d3-4cb5-8dae-29884e733115" providerId="ADAL" clId="{937D3A49-D0E7-486D-BA98-5AD23D3FA812}" dt="2026-09-04T17:24:35.324" v="126" actId="113"/>
+          <ac:spMkLst>
+            <pc:docMk/>
+            <pc:sldMk cId="0" sldId="257"/>
+            <ac:spMk id="29" creationId="{00000000-0000-0000-0000-000000000000}"/>
+          </ac:spMkLst>
+        </pc:spChg>
+        <pc:spChg chg="mod">
+          <ac:chgData name="Adithya Sivakumar" userId="66f9b287-a2d3-4cb5-8dae-29884e733115" providerId="ADAL" clId="{937D3A49-D0E7-486D-BA98-5AD23D3FA812}" dt="2026-09-04T17:24:21.479" v="121" actId="14100"/>
+          <ac:spMkLst>
+            <pc:docMk/>
+            <pc:sldMk cId="0" sldId="257"/>
+            <ac:spMk id="32" creationId="{00000000-0000-0000-0000-000000000000}"/>
+          </ac:spMkLst>
+        </pc:spChg>
+        <pc:spChg chg="mod">
+          <ac:chgData name="Adithya Sivakumar" userId="66f9b287-a2d3-4cb5-8dae-29884e733115" providerId="ADAL" clId="{937D3A49-D0E7-486D-BA98-5AD23D3FA812}" dt="2026-09-04T17:24:40.188" v="128" actId="113"/>
+          <ac:spMkLst>
+            <pc:docMk/>
+            <pc:sldMk cId="0" sldId="257"/>
+            <ac:spMk id="33" creationId="{00000000-0000-0000-0000-000000000000}"/>
+          </ac:spMkLst>
+        </pc:spChg>
+        <pc:spChg chg="mod">
+          <ac:chgData name="Adithya Sivakumar" userId="66f9b287-a2d3-4cb5-8dae-29884e733115" providerId="ADAL" clId="{937D3A49-D0E7-486D-BA98-5AD23D3FA812}" dt="2026-09-04T17:24:26.221" v="122" actId="14100"/>
+          <ac:spMkLst>
+            <pc:docMk/>
+            <pc:sldMk cId="0" sldId="257"/>
+            <ac:spMk id="36" creationId="{00000000-0000-0000-0000-000000000000}"/>
+          </ac:spMkLst>
+        </pc:spChg>
+        <pc:spChg chg="mod">
+          <ac:chgData name="Adithya Sivakumar" userId="66f9b287-a2d3-4cb5-8dae-29884e733115" providerId="ADAL" clId="{937D3A49-D0E7-486D-BA98-5AD23D3FA812}" dt="2026-09-04T17:24:38.658" v="127" actId="113"/>
+          <ac:spMkLst>
+            <pc:docMk/>
+            <pc:sldMk cId="0" sldId="257"/>
+            <ac:spMk id="37" creationId="{00000000-0000-0000-0000-000000000000}"/>
+          </ac:spMkLst>
+        </pc:spChg>
+      </pc:sldChg>
+      <pc:sldChg chg="new del">
+        <pc:chgData name="Adithya Sivakumar" userId="66f9b287-a2d3-4cb5-8dae-29884e733115" providerId="ADAL" clId="{937D3A49-D0E7-486D-BA98-5AD23D3FA812}" dt="2026-09-04T17:18:09.441" v="50" actId="680"/>
+        <pc:sldMkLst>
+          <pc:docMk/>
+          <pc:sldMk cId="186793127" sldId="275"/>
+        </pc:sldMkLst>
+      </pc:sldChg>
+      <pc:sldMasterChg chg="addSp mod">
+        <pc:chgData name="Adithya Sivakumar" userId="66f9b287-a2d3-4cb5-8dae-29884e733115" providerId="ADAL" clId="{937D3A49-D0E7-486D-BA98-5AD23D3FA812}" dt="2026-09-04T17:25:34.983" v="137" actId="22"/>
+        <pc:sldMasterMkLst>
+          <pc:docMk/>
+          <pc:sldMasterMk cId="2209977519" sldId="2147483648"/>
+        </pc:sldMasterMkLst>
+        <pc:picChg chg="add">
+          <ac:chgData name="Adithya Sivakumar" userId="66f9b287-a2d3-4cb5-8dae-29884e733115" providerId="ADAL" clId="{937D3A49-D0E7-486D-BA98-5AD23D3FA812}" dt="2026-09-04T17:25:34.983" v="137" actId="22"/>
+          <ac:picMkLst>
+            <pc:docMk/>
+            <pc:sldMasterMk cId="2209977519" sldId="2147483648"/>
+            <ac:picMk id="8" creationId="{0DCF94A4-B4AE-75FD-878C-55D8C0515977}"/>
+          </ac:picMkLst>
+        </pc:picChg>
+      </pc:sldMasterChg>
+    </pc:docChg>
+  </pc:docChgLst>
+</pc:chgInfo>
+</file>
+
+<file path=ppt/notesMasters/notesMaster1.xml><?xml version="1.0" encoding="utf-8"?>
+<p:notesMaster xmlns:a="http://schemas.openxmlformats.org/drawingml/2006/main" xmlns:r="http://schemas.openxmlformats.org/officeDocument/2006/relationships" xmlns:p="http://schemas.openxmlformats.org/presentationml/2006/main">
+  <p:cSld>
+    <p:bg>
+      <p:bgRef idx="1001">
+        <a:schemeClr val="bg1"/>
+      </p:bgRef>
+    </p:bg>
+    <p:spTree>
+      <p:nvGrpSpPr>
+        <p:cNvPr id="1" name=""/>
+        <p:cNvGrpSpPr/>
+        <p:nvPr/>
+      </p:nvGrpSpPr>
+      <p:grpSpPr>
+        <a:xfrm>
+          <a:off x="0" y="0"/>
+          <a:ext cx="0" cy="0"/>
+          <a:chOff x="0" y="0"/>
+          <a:chExt cx="0" cy="0"/>
+        </a:xfrm>
+      </p:grpSpPr>
+      <p:sp>
+        <p:nvSpPr>
+          <p:cNvPr id="2" name="Header Placeholder 1"/>
+          <p:cNvSpPr>
+            <a:spLocks noGrp="1"/>
+          </p:cNvSpPr>
+          <p:nvPr>
+            <p:ph type="hdr" sz="quarter"/>
+          </p:nvPr>
+        </p:nvSpPr>
+        <p:spPr>
+          <a:xfrm>
+            <a:off x="0" y="0"/>
+            <a:ext cx="2971800" cy="458788"/>
+          </a:xfrm>
+          <a:prstGeom prst="rect">
+            <a:avLst/>
+          </a:prstGeom>
+        </p:spPr>
+        <p:txBody>
+          <a:bodyPr vert="horz" lIns="91440" tIns="45720" rIns="91440" bIns="45720" rtlCol="0"/>
+          <a:lstStyle>
+            <a:lvl1pPr algn="l">
+              <a:defRPr sz="1200"/>
+            </a:lvl1pPr>
+          </a:lstStyle>
+          <a:p>
+            <a:endParaRPr lang="en-SE"/>
+          </a:p>
+        </p:txBody>
+      </p:sp>
+      <p:sp>
+        <p:nvSpPr>
+          <p:cNvPr id="3" name="Date Placeholder 2"/>
+          <p:cNvSpPr>
+            <a:spLocks noGrp="1"/>
+          </p:cNvSpPr>
+          <p:nvPr>
+            <p:ph type="dt" idx="1"/>
+          </p:nvPr>
+        </p:nvSpPr>
+        <p:spPr>
+          <a:xfrm>
+            <a:off x="3884613" y="0"/>
+            <a:ext cx="2971800" cy="458788"/>
+          </a:xfrm>
+          <a:prstGeom prst="rect">
+            <a:avLst/>
+          </a:prstGeom>
+        </p:spPr>
+        <p:txBody>
+          <a:bodyPr vert="horz" lIns="91440" tIns="45720" rIns="91440" bIns="45720" rtlCol="0"/>
+          <a:lstStyle>
+            <a:lvl1pPr algn="r">
+              <a:defRPr sz="1200"/>
+            </a:lvl1pPr>
+          </a:lstStyle>
+          <a:p>
+            <a:fld id="{9365FE33-248B-418E-80DF-32EE702ADF6F}" type="datetimeFigureOut">
+              <a:rPr lang="en-SE" smtClean="0"/>
+              <a:t>2026-09-04</a:t>
+            </a:fld>
+            <a:endParaRPr lang="en-SE"/>
+          </a:p>
+        </p:txBody>
+      </p:sp>
+      <p:sp>
+        <p:nvSpPr>
+          <p:cNvPr id="4" name="Slide Image Placeholder 3"/>
+          <p:cNvSpPr>
+            <a:spLocks noGrp="1" noRot="1" noChangeAspect="1"/>
+          </p:cNvSpPr>
+          <p:nvPr>
+            <p:ph type="sldImg" idx="2"/>
+          </p:nvPr>
+        </p:nvSpPr>
+        <p:spPr>
+          <a:xfrm>
+            <a:off x="685800" y="1143000"/>
+            <a:ext cx="5486400" cy="3086100"/>
+          </a:xfrm>
+          <a:prstGeom prst="rect">
+            <a:avLst/>
+          </a:prstGeom>
+          <a:noFill/>
+          <a:ln w="12700">
+            <a:solidFill>
+              <a:prstClr val="black"/>
+            </a:solidFill>
+          </a:ln>
+        </p:spPr>
+        <p:txBody>
+          <a:bodyPr vert="horz" lIns="91440" tIns="45720" rIns="91440" bIns="45720" rtlCol="0" anchor="ctr"/>
+          <a:lstStyle/>
+          <a:p>
+            <a:endParaRPr lang="en-SE"/>
+          </a:p>
+        </p:txBody>
+      </p:sp>
+      <p:sp>
+        <p:nvSpPr>
+          <p:cNvPr id="5" name="Notes Placeholder 4"/>
+          <p:cNvSpPr>
+            <a:spLocks noGrp="1"/>
+          </p:cNvSpPr>
+          <p:nvPr>
+            <p:ph type="body" sz="quarter" idx="3"/>
+          </p:nvPr>
+        </p:nvSpPr>
+        <p:spPr>
+          <a:xfrm>
+            <a:off x="685800" y="4400550"/>
+            <a:ext cx="5486400" cy="3600450"/>
+          </a:xfrm>
+          <a:prstGeom prst="rect">
+            <a:avLst/>
+          </a:prstGeom>
+        </p:spPr>
+        <p:txBody>
+          <a:bodyPr vert="horz" lIns="91440" tIns="45720" rIns="91440" bIns="45720" rtlCol="0"/>
+          <a:lstStyle/>
+          <a:p>
+            <a:pPr lvl="0"/>
+            <a:r>
+              <a:rPr lang="en-US"/>
+              <a:t>Click to edit Master text styles</a:t>
+            </a:r>
+          </a:p>
+          <a:p>
+            <a:pPr lvl="1"/>
+            <a:r>
+              <a:rPr lang="en-US"/>
+              <a:t>Second level</a:t>
+            </a:r>
+          </a:p>
+          <a:p>
+            <a:pPr lvl="2"/>
+            <a:r>
+              <a:rPr lang="en-US"/>
+              <a:t>Third level</a:t>
+            </a:r>
+          </a:p>
+          <a:p>
+            <a:pPr lvl="3"/>
+            <a:r>
+              <a:rPr lang="en-US"/>
+              <a:t>Fourth level</a:t>
+            </a:r>
+          </a:p>
+          <a:p>
+            <a:pPr lvl="4"/>
+            <a:r>
+              <a:rPr lang="en-US"/>
+              <a:t>Fifth level</a:t>
+            </a:r>
+            <a:endParaRPr lang="en-SE"/>
+          </a:p>
+        </p:txBody>
+      </p:sp>
+      <p:sp>
+        <p:nvSpPr>
+          <p:cNvPr id="6" name="Footer Placeholder 5"/>
+          <p:cNvSpPr>
+            <a:spLocks noGrp="1"/>
+          </p:cNvSpPr>
+          <p:nvPr>
+            <p:ph type="ftr" sz="quarter" idx="4"/>
+          </p:nvPr>
+        </p:nvSpPr>
+        <p:spPr>
+          <a:xfrm>
+            <a:off x="0" y="8685213"/>
+            <a:ext cx="2971800" cy="458787"/>
+          </a:xfrm>
+          <a:prstGeom prst="rect">
+            <a:avLst/>
+          </a:prstGeom>
+        </p:spPr>
+        <p:txBody>
+          <a:bodyPr vert="horz" lIns="91440" tIns="45720" rIns="91440" bIns="45720" rtlCol="0" anchor="b"/>
+          <a:lstStyle>
+            <a:lvl1pPr algn="l">
+              <a:defRPr sz="1200"/>
+            </a:lvl1pPr>
+          </a:lstStyle>
+          <a:p>
+            <a:endParaRPr lang="en-SE"/>
+          </a:p>
+        </p:txBody>
+      </p:sp>
+      <p:sp>
+        <p:nvSpPr>
+          <p:cNvPr id="7" name="Slide Number Placeholder 6"/>
+          <p:cNvSpPr>
+            <a:spLocks noGrp="1"/>
+          </p:cNvSpPr>
+          <p:nvPr>
+            <p:ph type="sldNum" sz="quarter" idx="5"/>
+          </p:nvPr>
+        </p:nvSpPr>
+        <p:spPr>
+          <a:xfrm>
+            <a:off x="3884613" y="8685213"/>
+            <a:ext cx="2971800" cy="458787"/>
+          </a:xfrm>
+          <a:prstGeom prst="rect">
+            <a:avLst/>
+          </a:prstGeom>
+        </p:spPr>
+        <p:txBody>
+          <a:bodyPr vert="horz" lIns="91440" tIns="45720" rIns="91440" bIns="45720" rtlCol="0" anchor="b"/>
+          <a:lstStyle>
+            <a:lvl1pPr algn="r">
+              <a:defRPr sz="1200"/>
+            </a:lvl1pPr>
+          </a:lstStyle>
+          <a:p>
+            <a:fld id="{3973D6B5-9C92-4220-B47A-53362BAF60D8}" type="slidenum">
+              <a:rPr lang="en-SE" smtClean="0"/>
+              <a:t>‹#›</a:t>
+            </a:fld>
+            <a:endParaRPr lang="en-SE"/>
+          </a:p>
+        </p:txBody>
+      </p:sp>
+    </p:spTree>
+    <p:extLst>
+      <p:ext uri="{BB962C8B-B14F-4D97-AF65-F5344CB8AC3E}">
+        <p14:creationId xmlns:p14="http://schemas.microsoft.com/office/powerpoint/2010/main" val="206217802"/>
+      </p:ext>
+    </p:extLst>
+  </p:cSld>
+  <p:clrMap bg1="lt1" tx1="dk1" bg2="lt2" tx2="dk2" accent1="accent1" accent2="accent2" accent3="accent3" accent4="accent4" accent5="accent5" accent6="accent6" hlink="hlink" folHlink="folHlink"/>
+  <p:notesStyle>
+    <a:lvl1pPr marL="0" algn="l" defTabSz="914400" rtl="0" eaLnBrk="1" latinLnBrk="0" hangingPunct="1">
+      <a:defRPr sz="1200" kern="1200">
+        <a:solidFill>
+          <a:schemeClr val="tx1"/>
+        </a:solidFill>
+        <a:latin typeface="+mn-lt"/>
+        <a:ea typeface="+mn-ea"/>
+        <a:cs typeface="+mn-cs"/>
+      </a:defRPr>
+    </a:lvl1pPr>
+    <a:lvl2pPr marL="457200" algn="l" defTabSz="914400" rtl="0" eaLnBrk="1" latinLnBrk="0" hangingPunct="1">
+      <a:defRPr sz="1200" kern="1200">
+        <a:solidFill>
+          <a:schemeClr val="tx1"/>
+        </a:solidFill>
+        <a:latin typeface="+mn-lt"/>
+        <a:ea typeface="+mn-ea"/>
+        <a:cs typeface="+mn-cs"/>
+      </a:defRPr>
+    </a:lvl2pPr>
+    <a:lvl3pPr marL="914400" algn="l" defTabSz="914400" rtl="0" eaLnBrk="1" latinLnBrk="0" hangingPunct="1">
+      <a:defRPr sz="1200" kern="1200">
+        <a:solidFill>
+          <a:schemeClr val="tx1"/>
+        </a:solidFill>
+        <a:latin typeface="+mn-lt"/>
+        <a:ea typeface="+mn-ea"/>
+        <a:cs typeface="+mn-cs"/>
+      </a:defRPr>
+    </a:lvl3pPr>
+    <a:lvl4pPr marL="1371600" algn="l" defTabSz="914400" rtl="0" eaLnBrk="1" latinLnBrk="0" hangingPunct="1">
+      <a:defRPr sz="1200" kern="1200">
+        <a:solidFill>
+          <a:schemeClr val="tx1"/>
+        </a:solidFill>
+        <a:latin typeface="+mn-lt"/>
+        <a:ea typeface="+mn-ea"/>
+        <a:cs typeface="+mn-cs"/>
+      </a:defRPr>
+    </a:lvl4pPr>
+    <a:lvl5pPr marL="1828800" algn="l" defTabSz="914400" rtl="0" eaLnBrk="1" latinLnBrk="0" hangingPunct="1">
+      <a:defRPr sz="1200" kern="1200">
+        <a:solidFill>
+          <a:schemeClr val="tx1"/>
+        </a:solidFill>
+        <a:latin typeface="+mn-lt"/>
+        <a:ea typeface="+mn-ea"/>
+        <a:cs typeface="+mn-cs"/>
+      </a:defRPr>
+    </a:lvl5pPr>
+    <a:lvl6pPr marL="2286000" algn="l" defTabSz="914400" rtl="0" eaLnBrk="1" latinLnBrk="0" hangingPunct="1">
+      <a:defRPr sz="1200" kern="1200">
+        <a:solidFill>
+          <a:schemeClr val="tx1"/>
+        </a:solidFill>
+        <a:latin typeface="+mn-lt"/>
+        <a:ea typeface="+mn-ea"/>
+        <a:cs typeface="+mn-cs"/>
+      </a:defRPr>
+    </a:lvl6pPr>
+    <a:lvl7pPr marL="2743200" algn="l" defTabSz="914400" rtl="0" eaLnBrk="1" latinLnBrk="0" hangingPunct="1">
+      <a:defRPr sz="1200" kern="1200">
+        <a:solidFill>
+          <a:schemeClr val="tx1"/>
+        </a:solidFill>
+        <a:latin typeface="+mn-lt"/>
+        <a:ea typeface="+mn-ea"/>
+        <a:cs typeface="+mn-cs"/>
+      </a:defRPr>
+    </a:lvl7pPr>
+    <a:lvl8pPr marL="3200400" algn="l" defTabSz="914400" rtl="0" eaLnBrk="1" latinLnBrk="0" hangingPunct="1">
+      <a:defRPr sz="1200" kern="1200">
+        <a:solidFill>
+          <a:schemeClr val="tx1"/>
+        </a:solidFill>
+        <a:latin typeface="+mn-lt"/>
+        <a:ea typeface="+mn-ea"/>
+        <a:cs typeface="+mn-cs"/>
+      </a:defRPr>
+    </a:lvl8pPr>
+    <a:lvl9pPr marL="3657600" algn="l" defTabSz="914400" rtl="0" eaLnBrk="1" latinLnBrk="0" hangingPunct="1">
+      <a:defRPr sz="1200" kern="1200">
+        <a:solidFill>
+          <a:schemeClr val="tx1"/>
+        </a:solidFill>
+        <a:latin typeface="+mn-lt"/>
+        <a:ea typeface="+mn-ea"/>
+        <a:cs typeface="+mn-cs"/>
+      </a:defRPr>
+    </a:lvl9pPr>
+  </p:notesStyle>
+</p:notesMaster>
+</file>
+
+<file path=ppt/notesSlides/notesSlide1.xml><?xml version="1.0" encoding="utf-8"?>
+<p:notes xmlns:a="http://schemas.openxmlformats.org/drawingml/2006/main" xmlns:r="http://schemas.openxmlformats.org/officeDocument/2006/relationships" xmlns:p="http://schemas.openxmlformats.org/presentationml/2006/main">
+  <p:cSld>
+    <p:spTree>
+      <p:nvGrpSpPr>
+        <p:cNvPr id="1" name=""/>
+        <p:cNvGrpSpPr/>
+        <p:nvPr/>
+      </p:nvGrpSpPr>
+      <p:grpSpPr>
+        <a:xfrm>
+          <a:off x="0" y="0"/>
+          <a:ext cx="0" cy="0"/>
+          <a:chOff x="0" y="0"/>
+          <a:chExt cx="0" cy="0"/>
+        </a:xfrm>
+      </p:grpSpPr>
+      <p:sp>
+        <p:nvSpPr>
+          <p:cNvPr id="2" name="Slide Image Placeholder 1"/>
+          <p:cNvSpPr>
+            <a:spLocks noGrp="1" noRot="1" noChangeAspect="1"/>
+          </p:cNvSpPr>
+          <p:nvPr>
+            <p:ph type="sldImg"/>
+          </p:nvPr>
+        </p:nvSpPr>
+        <p:spPr/>
+      </p:sp>
+      <p:sp>
+        <p:nvSpPr>
+          <p:cNvPr id="3" name="Notes Placeholder 2"/>
+          <p:cNvSpPr>
+            <a:spLocks noGrp="1"/>
+          </p:cNvSpPr>
+          <p:nvPr>
+            <p:ph type="body" idx="1"/>
+          </p:nvPr>
+        </p:nvSpPr>
+        <p:spPr/>
+        <p:txBody>
+          <a:bodyPr/>
+          <a:lstStyle/>
+          <a:p>
+            <a:endParaRPr lang="en-SE" dirty="0"/>
+          </a:p>
+        </p:txBody>
+      </p:sp>
+      <p:sp>
+        <p:nvSpPr>
+          <p:cNvPr id="4" name="Slide Number Placeholder 3"/>
+          <p:cNvSpPr>
+            <a:spLocks noGrp="1"/>
+          </p:cNvSpPr>
+          <p:nvPr>
+            <p:ph type="sldNum" sz="quarter" idx="5"/>
+          </p:nvPr>
+        </p:nvSpPr>
+        <p:spPr/>
+        <p:txBody>
+          <a:bodyPr/>
+          <a:lstStyle/>
+          <a:p>
+            <a:fld id="{3973D6B5-9C92-4220-B47A-53362BAF60D8}" type="slidenum">
+              <a:rPr lang="en-SE" smtClean="0"/>
+              <a:t>1</a:t>
+            </a:fld>
+            <a:endParaRPr lang="en-SE"/>
+          </a:p>
+        </p:txBody>
+      </p:sp>
+    </p:spTree>
+    <p:extLst>
+      <p:ext uri="{BB962C8B-B14F-4D97-AF65-F5344CB8AC3E}">
+        <p14:creationId xmlns:p14="http://schemas.microsoft.com/office/powerpoint/2010/main" val="3036490870"/>
+      </p:ext>
+    </p:extLst>
+  </p:cSld>
+  <p:clrMapOvr>
+    <a:masterClrMapping/>
+  </p:clrMapOvr>
+</p:notes>
 </file>
 
 <file path=ppt/slideLayouts/slideLayout1.xml><?xml version="1.0" encoding="utf-8"?>
@@ -163,10 +882,9 @@
           <a:lstStyle/>
           <a:p>
             <a:r>
-              <a:rPr lang="en-US" smtClean="0"/>
+              <a:rPr lang="en-US"/>
               <a:t>Click to edit Master title style</a:t>
             </a:r>
-            <a:endParaRPr lang="en-US"/>
           </a:p>
         </p:txBody>
       </p:sp>
@@ -282,10 +1000,9 @@
           </a:lstStyle>
           <a:p>
             <a:r>
-              <a:rPr lang="en-US" smtClean="0"/>
+              <a:rPr lang="en-US"/>
               <a:t>Click to edit Master subtitle style</a:t>
             </a:r>
-            <a:endParaRPr lang="en-US"/>
           </a:p>
         </p:txBody>
       </p:sp>
@@ -306,7 +1023,7 @@
           <a:p>
             <a:fld id="{5BCAD085-E8A6-8845-BD4E-CB4CCA059FC4}" type="datetimeFigureOut">
               <a:rPr lang="en-US" smtClean="0"/>
-              <a:t>1/27/13</a:t>
+              <a:t>9/4/2026</a:t>
             </a:fld>
             <a:endParaRPr lang="en-US"/>
           </a:p>
@@ -400,10 +1117,9 @@
           <a:lstStyle/>
           <a:p>
             <a:r>
-              <a:rPr lang="en-US" smtClean="0"/>
+              <a:rPr lang="en-US"/>
               <a:t>Click to edit Master title style</a:t>
             </a:r>
-            <a:endParaRPr lang="en-US"/>
           </a:p>
         </p:txBody>
       </p:sp>
@@ -424,38 +1140,37 @@
           <a:p>
             <a:pPr lvl="0"/>
             <a:r>
-              <a:rPr lang="en-US" smtClean="0"/>
+              <a:rPr lang="en-US"/>
               <a:t>Click to edit Master text styles</a:t>
             </a:r>
           </a:p>
           <a:p>
             <a:pPr lvl="1"/>
             <a:r>
-              <a:rPr lang="en-US" smtClean="0"/>
+              <a:rPr lang="en-US"/>
               <a:t>Second level</a:t>
             </a:r>
           </a:p>
           <a:p>
             <a:pPr lvl="2"/>
             <a:r>
-              <a:rPr lang="en-US" smtClean="0"/>
+              <a:rPr lang="en-US"/>
               <a:t>Third level</a:t>
             </a:r>
           </a:p>
           <a:p>
             <a:pPr lvl="3"/>
             <a:r>
-              <a:rPr lang="en-US" smtClean="0"/>
+              <a:rPr lang="en-US"/>
               <a:t>Fourth level</a:t>
             </a:r>
           </a:p>
           <a:p>
             <a:pPr lvl="4"/>
             <a:r>
-              <a:rPr lang="en-US" smtClean="0"/>
+              <a:rPr lang="en-US"/>
               <a:t>Fifth level</a:t>
             </a:r>
-            <a:endParaRPr lang="en-US"/>
           </a:p>
         </p:txBody>
       </p:sp>
@@ -476,7 +1191,7 @@
           <a:p>
             <a:fld id="{5BCAD085-E8A6-8845-BD4E-CB4CCA059FC4}" type="datetimeFigureOut">
               <a:rPr lang="en-US" smtClean="0"/>
-              <a:t>1/27/13</a:t>
+              <a:t>9/4/2026</a:t>
             </a:fld>
             <a:endParaRPr lang="en-US"/>
           </a:p>
@@ -575,10 +1290,9 @@
           <a:lstStyle/>
           <a:p>
             <a:r>
-              <a:rPr lang="en-US" smtClean="0"/>
+              <a:rPr lang="en-US"/>
               <a:t>Click to edit Master title style</a:t>
             </a:r>
-            <a:endParaRPr lang="en-US"/>
           </a:p>
         </p:txBody>
       </p:sp>
@@ -604,38 +1318,37 @@
           <a:p>
             <a:pPr lvl="0"/>
             <a:r>
-              <a:rPr lang="en-US" smtClean="0"/>
+              <a:rPr lang="en-US"/>
               <a:t>Click to edit Master text styles</a:t>
             </a:r>
           </a:p>
           <a:p>
             <a:pPr lvl="1"/>
             <a:r>
-              <a:rPr lang="en-US" smtClean="0"/>
+              <a:rPr lang="en-US"/>
               <a:t>Second level</a:t>
             </a:r>
           </a:p>
           <a:p>
             <a:pPr lvl="2"/>
             <a:r>
-              <a:rPr lang="en-US" smtClean="0"/>
+              <a:rPr lang="en-US"/>
               <a:t>Third level</a:t>
             </a:r>
           </a:p>
           <a:p>
             <a:pPr lvl="3"/>
             <a:r>
-              <a:rPr lang="en-US" smtClean="0"/>
+              <a:rPr lang="en-US"/>
               <a:t>Fourth level</a:t>
             </a:r>
           </a:p>
           <a:p>
             <a:pPr lvl="4"/>
             <a:r>
-              <a:rPr lang="en-US" smtClean="0"/>
+              <a:rPr lang="en-US"/>
               <a:t>Fifth level</a:t>
             </a:r>
-            <a:endParaRPr lang="en-US"/>
           </a:p>
         </p:txBody>
       </p:sp>
@@ -656,7 +1369,7 @@
           <a:p>
             <a:fld id="{5BCAD085-E8A6-8845-BD4E-CB4CCA059FC4}" type="datetimeFigureOut">
               <a:rPr lang="en-US" smtClean="0"/>
-              <a:t>1/27/13</a:t>
+              <a:t>9/4/2026</a:t>
             </a:fld>
             <a:endParaRPr lang="en-US"/>
           </a:p>
@@ -750,10 +1463,9 @@
           <a:lstStyle/>
           <a:p>
             <a:r>
-              <a:rPr lang="en-US" smtClean="0"/>
+              <a:rPr lang="en-US"/>
               <a:t>Click to edit Master title style</a:t>
             </a:r>
-            <a:endParaRPr lang="en-US"/>
           </a:p>
         </p:txBody>
       </p:sp>
@@ -774,38 +1486,37 @@
           <a:p>
             <a:pPr lvl="0"/>
             <a:r>
-              <a:rPr lang="en-US" smtClean="0"/>
+              <a:rPr lang="en-US"/>
               <a:t>Click to edit Master text styles</a:t>
             </a:r>
           </a:p>
           <a:p>
             <a:pPr lvl="1"/>
             <a:r>
-              <a:rPr lang="en-US" smtClean="0"/>
+              <a:rPr lang="en-US"/>
               <a:t>Second level</a:t>
             </a:r>
           </a:p>
           <a:p>
             <a:pPr lvl="2"/>
             <a:r>
-              <a:rPr lang="en-US" smtClean="0"/>
+              <a:rPr lang="en-US"/>
               <a:t>Third level</a:t>
             </a:r>
           </a:p>
           <a:p>
             <a:pPr lvl="3"/>
             <a:r>
-              <a:rPr lang="en-US" smtClean="0"/>
+              <a:rPr lang="en-US"/>
               <a:t>Fourth level</a:t>
             </a:r>
           </a:p>
           <a:p>
             <a:pPr lvl="4"/>
             <a:r>
-              <a:rPr lang="en-US" smtClean="0"/>
+              <a:rPr lang="en-US"/>
               <a:t>Fifth level</a:t>
             </a:r>
-            <a:endParaRPr lang="en-US"/>
           </a:p>
         </p:txBody>
       </p:sp>
@@ -826,7 +1537,7 @@
           <a:p>
             <a:fld id="{5BCAD085-E8A6-8845-BD4E-CB4CCA059FC4}" type="datetimeFigureOut">
               <a:rPr lang="en-US" smtClean="0"/>
-              <a:t>1/27/13</a:t>
+              <a:t>9/4/2026</a:t>
             </a:fld>
             <a:endParaRPr lang="en-US"/>
           </a:p>
@@ -929,10 +1640,9 @@
           </a:lstStyle>
           <a:p>
             <a:r>
-              <a:rPr lang="en-US" smtClean="0"/>
+              <a:rPr lang="en-US"/>
               <a:t>Click to edit Master title style</a:t>
             </a:r>
-            <a:endParaRPr lang="en-US"/>
           </a:p>
         </p:txBody>
       </p:sp>
@@ -1049,7 +1759,7 @@
           <a:p>
             <a:pPr lvl="0"/>
             <a:r>
-              <a:rPr lang="en-US" smtClean="0"/>
+              <a:rPr lang="en-US"/>
               <a:t>Click to edit Master text styles</a:t>
             </a:r>
           </a:p>
@@ -1072,7 +1782,7 @@
           <a:p>
             <a:fld id="{5BCAD085-E8A6-8845-BD4E-CB4CCA059FC4}" type="datetimeFigureOut">
               <a:rPr lang="en-US" smtClean="0"/>
-              <a:t>1/27/13</a:t>
+              <a:t>9/4/2026</a:t>
             </a:fld>
             <a:endParaRPr lang="en-US"/>
           </a:p>
@@ -1166,10 +1876,9 @@
           <a:lstStyle/>
           <a:p>
             <a:r>
-              <a:rPr lang="en-US" smtClean="0"/>
+              <a:rPr lang="en-US"/>
               <a:t>Click to edit Master title style</a:t>
             </a:r>
-            <a:endParaRPr lang="en-US"/>
           </a:p>
         </p:txBody>
       </p:sp>
@@ -1223,38 +1932,37 @@
           <a:p>
             <a:pPr lvl="0"/>
             <a:r>
-              <a:rPr lang="en-US" smtClean="0"/>
+              <a:rPr lang="en-US"/>
               <a:t>Click to edit Master text styles</a:t>
             </a:r>
           </a:p>
           <a:p>
             <a:pPr lvl="1"/>
             <a:r>
-              <a:rPr lang="en-US" smtClean="0"/>
+              <a:rPr lang="en-US"/>
               <a:t>Second level</a:t>
             </a:r>
           </a:p>
           <a:p>
             <a:pPr lvl="2"/>
             <a:r>
-              <a:rPr lang="en-US" smtClean="0"/>
+              <a:rPr lang="en-US"/>
               <a:t>Third level</a:t>
             </a:r>
           </a:p>
           <a:p>
             <a:pPr lvl="3"/>
             <a:r>
-              <a:rPr lang="en-US" smtClean="0"/>
+              <a:rPr lang="en-US"/>
               <a:t>Fourth level</a:t>
             </a:r>
           </a:p>
           <a:p>
             <a:pPr lvl="4"/>
             <a:r>
-              <a:rPr lang="en-US" smtClean="0"/>
+              <a:rPr lang="en-US"/>
               <a:t>Fifth level</a:t>
             </a:r>
-            <a:endParaRPr lang="en-US"/>
           </a:p>
         </p:txBody>
       </p:sp>
@@ -1308,38 +2016,37 @@
           <a:p>
             <a:pPr lvl="0"/>
             <a:r>
-              <a:rPr lang="en-US" smtClean="0"/>
+              <a:rPr lang="en-US"/>
               <a:t>Click to edit Master text styles</a:t>
             </a:r>
           </a:p>
           <a:p>
             <a:pPr lvl="1"/>
             <a:r>
-              <a:rPr lang="en-US" smtClean="0"/>
+              <a:rPr lang="en-US"/>
               <a:t>Second level</a:t>
             </a:r>
           </a:p>
           <a:p>
             <a:pPr lvl="2"/>
             <a:r>
-              <a:rPr lang="en-US" smtClean="0"/>
+              <a:rPr lang="en-US"/>
               <a:t>Third level</a:t>
             </a:r>
           </a:p>
           <a:p>
             <a:pPr lvl="3"/>
             <a:r>
-              <a:rPr lang="en-US" smtClean="0"/>
+              <a:rPr lang="en-US"/>
               <a:t>Fourth level</a:t>
             </a:r>
           </a:p>
           <a:p>
             <a:pPr lvl="4"/>
             <a:r>
-              <a:rPr lang="en-US" smtClean="0"/>
+              <a:rPr lang="en-US"/>
               <a:t>Fifth level</a:t>
             </a:r>
-            <a:endParaRPr lang="en-US"/>
           </a:p>
         </p:txBody>
       </p:sp>
@@ -1360,7 +2067,7 @@
           <a:p>
             <a:fld id="{5BCAD085-E8A6-8845-BD4E-CB4CCA059FC4}" type="datetimeFigureOut">
               <a:rPr lang="en-US" smtClean="0"/>
-              <a:t>1/27/13</a:t>
+              <a:t>9/4/2026</a:t>
             </a:fld>
             <a:endParaRPr lang="en-US"/>
           </a:p>
@@ -1458,10 +2165,9 @@
           </a:lstStyle>
           <a:p>
             <a:r>
-              <a:rPr lang="en-US" smtClean="0"/>
+              <a:rPr lang="en-US"/>
               <a:t>Click to edit Master title style</a:t>
             </a:r>
-            <a:endParaRPr lang="en-US"/>
           </a:p>
         </p:txBody>
       </p:sp>
@@ -1524,7 +2230,7 @@
           <a:p>
             <a:pPr lvl="0"/>
             <a:r>
-              <a:rPr lang="en-US" smtClean="0"/>
+              <a:rPr lang="en-US"/>
               <a:t>Click to edit Master text styles</a:t>
             </a:r>
           </a:p>
@@ -1580,38 +2286,37 @@
           <a:p>
             <a:pPr lvl="0"/>
             <a:r>
-              <a:rPr lang="en-US" smtClean="0"/>
+              <a:rPr lang="en-US"/>
               <a:t>Click to edit Master text styles</a:t>
             </a:r>
           </a:p>
           <a:p>
             <a:pPr lvl="1"/>
             <a:r>
-              <a:rPr lang="en-US" smtClean="0"/>
+              <a:rPr lang="en-US"/>
               <a:t>Second level</a:t>
             </a:r>
           </a:p>
           <a:p>
             <a:pPr lvl="2"/>
             <a:r>
-              <a:rPr lang="en-US" smtClean="0"/>
+              <a:rPr lang="en-US"/>
               <a:t>Third level</a:t>
             </a:r>
           </a:p>
           <a:p>
             <a:pPr lvl="3"/>
             <a:r>
-              <a:rPr lang="en-US" smtClean="0"/>
+              <a:rPr lang="en-US"/>
               <a:t>Fourth level</a:t>
             </a:r>
           </a:p>
           <a:p>
             <a:pPr lvl="4"/>
             <a:r>
-              <a:rPr lang="en-US" smtClean="0"/>
+              <a:rPr lang="en-US"/>
               <a:t>Fifth level</a:t>
             </a:r>
-            <a:endParaRPr lang="en-US"/>
           </a:p>
         </p:txBody>
       </p:sp>
@@ -1674,7 +2379,7 @@
           <a:p>
             <a:pPr lvl="0"/>
             <a:r>
-              <a:rPr lang="en-US" smtClean="0"/>
+              <a:rPr lang="en-US"/>
               <a:t>Click to edit Master text styles</a:t>
             </a:r>
           </a:p>
@@ -1730,38 +2435,37 @@
           <a:p>
             <a:pPr lvl="0"/>
             <a:r>
-              <a:rPr lang="en-US" smtClean="0"/>
+              <a:rPr lang="en-US"/>
               <a:t>Click to edit Master text styles</a:t>
             </a:r>
           </a:p>
           <a:p>
             <a:pPr lvl="1"/>
             <a:r>
-              <a:rPr lang="en-US" smtClean="0"/>
+              <a:rPr lang="en-US"/>
               <a:t>Second level</a:t>
             </a:r>
           </a:p>
           <a:p>
             <a:pPr lvl="2"/>
             <a:r>
-              <a:rPr lang="en-US" smtClean="0"/>
+              <a:rPr lang="en-US"/>
               <a:t>Third level</a:t>
             </a:r>
           </a:p>
           <a:p>
             <a:pPr lvl="3"/>
             <a:r>
-              <a:rPr lang="en-US" smtClean="0"/>
+              <a:rPr lang="en-US"/>
               <a:t>Fourth level</a:t>
             </a:r>
           </a:p>
           <a:p>
             <a:pPr lvl="4"/>
             <a:r>
-              <a:rPr lang="en-US" smtClean="0"/>
+              <a:rPr lang="en-US"/>
               <a:t>Fifth level</a:t>
             </a:r>
-            <a:endParaRPr lang="en-US"/>
           </a:p>
         </p:txBody>
       </p:sp>
@@ -1782,7 +2486,7 @@
           <a:p>
             <a:fld id="{5BCAD085-E8A6-8845-BD4E-CB4CCA059FC4}" type="datetimeFigureOut">
               <a:rPr lang="en-US" smtClean="0"/>
-              <a:t>1/27/13</a:t>
+              <a:t>9/4/2026</a:t>
             </a:fld>
             <a:endParaRPr lang="en-US"/>
           </a:p>
@@ -1876,10 +2580,9 @@
           <a:lstStyle/>
           <a:p>
             <a:r>
-              <a:rPr lang="en-US" smtClean="0"/>
+              <a:rPr lang="en-US"/>
               <a:t>Click to edit Master title style</a:t>
             </a:r>
-            <a:endParaRPr lang="en-US"/>
           </a:p>
         </p:txBody>
       </p:sp>
@@ -1900,7 +2603,7 @@
           <a:p>
             <a:fld id="{5BCAD085-E8A6-8845-BD4E-CB4CCA059FC4}" type="datetimeFigureOut">
               <a:rPr lang="en-US" smtClean="0"/>
-              <a:t>1/27/13</a:t>
+              <a:t>9/4/2026</a:t>
             </a:fld>
             <a:endParaRPr lang="en-US"/>
           </a:p>
@@ -1995,7 +2698,7 @@
           <a:p>
             <a:fld id="{5BCAD085-E8A6-8845-BD4E-CB4CCA059FC4}" type="datetimeFigureOut">
               <a:rPr lang="en-US" smtClean="0"/>
-              <a:t>1/27/13</a:t>
+              <a:t>9/4/2026</a:t>
             </a:fld>
             <a:endParaRPr lang="en-US"/>
           </a:p>
@@ -2098,10 +2801,9 @@
           </a:lstStyle>
           <a:p>
             <a:r>
-              <a:rPr lang="en-US" smtClean="0"/>
+              <a:rPr lang="en-US"/>
               <a:t>Click to edit Master title style</a:t>
             </a:r>
-            <a:endParaRPr lang="en-US"/>
           </a:p>
         </p:txBody>
       </p:sp>
@@ -2155,38 +2857,37 @@
           <a:p>
             <a:pPr lvl="0"/>
             <a:r>
-              <a:rPr lang="en-US" smtClean="0"/>
+              <a:rPr lang="en-US"/>
               <a:t>Click to edit Master text styles</a:t>
             </a:r>
           </a:p>
           <a:p>
             <a:pPr lvl="1"/>
             <a:r>
-              <a:rPr lang="en-US" smtClean="0"/>
+              <a:rPr lang="en-US"/>
               <a:t>Second level</a:t>
             </a:r>
           </a:p>
           <a:p>
             <a:pPr lvl="2"/>
             <a:r>
-              <a:rPr lang="en-US" smtClean="0"/>
+              <a:rPr lang="en-US"/>
               <a:t>Third level</a:t>
             </a:r>
           </a:p>
           <a:p>
             <a:pPr lvl="3"/>
             <a:r>
-              <a:rPr lang="en-US" smtClean="0"/>
+              <a:rPr lang="en-US"/>
               <a:t>Fourth level</a:t>
             </a:r>
           </a:p>
           <a:p>
             <a:pPr lvl="4"/>
             <a:r>
-              <a:rPr lang="en-US" smtClean="0"/>
+              <a:rPr lang="en-US"/>
               <a:t>Fifth level</a:t>
             </a:r>
-            <a:endParaRPr lang="en-US"/>
           </a:p>
         </p:txBody>
       </p:sp>
@@ -2249,7 +2950,7 @@
           <a:p>
             <a:pPr lvl="0"/>
             <a:r>
-              <a:rPr lang="en-US" smtClean="0"/>
+              <a:rPr lang="en-US"/>
               <a:t>Click to edit Master text styles</a:t>
             </a:r>
           </a:p>
@@ -2272,7 +2973,7 @@
           <a:p>
             <a:fld id="{5BCAD085-E8A6-8845-BD4E-CB4CCA059FC4}" type="datetimeFigureOut">
               <a:rPr lang="en-US" smtClean="0"/>
-              <a:t>1/27/13</a:t>
+              <a:t>9/4/2026</a:t>
             </a:fld>
             <a:endParaRPr lang="en-US"/>
           </a:p>
@@ -2375,10 +3076,9 @@
           </a:lstStyle>
           <a:p>
             <a:r>
-              <a:rPr lang="en-US" smtClean="0"/>
+              <a:rPr lang="en-US"/>
               <a:t>Click to edit Master title style</a:t>
             </a:r>
-            <a:endParaRPr lang="en-US"/>
           </a:p>
         </p:txBody>
       </p:sp>
@@ -2502,7 +3202,7 @@
           <a:p>
             <a:pPr lvl="0"/>
             <a:r>
-              <a:rPr lang="en-US" smtClean="0"/>
+              <a:rPr lang="en-US"/>
               <a:t>Click to edit Master text styles</a:t>
             </a:r>
           </a:p>
@@ -2525,7 +3225,7 @@
           <a:p>
             <a:fld id="{5BCAD085-E8A6-8845-BD4E-CB4CCA059FC4}" type="datetimeFigureOut">
               <a:rPr lang="en-US" smtClean="0"/>
-              <a:t>1/27/13</a:t>
+              <a:t>9/4/2026</a:t>
             </a:fld>
             <a:endParaRPr lang="en-US"/>
           </a:p>
@@ -2634,10 +3334,9 @@
           <a:lstStyle/>
           <a:p>
             <a:r>
-              <a:rPr lang="en-US" smtClean="0"/>
+              <a:rPr lang="en-US"/>
               <a:t>Click to edit Master title style</a:t>
             </a:r>
-            <a:endParaRPr lang="en-US"/>
           </a:p>
         </p:txBody>
       </p:sp>
@@ -2668,38 +3367,37 @@
           <a:p>
             <a:pPr lvl="0"/>
             <a:r>
-              <a:rPr lang="en-US" smtClean="0"/>
+              <a:rPr lang="en-US"/>
               <a:t>Click to edit Master text styles</a:t>
             </a:r>
           </a:p>
           <a:p>
             <a:pPr lvl="1"/>
             <a:r>
-              <a:rPr lang="en-US" smtClean="0"/>
+              <a:rPr lang="en-US"/>
               <a:t>Second level</a:t>
             </a:r>
           </a:p>
           <a:p>
             <a:pPr lvl="2"/>
             <a:r>
-              <a:rPr lang="en-US" smtClean="0"/>
+              <a:rPr lang="en-US"/>
               <a:t>Third level</a:t>
             </a:r>
           </a:p>
           <a:p>
             <a:pPr lvl="3"/>
             <a:r>
-              <a:rPr lang="en-US" smtClean="0"/>
+              <a:rPr lang="en-US"/>
               <a:t>Fourth level</a:t>
             </a:r>
           </a:p>
           <a:p>
             <a:pPr lvl="4"/>
             <a:r>
-              <a:rPr lang="en-US" smtClean="0"/>
+              <a:rPr lang="en-US"/>
               <a:t>Fifth level</a:t>
             </a:r>
-            <a:endParaRPr lang="en-US"/>
           </a:p>
         </p:txBody>
       </p:sp>
@@ -2738,7 +3436,7 @@
           <a:p>
             <a:fld id="{5BCAD085-E8A6-8845-BD4E-CB4CCA059FC4}" type="datetimeFigureOut">
               <a:rPr lang="en-US" smtClean="0"/>
-              <a:t>1/27/13</a:t>
+              <a:t>9/4/2026</a:t>
             </a:fld>
             <a:endParaRPr lang="en-US"/>
           </a:p>
@@ -2822,6 +3520,36 @@
           </a:p>
         </p:txBody>
       </p:sp>
+      <p:pic>
+        <p:nvPicPr>
+          <p:cNvPr id="8" name="Picture 7" descr="ju_mark.png">
+            <a:extLst>
+              <a:ext uri="{FF2B5EF4-FFF2-40B4-BE49-F238E27FC236}">
+                <a16:creationId xmlns:a16="http://schemas.microsoft.com/office/drawing/2014/main" id="{0DCF94A4-B4AE-75FD-878C-55D8C0515977}"/>
+              </a:ext>
+            </a:extLst>
+          </p:cNvPr>
+          <p:cNvPicPr>
+            <a:picLocks noChangeAspect="1"/>
+          </p:cNvPicPr>
+          <p:nvPr userDrawn="1"/>
+        </p:nvPicPr>
+        <p:blipFill>
+          <a:blip r:embed="rId13"/>
+          <a:stretch>
+            <a:fillRect/>
+          </a:stretch>
+        </p:blipFill>
+        <p:spPr>
+          <a:xfrm>
+            <a:off x="1188720" y="365760"/>
+            <a:ext cx="1069848" cy="475488"/>
+          </a:xfrm>
+          <a:prstGeom prst="rect">
+            <a:avLst/>
+          </a:prstGeom>
+        </p:spPr>
+      </p:pic>
     </p:spTree>
     <p:extLst>
       <p:ext uri="{BB962C8B-B14F-4D97-AF65-F5344CB8AC3E}">
@@ -3097,7 +3825,7 @@
 </file>
 
 <file path=ppt/slides/slide1.xml><?xml version="1.0" encoding="utf-8"?>
-<p:sld xmlns:a="http://schemas.openxmlformats.org/drawingml/2006/main" xmlns:p="http://schemas.openxmlformats.org/presentationml/2006/main" xmlns:r="http://schemas.openxmlformats.org/officeDocument/2006/relationships">
+<p:sld xmlns:a="http://schemas.openxmlformats.org/drawingml/2006/main" xmlns:r="http://schemas.openxmlformats.org/officeDocument/2006/relationships" xmlns:p="http://schemas.openxmlformats.org/presentationml/2006/main">
   <p:cSld>
     <p:spTree>
       <p:nvGrpSpPr>
@@ -3105,7 +3833,14 @@
         <p:cNvGrpSpPr/>
         <p:nvPr/>
       </p:nvGrpSpPr>
-      <p:grpSpPr/>
+      <p:grpSpPr>
+        <a:xfrm>
+          <a:off x="0" y="0"/>
+          <a:ext cx="0" cy="0"/>
+          <a:chOff x="0" y="0"/>
+          <a:chExt cx="0" cy="0"/>
+        </a:xfrm>
+      </p:grpSpPr>
       <p:sp>
         <p:nvSpPr>
           <p:cNvPr id="2" name="Rectangle 1"/>
@@ -3114,8 +3849,8 @@
         </p:nvSpPr>
         <p:spPr>
           <a:xfrm>
-            <a:off x="0" y="0"/>
-            <a:ext cx="12191695" cy="6858000"/>
+            <a:off x="-11887" y="-109728"/>
+            <a:ext cx="12191695" cy="6967728"/>
           </a:xfrm>
           <a:prstGeom prst="rect">
             <a:avLst/>
@@ -3147,6 +3882,7 @@
           <a:lstStyle/>
           <a:p>
             <a:pPr algn="ctr"/>
+            <a:endParaRPr/>
           </a:p>
         </p:txBody>
       </p:sp>
@@ -3158,7 +3894,7 @@
         </p:nvSpPr>
         <p:spPr>
           <a:xfrm>
-            <a:off x="274320" y="0"/>
+            <a:off x="0" y="-109728"/>
             <a:ext cx="475488" cy="914400"/>
           </a:xfrm>
           <a:prstGeom prst="rect">
@@ -3191,6 +3927,7 @@
           <a:lstStyle/>
           <a:p>
             <a:pPr algn="ctr"/>
+            <a:endParaRPr/>
           </a:p>
         </p:txBody>
       </p:sp>
@@ -3202,8 +3939,8 @@
         </p:nvSpPr>
         <p:spPr>
           <a:xfrm>
-            <a:off x="274320" y="1042415"/>
-            <a:ext cx="475488" cy="5815584"/>
+            <a:off x="0" y="932686"/>
+            <a:ext cx="475488" cy="5925314"/>
           </a:xfrm>
           <a:prstGeom prst="rect">
             <a:avLst/>
@@ -3235,6 +3972,7 @@
           <a:lstStyle/>
           <a:p>
             <a:pPr algn="ctr"/>
+            <a:endParaRPr/>
           </a:p>
         </p:txBody>
       </p:sp>
@@ -3247,7 +3985,7 @@
           <p:nvPr/>
         </p:nvPicPr>
         <p:blipFill>
-          <a:blip r:embed="rId2"/>
+          <a:blip r:embed="rId3"/>
           <a:stretch>
             <a:fillRect/>
           </a:stretch>
@@ -3303,6 +4041,7 @@
           <a:lstStyle/>
           <a:p>
             <a:pPr algn="ctr"/>
+            <a:endParaRPr/>
           </a:p>
         </p:txBody>
       </p:sp>
@@ -3347,6 +4086,7 @@
           <a:lstStyle/>
           <a:p>
             <a:pPr algn="ctr"/>
+            <a:endParaRPr/>
           </a:p>
         </p:txBody>
       </p:sp>
@@ -3391,6 +4131,7 @@
           <a:lstStyle/>
           <a:p>
             <a:pPr algn="ctr"/>
+            <a:endParaRPr/>
           </a:p>
         </p:txBody>
       </p:sp>
@@ -3402,8 +4143,8 @@
         </p:nvSpPr>
         <p:spPr>
           <a:xfrm>
-            <a:off x="1170432" y="1847088"/>
-            <a:ext cx="9692640" cy="2103120"/>
+            <a:off x="1188720" y="1906481"/>
+            <a:ext cx="9692640" cy="1567993"/>
           </a:xfrm>
           <a:prstGeom prst="rect">
             <a:avLst/>
@@ -3411,25 +4152,32 @@
           <a:noFill/>
         </p:spPr>
         <p:txBody>
-          <a:bodyPr wrap="square" anchor="t" lIns="0" rIns="0" tIns="0" bIns="0">
+          <a:bodyPr wrap="square" lIns="0" tIns="0" rIns="0" bIns="0" anchor="t">
             <a:spAutoFit/>
           </a:bodyPr>
           <a:lstStyle/>
           <a:p>
-            <a:pPr algn="l">
-              <a:lnSpc>
-                <a:spcPct val="100000"/>
-              </a:lnSpc>
-            </a:pPr>
-            <a:r>
-              <a:rPr sz="6600" b="0" i="0">
+            <a:pPr>
+              <a:lnSpc>
+                <a:spcPts val="6500"/>
+              </a:lnSpc>
+            </a:pPr>
+            <a:r>
+              <a:rPr lang="en-US" sz="4000" b="1" dirty="0">
                 <a:solidFill>
                   <a:srgbClr val="253439"/>
                 </a:solidFill>
-                <a:latin typeface="Segoe UI Light"/>
-              </a:rPr>
-              <a:t>PPD-UTM</a:t>
-            </a:r>
+                <a:latin typeface="Lato"/>
+              </a:rPr>
+              <a:t>1-D DIC IMPLEMENTATION ON UNIVERSAL TESTING MACHINE</a:t>
+            </a:r>
+            <a:endParaRPr lang="en-US" sz="4000" b="1" dirty="0">
+              <a:solidFill>
+                <a:srgbClr val="253439"/>
+              </a:solidFill>
+              <a:latin typeface="Lato"/>
+              <a:sym typeface="Lato"/>
+            </a:endParaRPr>
           </a:p>
         </p:txBody>
       </p:sp>
@@ -3441,7 +4189,7 @@
         </p:nvSpPr>
         <p:spPr>
           <a:xfrm>
-            <a:off x="1207008" y="2944368"/>
+            <a:off x="1225296" y="3658278"/>
             <a:ext cx="9692640" cy="548640"/>
           </a:xfrm>
           <a:prstGeom prst="rect">
@@ -3450,7 +4198,7 @@
           <a:noFill/>
         </p:spPr>
         <p:txBody>
-          <a:bodyPr wrap="square" anchor="t" lIns="0" rIns="0" tIns="0" bIns="0">
+          <a:bodyPr wrap="square" lIns="0" tIns="0" rIns="0" bIns="0" anchor="t">
             <a:spAutoFit/>
           </a:bodyPr>
           <a:lstStyle/>
@@ -3461,7 +4209,7 @@
               </a:lnSpc>
             </a:pPr>
             <a:r>
-              <a:rPr sz="1550" b="0" i="0">
+              <a:rPr sz="1550" b="0" i="0" dirty="0">
                 <a:solidFill>
                   <a:srgbClr val="7C898B"/>
                 </a:solidFill>
@@ -3472,138 +4220,162 @@
           </a:p>
         </p:txBody>
       </p:sp>
-      <p:sp>
-        <p:nvSpPr>
-          <p:cNvPr id="11" name="Rectangle 10"/>
-          <p:cNvSpPr/>
-          <p:nvPr/>
-        </p:nvSpPr>
-        <p:spPr>
-          <a:xfrm>
-            <a:off x="1207008" y="3602736"/>
-            <a:ext cx="1022299" cy="68580"/>
-          </a:xfrm>
-          <a:prstGeom prst="rect">
-            <a:avLst/>
-          </a:prstGeom>
-          <a:solidFill>
-            <a:srgbClr val="253439"/>
-          </a:solidFill>
-          <a:ln>
-            <a:noFill/>
-          </a:ln>
-          <a:effectLst/>
-        </p:spPr>
-        <p:style>
-          <a:lnRef idx="1">
-            <a:schemeClr val="accent1"/>
-          </a:lnRef>
-          <a:fillRef idx="3">
-            <a:schemeClr val="accent1"/>
-          </a:fillRef>
-          <a:effectRef idx="2">
-            <a:schemeClr val="accent1"/>
-          </a:effectRef>
-          <a:fontRef idx="minor">
-            <a:schemeClr val="lt1"/>
-          </a:fontRef>
-        </p:style>
-        <p:txBody>
-          <a:bodyPr rtlCol="0" anchor="ctr"/>
-          <a:lstStyle/>
-          <a:p>
-            <a:pPr algn="ctr"/>
-          </a:p>
-        </p:txBody>
-      </p:sp>
-      <p:sp>
-        <p:nvSpPr>
-          <p:cNvPr id="12" name="Rectangle 11"/>
-          <p:cNvSpPr/>
-          <p:nvPr/>
-        </p:nvSpPr>
-        <p:spPr>
-          <a:xfrm>
-            <a:off x="2229307" y="3602736"/>
-            <a:ext cx="511149" cy="68580"/>
-          </a:xfrm>
-          <a:prstGeom prst="rect">
-            <a:avLst/>
-          </a:prstGeom>
-          <a:solidFill>
-            <a:srgbClr val="B29E84"/>
-          </a:solidFill>
-          <a:ln>
-            <a:noFill/>
-          </a:ln>
-          <a:effectLst/>
-        </p:spPr>
-        <p:style>
-          <a:lnRef idx="1">
-            <a:schemeClr val="accent1"/>
-          </a:lnRef>
-          <a:fillRef idx="3">
-            <a:schemeClr val="accent1"/>
-          </a:fillRef>
-          <a:effectRef idx="2">
-            <a:schemeClr val="accent1"/>
-          </a:effectRef>
-          <a:fontRef idx="minor">
-            <a:schemeClr val="lt1"/>
-          </a:fontRef>
-        </p:style>
-        <p:txBody>
-          <a:bodyPr rtlCol="0" anchor="ctr"/>
-          <a:lstStyle/>
-          <a:p>
-            <a:pPr algn="ctr"/>
-          </a:p>
-        </p:txBody>
-      </p:sp>
-      <p:sp>
-        <p:nvSpPr>
-          <p:cNvPr id="13" name="Rectangle 12"/>
-          <p:cNvSpPr/>
-          <p:nvPr/>
-        </p:nvSpPr>
-        <p:spPr>
-          <a:xfrm>
-            <a:off x="2740456" y="3602736"/>
-            <a:ext cx="2398471" cy="68580"/>
-          </a:xfrm>
-          <a:prstGeom prst="rect">
-            <a:avLst/>
-          </a:prstGeom>
-          <a:solidFill>
-            <a:srgbClr val="7C898B"/>
-          </a:solidFill>
-          <a:ln>
-            <a:noFill/>
-          </a:ln>
-          <a:effectLst/>
-        </p:spPr>
-        <p:style>
-          <a:lnRef idx="1">
-            <a:schemeClr val="accent1"/>
-          </a:lnRef>
-          <a:fillRef idx="3">
-            <a:schemeClr val="accent1"/>
-          </a:fillRef>
-          <a:effectRef idx="2">
-            <a:schemeClr val="accent1"/>
-          </a:effectRef>
-          <a:fontRef idx="minor">
-            <a:schemeClr val="lt1"/>
-          </a:fontRef>
-        </p:style>
-        <p:txBody>
-          <a:bodyPr rtlCol="0" anchor="ctr"/>
-          <a:lstStyle/>
-          <a:p>
-            <a:pPr algn="ctr"/>
-          </a:p>
-        </p:txBody>
-      </p:sp>
+      <p:grpSp>
+        <p:nvGrpSpPr>
+          <p:cNvPr id="18" name="Group 17">
+            <a:extLst>
+              <a:ext uri="{FF2B5EF4-FFF2-40B4-BE49-F238E27FC236}">
+                <a16:creationId xmlns:a16="http://schemas.microsoft.com/office/drawing/2014/main" id="{F48D39A4-8D71-351D-01A2-1DEF03C7DE2C}"/>
+              </a:ext>
+            </a:extLst>
+          </p:cNvPr>
+          <p:cNvGrpSpPr/>
+          <p:nvPr/>
+        </p:nvGrpSpPr>
+        <p:grpSpPr>
+          <a:xfrm>
+            <a:off x="1213409" y="4156624"/>
+            <a:ext cx="3931919" cy="68580"/>
+            <a:chOff x="1207008" y="3602736"/>
+            <a:chExt cx="3931919" cy="68580"/>
+          </a:xfrm>
+        </p:grpSpPr>
+        <p:sp>
+          <p:nvSpPr>
+            <p:cNvPr id="11" name="Rectangle 10"/>
+            <p:cNvSpPr/>
+            <p:nvPr/>
+          </p:nvSpPr>
+          <p:spPr>
+            <a:xfrm>
+              <a:off x="1207008" y="3602736"/>
+              <a:ext cx="1022299" cy="68580"/>
+            </a:xfrm>
+            <a:prstGeom prst="rect">
+              <a:avLst/>
+            </a:prstGeom>
+            <a:solidFill>
+              <a:srgbClr val="253439"/>
+            </a:solidFill>
+            <a:ln>
+              <a:noFill/>
+            </a:ln>
+            <a:effectLst/>
+          </p:spPr>
+          <p:style>
+            <a:lnRef idx="1">
+              <a:schemeClr val="accent1"/>
+            </a:lnRef>
+            <a:fillRef idx="3">
+              <a:schemeClr val="accent1"/>
+            </a:fillRef>
+            <a:effectRef idx="2">
+              <a:schemeClr val="accent1"/>
+            </a:effectRef>
+            <a:fontRef idx="minor">
+              <a:schemeClr val="lt1"/>
+            </a:fontRef>
+          </p:style>
+          <p:txBody>
+            <a:bodyPr rtlCol="0" anchor="ctr"/>
+            <a:lstStyle/>
+            <a:p>
+              <a:pPr algn="ctr"/>
+              <a:endParaRPr/>
+            </a:p>
+          </p:txBody>
+        </p:sp>
+        <p:sp>
+          <p:nvSpPr>
+            <p:cNvPr id="12" name="Rectangle 11"/>
+            <p:cNvSpPr/>
+            <p:nvPr/>
+          </p:nvSpPr>
+          <p:spPr>
+            <a:xfrm>
+              <a:off x="2229307" y="3602736"/>
+              <a:ext cx="511149" cy="68580"/>
+            </a:xfrm>
+            <a:prstGeom prst="rect">
+              <a:avLst/>
+            </a:prstGeom>
+            <a:solidFill>
+              <a:srgbClr val="B29E84"/>
+            </a:solidFill>
+            <a:ln>
+              <a:noFill/>
+            </a:ln>
+            <a:effectLst/>
+          </p:spPr>
+          <p:style>
+            <a:lnRef idx="1">
+              <a:schemeClr val="accent1"/>
+            </a:lnRef>
+            <a:fillRef idx="3">
+              <a:schemeClr val="accent1"/>
+            </a:fillRef>
+            <a:effectRef idx="2">
+              <a:schemeClr val="accent1"/>
+            </a:effectRef>
+            <a:fontRef idx="minor">
+              <a:schemeClr val="lt1"/>
+            </a:fontRef>
+          </p:style>
+          <p:txBody>
+            <a:bodyPr rtlCol="0" anchor="ctr"/>
+            <a:lstStyle/>
+            <a:p>
+              <a:pPr algn="ctr"/>
+              <a:endParaRPr/>
+            </a:p>
+          </p:txBody>
+        </p:sp>
+        <p:sp>
+          <p:nvSpPr>
+            <p:cNvPr id="13" name="Rectangle 12"/>
+            <p:cNvSpPr/>
+            <p:nvPr/>
+          </p:nvSpPr>
+          <p:spPr>
+            <a:xfrm>
+              <a:off x="2740456" y="3602736"/>
+              <a:ext cx="2398471" cy="68580"/>
+            </a:xfrm>
+            <a:prstGeom prst="rect">
+              <a:avLst/>
+            </a:prstGeom>
+            <a:solidFill>
+              <a:srgbClr val="7C898B"/>
+            </a:solidFill>
+            <a:ln>
+              <a:noFill/>
+            </a:ln>
+            <a:effectLst/>
+          </p:spPr>
+          <p:style>
+            <a:lnRef idx="1">
+              <a:schemeClr val="accent1"/>
+            </a:lnRef>
+            <a:fillRef idx="3">
+              <a:schemeClr val="accent1"/>
+            </a:fillRef>
+            <a:effectRef idx="2">
+              <a:schemeClr val="accent1"/>
+            </a:effectRef>
+            <a:fontRef idx="minor">
+              <a:schemeClr val="lt1"/>
+            </a:fontRef>
+          </p:style>
+          <p:txBody>
+            <a:bodyPr rtlCol="0" anchor="ctr"/>
+            <a:lstStyle/>
+            <a:p>
+              <a:pPr algn="ctr"/>
+              <a:endParaRPr/>
+            </a:p>
+          </p:txBody>
+        </p:sp>
+      </p:grpSp>
       <p:sp>
         <p:nvSpPr>
           <p:cNvPr id="14" name="TextBox 13"/>
@@ -3613,7 +4385,7 @@
         <p:spPr>
           <a:xfrm>
             <a:off x="1207008" y="5074920"/>
-            <a:ext cx="6766560" cy="1371600"/>
+            <a:ext cx="6766560" cy="975652"/>
           </a:xfrm>
           <a:prstGeom prst="rect">
             <a:avLst/>
@@ -3621,7 +4393,7 @@
           <a:noFill/>
         </p:spPr>
         <p:txBody>
-          <a:bodyPr wrap="square" anchor="t" lIns="0" rIns="0" tIns="0" bIns="0">
+          <a:bodyPr wrap="square" lIns="0" tIns="0" rIns="0" bIns="0" anchor="t">
             <a:spAutoFit/>
           </a:bodyPr>
           <a:lstStyle/>
@@ -3632,7 +4404,7 @@
               </a:lnSpc>
             </a:pPr>
             <a:r>
-              <a:rPr sz="1400" b="0" i="0">
+              <a:rPr sz="1400" b="0" i="0" dirty="0">
                 <a:solidFill>
                   <a:srgbClr val="253439"/>
                 </a:solidFill>
@@ -3648,7 +4420,7 @@
               </a:lnSpc>
             </a:pPr>
             <a:r>
-              <a:rPr sz="1100" b="0" i="0">
+              <a:rPr sz="1100" b="0" i="0" dirty="0">
                 <a:solidFill>
                   <a:srgbClr val="7C898B"/>
                 </a:solidFill>
@@ -3663,31 +4435,81 @@
                 <a:spcPct val="115000"/>
               </a:lnSpc>
             </a:pPr>
-            <a:r>
-              <a:rPr sz="500" b="0" i="0">
-                <a:solidFill>
-                  <a:srgbClr val="253439"/>
+            <a:endParaRPr sz="1100" b="0" i="0" dirty="0">
+              <a:solidFill>
+                <a:srgbClr val="7C898B"/>
+              </a:solidFill>
+              <a:latin typeface="Segoe UI"/>
+            </a:endParaRPr>
+          </a:p>
+          <a:p>
+            <a:r>
+              <a:rPr sz="1100" b="0" i="0" dirty="0">
+                <a:solidFill>
+                  <a:srgbClr val="7C898B"/>
                 </a:solidFill>
                 <a:latin typeface="Segoe UI"/>
               </a:rPr>
-              <a:t/>
-            </a:r>
-          </a:p>
-          <a:p>
-            <a:pPr algn="l">
-              <a:lnSpc>
-                <a:spcPct val="115000"/>
-              </a:lnSpc>
-            </a:pPr>
-            <a:r>
-              <a:rPr sz="1100" b="0" i="0">
+              <a:t>Supervisors:  </a:t>
+            </a:r>
+            <a:r>
+              <a:rPr lang="en-SE" sz="1100" dirty="0">
                 <a:solidFill>
                   <a:srgbClr val="7C898B"/>
                 </a:solidFill>
                 <a:latin typeface="Segoe UI"/>
               </a:rPr>
-              <a:t>Supervisors:  [ supervisor 1 ]  ·  [ supervisor 2 ]</a:t>
-            </a:r>
+              <a:t>Johan Jansson</a:t>
+            </a:r>
+            <a:r>
+              <a:rPr lang="en-GB" sz="1100" dirty="0">
+                <a:solidFill>
+                  <a:srgbClr val="7C898B"/>
+                </a:solidFill>
+                <a:latin typeface="Segoe UI"/>
+              </a:rPr>
+              <a:t> </a:t>
+            </a:r>
+            <a:r>
+              <a:rPr sz="1100" b="0" i="0" dirty="0">
+                <a:solidFill>
+                  <a:srgbClr val="7C898B"/>
+                </a:solidFill>
+                <a:latin typeface="Segoe UI"/>
+              </a:rPr>
+              <a:t>·</a:t>
+            </a:r>
+            <a:r>
+              <a:rPr lang="en-GB" sz="1100" b="0" i="0" dirty="0">
+                <a:solidFill>
+                  <a:srgbClr val="7C898B"/>
+                </a:solidFill>
+                <a:latin typeface="Segoe UI"/>
+              </a:rPr>
+              <a:t> </a:t>
+            </a:r>
+            <a:r>
+              <a:rPr lang="en-SE" sz="1100" dirty="0">
+                <a:solidFill>
+                  <a:srgbClr val="7C898B"/>
+                </a:solidFill>
+                <a:latin typeface="Segoe UI"/>
+              </a:rPr>
+              <a:t>Mirza Cenanovic</a:t>
+            </a:r>
+          </a:p>
+          <a:p>
+            <a:pPr>
+              <a:lnSpc>
+                <a:spcPct val="100000"/>
+              </a:lnSpc>
+            </a:pPr>
+            <a:endParaRPr sz="1100" b="0" i="0" dirty="0">
+              <a:solidFill>
+                <a:srgbClr val="7C898B"/>
+              </a:solidFill>
+              <a:latin typeface="Segoe UI"/>
+            </a:endParaRPr>
           </a:p>
         </p:txBody>
       </p:sp>
@@ -3698,9 +4520,9 @@
           <p:nvPr/>
         </p:nvSpPr>
         <p:spPr>
-          <a:xfrm rot="16200000">
-            <a:off x="10835640" y="3127248"/>
-            <a:ext cx="2377440" cy="310896"/>
+          <a:xfrm>
+            <a:off x="1161402" y="4352544"/>
+            <a:ext cx="1061189" cy="161583"/>
           </a:xfrm>
           <a:prstGeom prst="rect">
             <a:avLst/>
@@ -3708,7 +4530,7 @@
           <a:noFill/>
         </p:spPr>
         <p:txBody>
-          <a:bodyPr wrap="none" anchor="t" lIns="0" rIns="0" tIns="0" bIns="0">
+          <a:bodyPr wrap="none" lIns="0" tIns="0" rIns="0" bIns="0" anchor="t">
             <a:spAutoFit/>
           </a:bodyPr>
           <a:lstStyle/>
@@ -3719,52 +4541,13 @@
               </a:lnSpc>
             </a:pPr>
             <a:r>
-              <a:rPr sz="950" b="0" i="0">
+              <a:rPr sz="1050" b="0" i="0" dirty="0">
                 <a:solidFill>
                   <a:srgbClr val="253439"/>
                 </a:solidFill>
                 <a:latin typeface="Segoe UI Semibold"/>
               </a:rPr>
               <a:t>SEPTEMBER 2026</a:t>
-            </a:r>
-          </a:p>
-        </p:txBody>
-      </p:sp>
-      <p:sp>
-        <p:nvSpPr>
-          <p:cNvPr id="16" name="TextBox 15"/>
-          <p:cNvSpPr txBox="1"/>
-          <p:nvPr/>
-        </p:nvSpPr>
-        <p:spPr>
-          <a:xfrm>
-            <a:off x="7863840" y="6053328"/>
-            <a:ext cx="3931920" cy="365760"/>
-          </a:xfrm>
-          <a:prstGeom prst="rect">
-            <a:avLst/>
-          </a:prstGeom>
-          <a:noFill/>
-        </p:spPr>
-        <p:txBody>
-          <a:bodyPr wrap="square" anchor="t" lIns="0" rIns="0" tIns="0" bIns="0">
-            <a:spAutoFit/>
-          </a:bodyPr>
-          <a:lstStyle/>
-          <a:p>
-            <a:pPr algn="r">
-              <a:lnSpc>
-                <a:spcPct val="100000"/>
-              </a:lnSpc>
-            </a:pPr>
-            <a:r>
-              <a:rPr sz="1000" b="0" i="0">
-                <a:solidFill>
-                  <a:srgbClr val="7C898B"/>
-                </a:solidFill>
-                <a:latin typeface="Segoe UI"/>
-              </a:rPr>
-              <a:t>Prototype Product Development · Jönköping University</a:t>
             </a:r>
           </a:p>
         </p:txBody>
@@ -3786,7 +4569,7 @@
           <a:noFill/>
         </p:spPr>
         <p:txBody>
-          <a:bodyPr wrap="square" anchor="t" lIns="0" rIns="0" tIns="0" bIns="0">
+          <a:bodyPr wrap="square" lIns="0" tIns="0" rIns="0" bIns="0" anchor="t">
             <a:spAutoFit/>
           </a:bodyPr>
           <a:lstStyle/>
@@ -3817,7 +4600,7 @@
 </file>
 
 <file path=ppt/slides/slide10.xml><?xml version="1.0" encoding="utf-8"?>
-<p:sld xmlns:a="http://schemas.openxmlformats.org/drawingml/2006/main" xmlns:p="http://schemas.openxmlformats.org/presentationml/2006/main" xmlns:r="http://schemas.openxmlformats.org/officeDocument/2006/relationships">
+<p:sld xmlns:a="http://schemas.openxmlformats.org/drawingml/2006/main" xmlns:r="http://schemas.openxmlformats.org/officeDocument/2006/relationships" xmlns:p="http://schemas.openxmlformats.org/presentationml/2006/main">
   <p:cSld>
     <p:spTree>
       <p:nvGrpSpPr>
@@ -3825,7 +4608,14 @@
         <p:cNvGrpSpPr/>
         <p:nvPr/>
       </p:nvGrpSpPr>
-      <p:grpSpPr/>
+      <p:grpSpPr>
+        <a:xfrm>
+          <a:off x="0" y="0"/>
+          <a:ext cx="0" cy="0"/>
+          <a:chOff x="0" y="0"/>
+          <a:chExt cx="0" cy="0"/>
+        </a:xfrm>
+      </p:grpSpPr>
       <p:sp>
         <p:nvSpPr>
           <p:cNvPr id="2" name="Rectangle 1"/>
@@ -3867,6 +4657,7 @@
           <a:lstStyle/>
           <a:p>
             <a:pPr algn="ctr"/>
+            <a:endParaRPr/>
           </a:p>
         </p:txBody>
       </p:sp>
@@ -3911,6 +4702,7 @@
           <a:lstStyle/>
           <a:p>
             <a:pPr algn="ctr"/>
+            <a:endParaRPr/>
           </a:p>
         </p:txBody>
       </p:sp>
@@ -3955,6 +4747,7 @@
           <a:lstStyle/>
           <a:p>
             <a:pPr algn="ctr"/>
+            <a:endParaRPr/>
           </a:p>
         </p:txBody>
       </p:sp>
@@ -4023,6 +4816,7 @@
           <a:lstStyle/>
           <a:p>
             <a:pPr algn="ctr"/>
+            <a:endParaRPr/>
           </a:p>
         </p:txBody>
       </p:sp>
@@ -4067,6 +4861,7 @@
           <a:lstStyle/>
           <a:p>
             <a:pPr algn="ctr"/>
+            <a:endParaRPr/>
           </a:p>
         </p:txBody>
       </p:sp>
@@ -4111,6 +4906,7 @@
           <a:lstStyle/>
           <a:p>
             <a:pPr algn="ctr"/>
+            <a:endParaRPr/>
           </a:p>
         </p:txBody>
       </p:sp>
@@ -4131,7 +4927,7 @@
           <a:noFill/>
         </p:spPr>
         <p:txBody>
-          <a:bodyPr wrap="square" anchor="t" lIns="0" rIns="0" tIns="0" bIns="0">
+          <a:bodyPr wrap="square" lIns="0" tIns="0" rIns="0" bIns="0" anchor="t">
             <a:spAutoFit/>
           </a:bodyPr>
           <a:lstStyle/>
@@ -4170,7 +4966,7 @@
           <a:noFill/>
         </p:spPr>
         <p:txBody>
-          <a:bodyPr wrap="square" anchor="t" lIns="0" rIns="0" tIns="0" bIns="0">
+          <a:bodyPr wrap="square" lIns="0" tIns="0" rIns="0" bIns="0" anchor="t">
             <a:spAutoFit/>
           </a:bodyPr>
           <a:lstStyle/>
@@ -4233,6 +5029,7 @@
           <a:lstStyle/>
           <a:p>
             <a:pPr algn="ctr"/>
+            <a:endParaRPr/>
           </a:p>
         </p:txBody>
       </p:sp>
@@ -4277,6 +5074,7 @@
           <a:lstStyle/>
           <a:p>
             <a:pPr algn="ctr"/>
+            <a:endParaRPr/>
           </a:p>
         </p:txBody>
       </p:sp>
@@ -4321,6 +5119,7 @@
           <a:lstStyle/>
           <a:p>
             <a:pPr algn="ctr"/>
+            <a:endParaRPr/>
           </a:p>
         </p:txBody>
       </p:sp>
@@ -4341,7 +5140,7 @@
           <a:noFill/>
         </p:spPr>
         <p:txBody>
-          <a:bodyPr wrap="none" anchor="t" lIns="0" rIns="0" tIns="0" bIns="0">
+          <a:bodyPr wrap="none" lIns="0" tIns="0" rIns="0" bIns="0" anchor="t">
             <a:spAutoFit/>
           </a:bodyPr>
           <a:lstStyle/>
@@ -4380,7 +5179,7 @@
           <a:noFill/>
         </p:spPr>
         <p:txBody>
-          <a:bodyPr wrap="square" anchor="t" lIns="0" rIns="0" tIns="0" bIns="0">
+          <a:bodyPr wrap="square" lIns="0" tIns="0" rIns="0" bIns="0" anchor="t">
             <a:spAutoFit/>
           </a:bodyPr>
           <a:lstStyle/>
@@ -4445,6 +5244,7 @@
           <a:lstStyle/>
           <a:p>
             <a:pPr algn="ctr"/>
+            <a:endParaRPr/>
           </a:p>
         </p:txBody>
       </p:sp>
@@ -4515,6 +5315,7 @@
           <a:lstStyle/>
           <a:p>
             <a:pPr algn="ctr"/>
+            <a:endParaRPr/>
           </a:p>
         </p:txBody>
       </p:sp>
@@ -4559,6 +5360,7 @@
           <a:lstStyle/>
           <a:p>
             <a:pPr algn="ctr"/>
+            <a:endParaRPr/>
           </a:p>
         </p:txBody>
       </p:sp>
@@ -4579,7 +5381,7 @@
           <a:noFill/>
         </p:spPr>
         <p:txBody>
-          <a:bodyPr wrap="square" anchor="t" lIns="0" rIns="0" tIns="0" bIns="0">
+          <a:bodyPr wrap="square" lIns="0" tIns="0" rIns="0" bIns="0" anchor="t">
             <a:spAutoFit/>
           </a:bodyPr>
           <a:lstStyle/>
@@ -4618,7 +5420,7 @@
           <a:noFill/>
         </p:spPr>
         <p:txBody>
-          <a:bodyPr wrap="square" anchor="t" lIns="0" rIns="0" tIns="0" bIns="0">
+          <a:bodyPr wrap="square" lIns="0" tIns="0" rIns="0" bIns="0" anchor="t">
             <a:spAutoFit/>
           </a:bodyPr>
           <a:lstStyle/>
@@ -4657,7 +5459,7 @@
           <a:noFill/>
         </p:spPr>
         <p:txBody>
-          <a:bodyPr wrap="square" anchor="t" lIns="0" rIns="0" tIns="0" bIns="0">
+          <a:bodyPr wrap="square" lIns="0" tIns="0" rIns="0" bIns="0" anchor="t">
             <a:spAutoFit/>
           </a:bodyPr>
           <a:lstStyle/>
@@ -4722,6 +5524,7 @@
           <a:lstStyle/>
           <a:p>
             <a:pPr algn="ctr"/>
+            <a:endParaRPr/>
           </a:p>
         </p:txBody>
       </p:sp>
@@ -4766,6 +5569,7 @@
           <a:lstStyle/>
           <a:p>
             <a:pPr algn="ctr"/>
+            <a:endParaRPr/>
           </a:p>
         </p:txBody>
       </p:sp>
@@ -4786,7 +5590,7 @@
           <a:noFill/>
         </p:spPr>
         <p:txBody>
-          <a:bodyPr wrap="square" anchor="t" lIns="0" rIns="0" tIns="0" bIns="0">
+          <a:bodyPr wrap="square" lIns="0" tIns="0" rIns="0" bIns="0" anchor="t">
             <a:spAutoFit/>
           </a:bodyPr>
           <a:lstStyle/>
@@ -4825,7 +5629,7 @@
           <a:noFill/>
         </p:spPr>
         <p:txBody>
-          <a:bodyPr wrap="square" anchor="t" lIns="0" rIns="0" tIns="0" bIns="0">
+          <a:bodyPr wrap="square" lIns="0" tIns="0" rIns="0" bIns="0" anchor="t">
             <a:spAutoFit/>
           </a:bodyPr>
           <a:lstStyle/>
@@ -4864,7 +5668,7 @@
           <a:noFill/>
         </p:spPr>
         <p:txBody>
-          <a:bodyPr wrap="square" anchor="t" lIns="0" rIns="0" tIns="0" bIns="0">
+          <a:bodyPr wrap="square" lIns="0" tIns="0" rIns="0" bIns="0" anchor="t">
             <a:spAutoFit/>
           </a:bodyPr>
           <a:lstStyle/>
@@ -4929,6 +5733,7 @@
           <a:lstStyle/>
           <a:p>
             <a:pPr algn="ctr"/>
+            <a:endParaRPr/>
           </a:p>
         </p:txBody>
       </p:sp>
@@ -4973,6 +5778,7 @@
           <a:lstStyle/>
           <a:p>
             <a:pPr algn="ctr"/>
+            <a:endParaRPr/>
           </a:p>
         </p:txBody>
       </p:sp>
@@ -4993,7 +5799,7 @@
           <a:noFill/>
         </p:spPr>
         <p:txBody>
-          <a:bodyPr wrap="square" anchor="t" lIns="0" rIns="0" tIns="0" bIns="0">
+          <a:bodyPr wrap="square" lIns="0" tIns="0" rIns="0" bIns="0" anchor="t">
             <a:spAutoFit/>
           </a:bodyPr>
           <a:lstStyle/>
@@ -5032,7 +5838,7 @@
           <a:noFill/>
         </p:spPr>
         <p:txBody>
-          <a:bodyPr wrap="square" anchor="t" lIns="0" rIns="0" tIns="0" bIns="0">
+          <a:bodyPr wrap="square" lIns="0" tIns="0" rIns="0" bIns="0" anchor="t">
             <a:spAutoFit/>
           </a:bodyPr>
           <a:lstStyle/>
@@ -5071,7 +5877,7 @@
           <a:noFill/>
         </p:spPr>
         <p:txBody>
-          <a:bodyPr wrap="square" anchor="t" lIns="0" rIns="0" tIns="0" bIns="0">
+          <a:bodyPr wrap="square" lIns="0" tIns="0" rIns="0" bIns="0" anchor="t">
             <a:spAutoFit/>
           </a:bodyPr>
           <a:lstStyle/>
@@ -5110,7 +5916,7 @@
           <a:noFill/>
         </p:spPr>
         <p:txBody>
-          <a:bodyPr wrap="square" anchor="t" lIns="0" rIns="0" tIns="0" bIns="0">
+          <a:bodyPr wrap="square" lIns="0" tIns="0" rIns="0" bIns="0" anchor="t">
             <a:spAutoFit/>
           </a:bodyPr>
           <a:lstStyle/>
@@ -5141,7 +5947,7 @@
 </file>
 
 <file path=ppt/slides/slide11.xml><?xml version="1.0" encoding="utf-8"?>
-<p:sld xmlns:a="http://schemas.openxmlformats.org/drawingml/2006/main" xmlns:p="http://schemas.openxmlformats.org/presentationml/2006/main" xmlns:r="http://schemas.openxmlformats.org/officeDocument/2006/relationships">
+<p:sld xmlns:a="http://schemas.openxmlformats.org/drawingml/2006/main" xmlns:r="http://schemas.openxmlformats.org/officeDocument/2006/relationships" xmlns:p="http://schemas.openxmlformats.org/presentationml/2006/main">
   <p:cSld>
     <p:spTree>
       <p:nvGrpSpPr>
@@ -5149,7 +5955,14 @@
         <p:cNvGrpSpPr/>
         <p:nvPr/>
       </p:nvGrpSpPr>
-      <p:grpSpPr/>
+      <p:grpSpPr>
+        <a:xfrm>
+          <a:off x="0" y="0"/>
+          <a:ext cx="0" cy="0"/>
+          <a:chOff x="0" y="0"/>
+          <a:chExt cx="0" cy="0"/>
+        </a:xfrm>
+      </p:grpSpPr>
       <p:sp>
         <p:nvSpPr>
           <p:cNvPr id="2" name="Rectangle 1"/>
@@ -5191,6 +6004,7 @@
           <a:lstStyle/>
           <a:p>
             <a:pPr algn="ctr"/>
+            <a:endParaRPr/>
           </a:p>
         </p:txBody>
       </p:sp>
@@ -5235,6 +6049,7 @@
           <a:lstStyle/>
           <a:p>
             <a:pPr algn="ctr"/>
+            <a:endParaRPr/>
           </a:p>
         </p:txBody>
       </p:sp>
@@ -5279,6 +6094,7 @@
           <a:lstStyle/>
           <a:p>
             <a:pPr algn="ctr"/>
+            <a:endParaRPr/>
           </a:p>
         </p:txBody>
       </p:sp>
@@ -5347,6 +6163,7 @@
           <a:lstStyle/>
           <a:p>
             <a:pPr algn="ctr"/>
+            <a:endParaRPr/>
           </a:p>
         </p:txBody>
       </p:sp>
@@ -5391,6 +6208,7 @@
           <a:lstStyle/>
           <a:p>
             <a:pPr algn="ctr"/>
+            <a:endParaRPr/>
           </a:p>
         </p:txBody>
       </p:sp>
@@ -5435,6 +6253,7 @@
           <a:lstStyle/>
           <a:p>
             <a:pPr algn="ctr"/>
+            <a:endParaRPr/>
           </a:p>
         </p:txBody>
       </p:sp>
@@ -5455,7 +6274,7 @@
           <a:noFill/>
         </p:spPr>
         <p:txBody>
-          <a:bodyPr wrap="square" anchor="t" lIns="0" rIns="0" tIns="0" bIns="0">
+          <a:bodyPr wrap="square" lIns="0" tIns="0" rIns="0" bIns="0" anchor="t">
             <a:spAutoFit/>
           </a:bodyPr>
           <a:lstStyle/>
@@ -5494,7 +6313,7 @@
           <a:noFill/>
         </p:spPr>
         <p:txBody>
-          <a:bodyPr wrap="square" anchor="t" lIns="0" rIns="0" tIns="0" bIns="0">
+          <a:bodyPr wrap="square" lIns="0" tIns="0" rIns="0" bIns="0" anchor="t">
             <a:spAutoFit/>
           </a:bodyPr>
           <a:lstStyle/>
@@ -5557,6 +6376,7 @@
           <a:lstStyle/>
           <a:p>
             <a:pPr algn="ctr"/>
+            <a:endParaRPr/>
           </a:p>
         </p:txBody>
       </p:sp>
@@ -5601,6 +6421,7 @@
           <a:lstStyle/>
           <a:p>
             <a:pPr algn="ctr"/>
+            <a:endParaRPr/>
           </a:p>
         </p:txBody>
       </p:sp>
@@ -5645,6 +6466,7 @@
           <a:lstStyle/>
           <a:p>
             <a:pPr algn="ctr"/>
+            <a:endParaRPr/>
           </a:p>
         </p:txBody>
       </p:sp>
@@ -5665,7 +6487,7 @@
           <a:noFill/>
         </p:spPr>
         <p:txBody>
-          <a:bodyPr wrap="none" anchor="t" lIns="0" rIns="0" tIns="0" bIns="0">
+          <a:bodyPr wrap="none" lIns="0" tIns="0" rIns="0" bIns="0" anchor="t">
             <a:spAutoFit/>
           </a:bodyPr>
           <a:lstStyle/>
@@ -5704,7 +6526,7 @@
           <a:noFill/>
         </p:spPr>
         <p:txBody>
-          <a:bodyPr wrap="square" anchor="t" lIns="0" rIns="0" tIns="0" bIns="0">
+          <a:bodyPr wrap="square" lIns="0" tIns="0" rIns="0" bIns="0" anchor="t">
             <a:spAutoFit/>
           </a:bodyPr>
           <a:lstStyle/>
@@ -5769,6 +6591,7 @@
           <a:lstStyle/>
           <a:p>
             <a:pPr algn="ctr"/>
+            <a:endParaRPr/>
           </a:p>
         </p:txBody>
       </p:sp>
@@ -5813,6 +6636,7 @@
           <a:lstStyle/>
           <a:p>
             <a:pPr algn="ctr"/>
+            <a:endParaRPr/>
           </a:p>
         </p:txBody>
       </p:sp>
@@ -5833,7 +6657,7 @@
           <a:noFill/>
         </p:spPr>
         <p:txBody>
-          <a:bodyPr wrap="square" anchor="t" lIns="0" rIns="0" tIns="0" bIns="0">
+          <a:bodyPr wrap="square" lIns="0" tIns="0" rIns="0" bIns="0" anchor="t">
             <a:spAutoFit/>
           </a:bodyPr>
           <a:lstStyle/>
@@ -5892,7 +6716,7 @@
           </a:fontRef>
         </p:style>
         <p:txBody>
-          <a:bodyPr rtlCol="0" anchor="ctr" lIns="36576" rIns="36576" tIns="0" bIns="0" wrap="none"/>
+          <a:bodyPr wrap="none" lIns="36576" tIns="0" rIns="36576" bIns="0" rtlCol="0" anchor="ctr"/>
           <a:lstStyle/>
           <a:p>
             <a:pPr algn="ctr"/>
@@ -5925,7 +6749,7 @@
           <a:noFill/>
         </p:spPr>
         <p:txBody>
-          <a:bodyPr wrap="square" anchor="t" lIns="0" rIns="0" tIns="0" bIns="0">
+          <a:bodyPr wrap="square" lIns="0" tIns="0" rIns="0" bIns="0" anchor="t">
             <a:spAutoFit/>
           </a:bodyPr>
           <a:lstStyle/>
@@ -6058,6 +6882,7 @@
           <a:lstStyle/>
           <a:p>
             <a:pPr algn="ctr"/>
+            <a:endParaRPr/>
           </a:p>
         </p:txBody>
       </p:sp>
@@ -6102,6 +6927,7 @@
           <a:lstStyle/>
           <a:p>
             <a:pPr algn="ctr"/>
+            <a:endParaRPr/>
           </a:p>
         </p:txBody>
       </p:sp>
@@ -6122,7 +6948,7 @@
           <a:noFill/>
         </p:spPr>
         <p:txBody>
-          <a:bodyPr wrap="square" anchor="t" lIns="0" rIns="0" tIns="0" bIns="0">
+          <a:bodyPr wrap="square" lIns="0" tIns="0" rIns="0" bIns="0" anchor="t">
             <a:spAutoFit/>
           </a:bodyPr>
           <a:lstStyle/>
@@ -6181,7 +7007,7 @@
           </a:fontRef>
         </p:style>
         <p:txBody>
-          <a:bodyPr rtlCol="0" anchor="ctr" lIns="36576" rIns="36576" tIns="0" bIns="0" wrap="none"/>
+          <a:bodyPr wrap="none" lIns="36576" tIns="0" rIns="36576" bIns="0" rtlCol="0" anchor="ctr"/>
           <a:lstStyle/>
           <a:p>
             <a:pPr algn="ctr"/>
@@ -6214,7 +7040,7 @@
           <a:noFill/>
         </p:spPr>
         <p:txBody>
-          <a:bodyPr wrap="square" anchor="t" lIns="0" rIns="0" tIns="0" bIns="0">
+          <a:bodyPr wrap="square" lIns="0" tIns="0" rIns="0" bIns="0" anchor="t">
             <a:spAutoFit/>
           </a:bodyPr>
           <a:lstStyle/>
@@ -6347,6 +7173,7 @@
           <a:lstStyle/>
           <a:p>
             <a:pPr algn="ctr"/>
+            <a:endParaRPr/>
           </a:p>
         </p:txBody>
       </p:sp>
@@ -6391,6 +7218,7 @@
           <a:lstStyle/>
           <a:p>
             <a:pPr algn="ctr"/>
+            <a:endParaRPr/>
           </a:p>
         </p:txBody>
       </p:sp>
@@ -6411,7 +7239,7 @@
           <a:noFill/>
         </p:spPr>
         <p:txBody>
-          <a:bodyPr wrap="square" anchor="t" lIns="0" rIns="0" tIns="0" bIns="0">
+          <a:bodyPr wrap="square" lIns="0" tIns="0" rIns="0" bIns="0" anchor="t">
             <a:spAutoFit/>
           </a:bodyPr>
           <a:lstStyle/>
@@ -6470,7 +7298,7 @@
           </a:fontRef>
         </p:style>
         <p:txBody>
-          <a:bodyPr rtlCol="0" anchor="ctr" lIns="36576" rIns="36576" tIns="0" bIns="0" wrap="none"/>
+          <a:bodyPr wrap="none" lIns="36576" tIns="0" rIns="36576" bIns="0" rtlCol="0" anchor="ctr"/>
           <a:lstStyle/>
           <a:p>
             <a:pPr algn="ctr"/>
@@ -6503,7 +7331,7 @@
           <a:noFill/>
         </p:spPr>
         <p:txBody>
-          <a:bodyPr wrap="square" anchor="t" lIns="0" rIns="0" tIns="0" bIns="0">
+          <a:bodyPr wrap="square" lIns="0" tIns="0" rIns="0" bIns="0" anchor="t">
             <a:spAutoFit/>
           </a:bodyPr>
           <a:lstStyle/>
@@ -6610,7 +7438,7 @@
           <a:noFill/>
         </p:spPr>
         <p:txBody>
-          <a:bodyPr wrap="square" anchor="t" lIns="0" rIns="0" tIns="0" bIns="0">
+          <a:bodyPr wrap="square" lIns="0" tIns="0" rIns="0" bIns="0" anchor="t">
             <a:spAutoFit/>
           </a:bodyPr>
           <a:lstStyle/>
@@ -6641,7 +7469,7 @@
 </file>
 
 <file path=ppt/slides/slide12.xml><?xml version="1.0" encoding="utf-8"?>
-<p:sld xmlns:a="http://schemas.openxmlformats.org/drawingml/2006/main" xmlns:p="http://schemas.openxmlformats.org/presentationml/2006/main" xmlns:r="http://schemas.openxmlformats.org/officeDocument/2006/relationships">
+<p:sld xmlns:a="http://schemas.openxmlformats.org/drawingml/2006/main" xmlns:r="http://schemas.openxmlformats.org/officeDocument/2006/relationships" xmlns:p="http://schemas.openxmlformats.org/presentationml/2006/main">
   <p:cSld>
     <p:spTree>
       <p:nvGrpSpPr>
@@ -6649,7 +7477,14 @@
         <p:cNvGrpSpPr/>
         <p:nvPr/>
       </p:nvGrpSpPr>
-      <p:grpSpPr/>
+      <p:grpSpPr>
+        <a:xfrm>
+          <a:off x="0" y="0"/>
+          <a:ext cx="0" cy="0"/>
+          <a:chOff x="0" y="0"/>
+          <a:chExt cx="0" cy="0"/>
+        </a:xfrm>
+      </p:grpSpPr>
       <p:sp>
         <p:nvSpPr>
           <p:cNvPr id="2" name="Rectangle 1"/>
@@ -6691,6 +7526,7 @@
           <a:lstStyle/>
           <a:p>
             <a:pPr algn="ctr"/>
+            <a:endParaRPr/>
           </a:p>
         </p:txBody>
       </p:sp>
@@ -6735,6 +7571,7 @@
           <a:lstStyle/>
           <a:p>
             <a:pPr algn="ctr"/>
+            <a:endParaRPr/>
           </a:p>
         </p:txBody>
       </p:sp>
@@ -6779,6 +7616,7 @@
           <a:lstStyle/>
           <a:p>
             <a:pPr algn="ctr"/>
+            <a:endParaRPr/>
           </a:p>
         </p:txBody>
       </p:sp>
@@ -6847,6 +7685,7 @@
           <a:lstStyle/>
           <a:p>
             <a:pPr algn="ctr"/>
+            <a:endParaRPr/>
           </a:p>
         </p:txBody>
       </p:sp>
@@ -6891,6 +7730,7 @@
           <a:lstStyle/>
           <a:p>
             <a:pPr algn="ctr"/>
+            <a:endParaRPr/>
           </a:p>
         </p:txBody>
       </p:sp>
@@ -6935,6 +7775,7 @@
           <a:lstStyle/>
           <a:p>
             <a:pPr algn="ctr"/>
+            <a:endParaRPr/>
           </a:p>
         </p:txBody>
       </p:sp>
@@ -6955,7 +7796,7 @@
           <a:noFill/>
         </p:spPr>
         <p:txBody>
-          <a:bodyPr wrap="square" anchor="t" lIns="0" rIns="0" tIns="0" bIns="0">
+          <a:bodyPr wrap="square" lIns="0" tIns="0" rIns="0" bIns="0" anchor="t">
             <a:spAutoFit/>
           </a:bodyPr>
           <a:lstStyle/>
@@ -6994,7 +7835,7 @@
           <a:noFill/>
         </p:spPr>
         <p:txBody>
-          <a:bodyPr wrap="square" anchor="t" lIns="0" rIns="0" tIns="0" bIns="0">
+          <a:bodyPr wrap="square" lIns="0" tIns="0" rIns="0" bIns="0" anchor="t">
             <a:spAutoFit/>
           </a:bodyPr>
           <a:lstStyle/>
@@ -7057,6 +7898,7 @@
           <a:lstStyle/>
           <a:p>
             <a:pPr algn="ctr"/>
+            <a:endParaRPr/>
           </a:p>
         </p:txBody>
       </p:sp>
@@ -7101,6 +7943,7 @@
           <a:lstStyle/>
           <a:p>
             <a:pPr algn="ctr"/>
+            <a:endParaRPr/>
           </a:p>
         </p:txBody>
       </p:sp>
@@ -7145,6 +7988,7 @@
           <a:lstStyle/>
           <a:p>
             <a:pPr algn="ctr"/>
+            <a:endParaRPr/>
           </a:p>
         </p:txBody>
       </p:sp>
@@ -7165,7 +8009,7 @@
           <a:noFill/>
         </p:spPr>
         <p:txBody>
-          <a:bodyPr wrap="none" anchor="t" lIns="0" rIns="0" tIns="0" bIns="0">
+          <a:bodyPr wrap="none" lIns="0" tIns="0" rIns="0" bIns="0" anchor="t">
             <a:spAutoFit/>
           </a:bodyPr>
           <a:lstStyle/>
@@ -7204,7 +8048,7 @@
           <a:noFill/>
         </p:spPr>
         <p:txBody>
-          <a:bodyPr wrap="square" anchor="t" lIns="0" rIns="0" tIns="0" bIns="0">
+          <a:bodyPr wrap="square" lIns="0" tIns="0" rIns="0" bIns="0" anchor="t">
             <a:spAutoFit/>
           </a:bodyPr>
           <a:lstStyle/>
@@ -7269,6 +8113,7 @@
           <a:lstStyle/>
           <a:p>
             <a:pPr algn="ctr"/>
+            <a:endParaRPr/>
           </a:p>
         </p:txBody>
       </p:sp>
@@ -7313,6 +8158,7 @@
           <a:lstStyle/>
           <a:p>
             <a:pPr algn="ctr"/>
+            <a:endParaRPr/>
           </a:p>
         </p:txBody>
       </p:sp>
@@ -7333,7 +8179,7 @@
           <a:noFill/>
         </p:spPr>
         <p:txBody>
-          <a:bodyPr wrap="square" anchor="t" lIns="0" rIns="0" tIns="0" bIns="0">
+          <a:bodyPr wrap="square" lIns="0" tIns="0" rIns="0" bIns="0" anchor="t">
             <a:spAutoFit/>
           </a:bodyPr>
           <a:lstStyle/>
@@ -7372,7 +8218,7 @@
           <a:noFill/>
         </p:spPr>
         <p:txBody>
-          <a:bodyPr wrap="square" anchor="t" lIns="0" rIns="0" tIns="0" bIns="0">
+          <a:bodyPr wrap="square" lIns="0" tIns="0" rIns="0" bIns="0" anchor="t">
             <a:spAutoFit/>
           </a:bodyPr>
           <a:lstStyle/>
@@ -7411,7 +8257,7 @@
           <a:noFill/>
         </p:spPr>
         <p:txBody>
-          <a:bodyPr wrap="square" anchor="t" lIns="0" rIns="0" tIns="0" bIns="0">
+          <a:bodyPr wrap="square" lIns="0" tIns="0" rIns="0" bIns="0" anchor="t">
             <a:spAutoFit/>
           </a:bodyPr>
           <a:lstStyle/>
@@ -7476,6 +8322,7 @@
           <a:lstStyle/>
           <a:p>
             <a:pPr algn="ctr"/>
+            <a:endParaRPr/>
           </a:p>
         </p:txBody>
       </p:sp>
@@ -7520,6 +8367,7 @@
           <a:lstStyle/>
           <a:p>
             <a:pPr algn="ctr"/>
+            <a:endParaRPr/>
           </a:p>
         </p:txBody>
       </p:sp>
@@ -7540,7 +8388,7 @@
           <a:noFill/>
         </p:spPr>
         <p:txBody>
-          <a:bodyPr wrap="square" anchor="t" lIns="0" rIns="0" tIns="0" bIns="0">
+          <a:bodyPr wrap="square" lIns="0" tIns="0" rIns="0" bIns="0" anchor="t">
             <a:spAutoFit/>
           </a:bodyPr>
           <a:lstStyle/>
@@ -7579,7 +8427,7 @@
           <a:noFill/>
         </p:spPr>
         <p:txBody>
-          <a:bodyPr wrap="square" anchor="t" lIns="0" rIns="0" tIns="0" bIns="0">
+          <a:bodyPr wrap="square" lIns="0" tIns="0" rIns="0" bIns="0" anchor="t">
             <a:spAutoFit/>
           </a:bodyPr>
           <a:lstStyle/>
@@ -7618,7 +8466,7 @@
           <a:noFill/>
         </p:spPr>
         <p:txBody>
-          <a:bodyPr wrap="square" anchor="t" lIns="0" rIns="0" tIns="0" bIns="0">
+          <a:bodyPr wrap="square" lIns="0" tIns="0" rIns="0" bIns="0" anchor="t">
             <a:spAutoFit/>
           </a:bodyPr>
           <a:lstStyle/>
@@ -7683,6 +8531,7 @@
           <a:lstStyle/>
           <a:p>
             <a:pPr algn="ctr"/>
+            <a:endParaRPr/>
           </a:p>
         </p:txBody>
       </p:sp>
@@ -7727,6 +8576,7 @@
           <a:lstStyle/>
           <a:p>
             <a:pPr algn="ctr"/>
+            <a:endParaRPr/>
           </a:p>
         </p:txBody>
       </p:sp>
@@ -7747,7 +8597,7 @@
           <a:noFill/>
         </p:spPr>
         <p:txBody>
-          <a:bodyPr wrap="square" anchor="t" lIns="0" rIns="0" tIns="0" bIns="0">
+          <a:bodyPr wrap="square" lIns="0" tIns="0" rIns="0" bIns="0" anchor="t">
             <a:spAutoFit/>
           </a:bodyPr>
           <a:lstStyle/>
@@ -7786,7 +8636,7 @@
           <a:noFill/>
         </p:spPr>
         <p:txBody>
-          <a:bodyPr wrap="square" anchor="t" lIns="0" rIns="0" tIns="0" bIns="0">
+          <a:bodyPr wrap="square" lIns="0" tIns="0" rIns="0" bIns="0" anchor="t">
             <a:spAutoFit/>
           </a:bodyPr>
           <a:lstStyle/>
@@ -7825,7 +8675,7 @@
           <a:noFill/>
         </p:spPr>
         <p:txBody>
-          <a:bodyPr wrap="square" anchor="t" lIns="0" rIns="0" tIns="0" bIns="0">
+          <a:bodyPr wrap="square" lIns="0" tIns="0" rIns="0" bIns="0" anchor="t">
             <a:spAutoFit/>
           </a:bodyPr>
           <a:lstStyle/>
@@ -7890,6 +8740,7 @@
           <a:lstStyle/>
           <a:p>
             <a:pPr algn="ctr"/>
+            <a:endParaRPr/>
           </a:p>
         </p:txBody>
       </p:sp>
@@ -7934,6 +8785,7 @@
           <a:lstStyle/>
           <a:p>
             <a:pPr algn="ctr"/>
+            <a:endParaRPr/>
           </a:p>
         </p:txBody>
       </p:sp>
@@ -7954,7 +8806,7 @@
           <a:noFill/>
         </p:spPr>
         <p:txBody>
-          <a:bodyPr wrap="square" anchor="t" lIns="0" rIns="0" tIns="0" bIns="0">
+          <a:bodyPr wrap="square" lIns="0" tIns="0" rIns="0" bIns="0" anchor="t">
             <a:spAutoFit/>
           </a:bodyPr>
           <a:lstStyle/>
@@ -7993,7 +8845,7 @@
           <a:noFill/>
         </p:spPr>
         <p:txBody>
-          <a:bodyPr wrap="square" anchor="t" lIns="0" rIns="0" tIns="0" bIns="0">
+          <a:bodyPr wrap="square" lIns="0" tIns="0" rIns="0" bIns="0" anchor="t">
             <a:spAutoFit/>
           </a:bodyPr>
           <a:lstStyle/>
@@ -8032,7 +8884,7 @@
           <a:noFill/>
         </p:spPr>
         <p:txBody>
-          <a:bodyPr wrap="square" anchor="t" lIns="0" rIns="0" tIns="0" bIns="0">
+          <a:bodyPr wrap="square" lIns="0" tIns="0" rIns="0" bIns="0" anchor="t">
             <a:spAutoFit/>
           </a:bodyPr>
           <a:lstStyle/>
@@ -8097,6 +8949,7 @@
           <a:lstStyle/>
           <a:p>
             <a:pPr algn="ctr"/>
+            <a:endParaRPr/>
           </a:p>
         </p:txBody>
       </p:sp>
@@ -8141,6 +8994,7 @@
           <a:lstStyle/>
           <a:p>
             <a:pPr algn="ctr"/>
+            <a:endParaRPr/>
           </a:p>
         </p:txBody>
       </p:sp>
@@ -8161,7 +9015,7 @@
           <a:noFill/>
         </p:spPr>
         <p:txBody>
-          <a:bodyPr wrap="square" anchor="t" lIns="0" rIns="0" tIns="0" bIns="0">
+          <a:bodyPr wrap="square" lIns="0" tIns="0" rIns="0" bIns="0" anchor="t">
             <a:spAutoFit/>
           </a:bodyPr>
           <a:lstStyle/>
@@ -8200,7 +9054,7 @@
           <a:noFill/>
         </p:spPr>
         <p:txBody>
-          <a:bodyPr wrap="square" anchor="t" lIns="0" rIns="0" tIns="0" bIns="0">
+          <a:bodyPr wrap="square" lIns="0" tIns="0" rIns="0" bIns="0" anchor="t">
             <a:spAutoFit/>
           </a:bodyPr>
           <a:lstStyle/>
@@ -8265,6 +9119,7 @@
           <a:lstStyle/>
           <a:p>
             <a:pPr algn="ctr"/>
+            <a:endParaRPr/>
           </a:p>
         </p:txBody>
       </p:sp>
@@ -8285,7 +9140,7 @@
           <a:noFill/>
         </p:spPr>
         <p:txBody>
-          <a:bodyPr wrap="square" anchor="t" lIns="0" rIns="0" tIns="0" bIns="0">
+          <a:bodyPr wrap="square" lIns="0" tIns="0" rIns="0" bIns="0" anchor="t">
             <a:spAutoFit/>
           </a:bodyPr>
           <a:lstStyle/>
@@ -8324,7 +9179,7 @@
           <a:noFill/>
         </p:spPr>
         <p:txBody>
-          <a:bodyPr wrap="square" anchor="t" lIns="0" rIns="0" tIns="0" bIns="0">
+          <a:bodyPr wrap="square" lIns="0" tIns="0" rIns="0" bIns="0" anchor="t">
             <a:spAutoFit/>
           </a:bodyPr>
           <a:lstStyle/>
@@ -8389,6 +9244,7 @@
           <a:lstStyle/>
           <a:p>
             <a:pPr algn="ctr"/>
+            <a:endParaRPr/>
           </a:p>
         </p:txBody>
       </p:sp>
@@ -8409,7 +9265,7 @@
           <a:noFill/>
         </p:spPr>
         <p:txBody>
-          <a:bodyPr wrap="square" anchor="t" lIns="0" rIns="0" tIns="0" bIns="0">
+          <a:bodyPr wrap="square" lIns="0" tIns="0" rIns="0" bIns="0" anchor="t">
             <a:spAutoFit/>
           </a:bodyPr>
           <a:lstStyle/>
@@ -8448,7 +9304,7 @@
           <a:noFill/>
         </p:spPr>
         <p:txBody>
-          <a:bodyPr wrap="square" anchor="t" lIns="0" rIns="0" tIns="0" bIns="0">
+          <a:bodyPr wrap="square" lIns="0" tIns="0" rIns="0" bIns="0" anchor="t">
             <a:spAutoFit/>
           </a:bodyPr>
           <a:lstStyle/>
@@ -8513,6 +9369,7 @@
           <a:lstStyle/>
           <a:p>
             <a:pPr algn="ctr"/>
+            <a:endParaRPr/>
           </a:p>
         </p:txBody>
       </p:sp>
@@ -8533,7 +9390,7 @@
           <a:noFill/>
         </p:spPr>
         <p:txBody>
-          <a:bodyPr wrap="square" anchor="t" lIns="0" rIns="0" tIns="0" bIns="0">
+          <a:bodyPr wrap="square" lIns="0" tIns="0" rIns="0" bIns="0" anchor="t">
             <a:spAutoFit/>
           </a:bodyPr>
           <a:lstStyle/>
@@ -8572,7 +9429,7 @@
           <a:noFill/>
         </p:spPr>
         <p:txBody>
-          <a:bodyPr wrap="square" anchor="t" lIns="0" rIns="0" tIns="0" bIns="0">
+          <a:bodyPr wrap="square" lIns="0" tIns="0" rIns="0" bIns="0" anchor="t">
             <a:spAutoFit/>
           </a:bodyPr>
           <a:lstStyle/>
@@ -8637,6 +9494,7 @@
           <a:lstStyle/>
           <a:p>
             <a:pPr algn="ctr"/>
+            <a:endParaRPr/>
           </a:p>
         </p:txBody>
       </p:sp>
@@ -8657,7 +9515,7 @@
           <a:noFill/>
         </p:spPr>
         <p:txBody>
-          <a:bodyPr wrap="square" anchor="t" lIns="0" rIns="0" tIns="0" bIns="0">
+          <a:bodyPr wrap="square" lIns="0" tIns="0" rIns="0" bIns="0" anchor="t">
             <a:spAutoFit/>
           </a:bodyPr>
           <a:lstStyle/>
@@ -8696,7 +9554,7 @@
           <a:noFill/>
         </p:spPr>
         <p:txBody>
-          <a:bodyPr wrap="square" anchor="t" lIns="0" rIns="0" tIns="0" bIns="0">
+          <a:bodyPr wrap="square" lIns="0" tIns="0" rIns="0" bIns="0" anchor="t">
             <a:spAutoFit/>
           </a:bodyPr>
           <a:lstStyle/>
@@ -8735,7 +9593,7 @@
           <a:noFill/>
         </p:spPr>
         <p:txBody>
-          <a:bodyPr wrap="square" anchor="t" lIns="0" rIns="0" tIns="0" bIns="0">
+          <a:bodyPr wrap="square" lIns="0" tIns="0" rIns="0" bIns="0" anchor="t">
             <a:spAutoFit/>
           </a:bodyPr>
           <a:lstStyle/>
@@ -8806,7 +9664,7 @@
 </file>
 
 <file path=ppt/slides/slide13.xml><?xml version="1.0" encoding="utf-8"?>
-<p:sld xmlns:a="http://schemas.openxmlformats.org/drawingml/2006/main" xmlns:p="http://schemas.openxmlformats.org/presentationml/2006/main" xmlns:r="http://schemas.openxmlformats.org/officeDocument/2006/relationships">
+<p:sld xmlns:a="http://schemas.openxmlformats.org/drawingml/2006/main" xmlns:r="http://schemas.openxmlformats.org/officeDocument/2006/relationships" xmlns:p="http://schemas.openxmlformats.org/presentationml/2006/main">
   <p:cSld>
     <p:spTree>
       <p:nvGrpSpPr>
@@ -8814,7 +9672,14 @@
         <p:cNvGrpSpPr/>
         <p:nvPr/>
       </p:nvGrpSpPr>
-      <p:grpSpPr/>
+      <p:grpSpPr>
+        <a:xfrm>
+          <a:off x="0" y="0"/>
+          <a:ext cx="0" cy="0"/>
+          <a:chOff x="0" y="0"/>
+          <a:chExt cx="0" cy="0"/>
+        </a:xfrm>
+      </p:grpSpPr>
       <p:sp>
         <p:nvSpPr>
           <p:cNvPr id="2" name="Rectangle 1"/>
@@ -8856,6 +9721,7 @@
           <a:lstStyle/>
           <a:p>
             <a:pPr algn="ctr"/>
+            <a:endParaRPr/>
           </a:p>
         </p:txBody>
       </p:sp>
@@ -8900,6 +9766,7 @@
           <a:lstStyle/>
           <a:p>
             <a:pPr algn="ctr"/>
+            <a:endParaRPr/>
           </a:p>
         </p:txBody>
       </p:sp>
@@ -8944,6 +9811,7 @@
           <a:lstStyle/>
           <a:p>
             <a:pPr algn="ctr"/>
+            <a:endParaRPr/>
           </a:p>
         </p:txBody>
       </p:sp>
@@ -9012,6 +9880,7 @@
           <a:lstStyle/>
           <a:p>
             <a:pPr algn="ctr"/>
+            <a:endParaRPr/>
           </a:p>
         </p:txBody>
       </p:sp>
@@ -9056,6 +9925,7 @@
           <a:lstStyle/>
           <a:p>
             <a:pPr algn="ctr"/>
+            <a:endParaRPr/>
           </a:p>
         </p:txBody>
       </p:sp>
@@ -9100,6 +9970,7 @@
           <a:lstStyle/>
           <a:p>
             <a:pPr algn="ctr"/>
+            <a:endParaRPr/>
           </a:p>
         </p:txBody>
       </p:sp>
@@ -9120,7 +9991,7 @@
           <a:noFill/>
         </p:spPr>
         <p:txBody>
-          <a:bodyPr wrap="square" anchor="t" lIns="0" rIns="0" tIns="0" bIns="0">
+          <a:bodyPr wrap="square" lIns="0" tIns="0" rIns="0" bIns="0" anchor="t">
             <a:spAutoFit/>
           </a:bodyPr>
           <a:lstStyle/>
@@ -9159,7 +10030,7 @@
           <a:noFill/>
         </p:spPr>
         <p:txBody>
-          <a:bodyPr wrap="square" anchor="t" lIns="0" rIns="0" tIns="0" bIns="0">
+          <a:bodyPr wrap="square" lIns="0" tIns="0" rIns="0" bIns="0" anchor="t">
             <a:spAutoFit/>
           </a:bodyPr>
           <a:lstStyle/>
@@ -9222,6 +10093,7 @@
           <a:lstStyle/>
           <a:p>
             <a:pPr algn="ctr"/>
+            <a:endParaRPr/>
           </a:p>
         </p:txBody>
       </p:sp>
@@ -9266,6 +10138,7 @@
           <a:lstStyle/>
           <a:p>
             <a:pPr algn="ctr"/>
+            <a:endParaRPr/>
           </a:p>
         </p:txBody>
       </p:sp>
@@ -9310,6 +10183,7 @@
           <a:lstStyle/>
           <a:p>
             <a:pPr algn="ctr"/>
+            <a:endParaRPr/>
           </a:p>
         </p:txBody>
       </p:sp>
@@ -9330,7 +10204,7 @@
           <a:noFill/>
         </p:spPr>
         <p:txBody>
-          <a:bodyPr wrap="none" anchor="t" lIns="0" rIns="0" tIns="0" bIns="0">
+          <a:bodyPr wrap="none" lIns="0" tIns="0" rIns="0" bIns="0" anchor="t">
             <a:spAutoFit/>
           </a:bodyPr>
           <a:lstStyle/>
@@ -9369,7 +10243,7 @@
           <a:noFill/>
         </p:spPr>
         <p:txBody>
-          <a:bodyPr wrap="square" anchor="t" lIns="0" rIns="0" tIns="0" bIns="0">
+          <a:bodyPr wrap="square" lIns="0" tIns="0" rIns="0" bIns="0" anchor="t">
             <a:spAutoFit/>
           </a:bodyPr>
           <a:lstStyle/>
@@ -9434,6 +10308,7 @@
           <a:lstStyle/>
           <a:p>
             <a:pPr algn="ctr"/>
+            <a:endParaRPr/>
           </a:p>
         </p:txBody>
       </p:sp>
@@ -9478,6 +10353,7 @@
           <a:lstStyle/>
           <a:p>
             <a:pPr algn="ctr"/>
+            <a:endParaRPr/>
           </a:p>
         </p:txBody>
       </p:sp>
@@ -9498,7 +10374,7 @@
           <a:noFill/>
         </p:spPr>
         <p:txBody>
-          <a:bodyPr wrap="square" anchor="t" lIns="0" rIns="0" tIns="0" bIns="0">
+          <a:bodyPr wrap="square" lIns="0" tIns="0" rIns="0" bIns="0" anchor="t">
             <a:spAutoFit/>
           </a:bodyPr>
           <a:lstStyle/>
@@ -9537,7 +10413,7 @@
           <a:noFill/>
         </p:spPr>
         <p:txBody>
-          <a:bodyPr wrap="square" anchor="t" lIns="0" rIns="0" tIns="0" bIns="0">
+          <a:bodyPr wrap="square" lIns="0" tIns="0" rIns="0" bIns="0" anchor="t">
             <a:spAutoFit/>
           </a:bodyPr>
           <a:lstStyle/>
@@ -9576,7 +10452,7 @@
           <a:noFill/>
         </p:spPr>
         <p:txBody>
-          <a:bodyPr wrap="square" anchor="t" lIns="0" rIns="0" tIns="0" bIns="0">
+          <a:bodyPr wrap="square" lIns="0" tIns="0" rIns="0" bIns="0" anchor="t">
             <a:spAutoFit/>
           </a:bodyPr>
           <a:lstStyle/>
@@ -9615,7 +10491,7 @@
           <a:noFill/>
         </p:spPr>
         <p:txBody>
-          <a:bodyPr wrap="square" anchor="t" lIns="0" rIns="0" tIns="0" bIns="0">
+          <a:bodyPr wrap="square" lIns="0" tIns="0" rIns="0" bIns="0" anchor="t">
             <a:spAutoFit/>
           </a:bodyPr>
           <a:lstStyle/>
@@ -9680,6 +10556,7 @@
           <a:lstStyle/>
           <a:p>
             <a:pPr algn="ctr"/>
+            <a:endParaRPr/>
           </a:p>
         </p:txBody>
       </p:sp>
@@ -9724,6 +10601,7 @@
           <a:lstStyle/>
           <a:p>
             <a:pPr algn="ctr"/>
+            <a:endParaRPr/>
           </a:p>
         </p:txBody>
       </p:sp>
@@ -9744,7 +10622,7 @@
           <a:noFill/>
         </p:spPr>
         <p:txBody>
-          <a:bodyPr wrap="square" anchor="t" lIns="0" rIns="0" tIns="0" bIns="0">
+          <a:bodyPr wrap="square" lIns="0" tIns="0" rIns="0" bIns="0" anchor="t">
             <a:spAutoFit/>
           </a:bodyPr>
           <a:lstStyle/>
@@ -9783,7 +10661,7 @@
           <a:noFill/>
         </p:spPr>
         <p:txBody>
-          <a:bodyPr wrap="square" anchor="t" lIns="0" rIns="0" tIns="0" bIns="0">
+          <a:bodyPr wrap="square" lIns="0" tIns="0" rIns="0" bIns="0" anchor="t">
             <a:spAutoFit/>
           </a:bodyPr>
           <a:lstStyle/>
@@ -9822,7 +10700,7 @@
           <a:noFill/>
         </p:spPr>
         <p:txBody>
-          <a:bodyPr wrap="square" anchor="t" lIns="0" rIns="0" tIns="0" bIns="0">
+          <a:bodyPr wrap="square" lIns="0" tIns="0" rIns="0" bIns="0" anchor="t">
             <a:spAutoFit/>
           </a:bodyPr>
           <a:lstStyle/>
@@ -9861,7 +10739,7 @@
           <a:noFill/>
         </p:spPr>
         <p:txBody>
-          <a:bodyPr wrap="square" anchor="t" lIns="0" rIns="0" tIns="0" bIns="0">
+          <a:bodyPr wrap="square" lIns="0" tIns="0" rIns="0" bIns="0" anchor="t">
             <a:spAutoFit/>
           </a:bodyPr>
           <a:lstStyle/>
@@ -9926,6 +10804,7 @@
           <a:lstStyle/>
           <a:p>
             <a:pPr algn="ctr"/>
+            <a:endParaRPr/>
           </a:p>
         </p:txBody>
       </p:sp>
@@ -9970,6 +10849,7 @@
           <a:lstStyle/>
           <a:p>
             <a:pPr algn="ctr"/>
+            <a:endParaRPr/>
           </a:p>
         </p:txBody>
       </p:sp>
@@ -9990,7 +10870,7 @@
           <a:noFill/>
         </p:spPr>
         <p:txBody>
-          <a:bodyPr wrap="square" anchor="t" lIns="0" rIns="0" tIns="0" bIns="0">
+          <a:bodyPr wrap="square" lIns="0" tIns="0" rIns="0" bIns="0" anchor="t">
             <a:spAutoFit/>
           </a:bodyPr>
           <a:lstStyle/>
@@ -10029,7 +10909,7 @@
           <a:noFill/>
         </p:spPr>
         <p:txBody>
-          <a:bodyPr wrap="square" anchor="t" lIns="0" rIns="0" tIns="0" bIns="0">
+          <a:bodyPr wrap="square" lIns="0" tIns="0" rIns="0" bIns="0" anchor="t">
             <a:spAutoFit/>
           </a:bodyPr>
           <a:lstStyle/>
@@ -10068,7 +10948,7 @@
           <a:noFill/>
         </p:spPr>
         <p:txBody>
-          <a:bodyPr wrap="square" anchor="t" lIns="0" rIns="0" tIns="0" bIns="0">
+          <a:bodyPr wrap="square" lIns="0" tIns="0" rIns="0" bIns="0" anchor="t">
             <a:spAutoFit/>
           </a:bodyPr>
           <a:lstStyle/>
@@ -10107,7 +10987,7 @@
           <a:noFill/>
         </p:spPr>
         <p:txBody>
-          <a:bodyPr wrap="square" anchor="t" lIns="0" rIns="0" tIns="0" bIns="0">
+          <a:bodyPr wrap="square" lIns="0" tIns="0" rIns="0" bIns="0" anchor="t">
             <a:spAutoFit/>
           </a:bodyPr>
           <a:lstStyle/>
@@ -10172,6 +11052,7 @@
           <a:lstStyle/>
           <a:p>
             <a:pPr algn="ctr"/>
+            <a:endParaRPr/>
           </a:p>
         </p:txBody>
       </p:sp>
@@ -10216,6 +11097,7 @@
           <a:lstStyle/>
           <a:p>
             <a:pPr algn="ctr"/>
+            <a:endParaRPr/>
           </a:p>
         </p:txBody>
       </p:sp>
@@ -10236,7 +11118,7 @@
           <a:noFill/>
         </p:spPr>
         <p:txBody>
-          <a:bodyPr wrap="square" anchor="t" lIns="0" rIns="0" tIns="0" bIns="0">
+          <a:bodyPr wrap="square" lIns="0" tIns="0" rIns="0" bIns="0" anchor="t">
             <a:spAutoFit/>
           </a:bodyPr>
           <a:lstStyle/>
@@ -10275,7 +11157,7 @@
           <a:noFill/>
         </p:spPr>
         <p:txBody>
-          <a:bodyPr wrap="square" anchor="t" lIns="0" rIns="0" tIns="0" bIns="0">
+          <a:bodyPr wrap="square" lIns="0" tIns="0" rIns="0" bIns="0" anchor="t">
             <a:spAutoFit/>
           </a:bodyPr>
           <a:lstStyle/>
@@ -10314,7 +11196,7 @@
           <a:noFill/>
         </p:spPr>
         <p:txBody>
-          <a:bodyPr wrap="square" anchor="t" lIns="0" rIns="0" tIns="0" bIns="0">
+          <a:bodyPr wrap="square" lIns="0" tIns="0" rIns="0" bIns="0" anchor="t">
             <a:spAutoFit/>
           </a:bodyPr>
           <a:lstStyle/>
@@ -10353,7 +11235,7 @@
           <a:noFill/>
         </p:spPr>
         <p:txBody>
-          <a:bodyPr wrap="square" anchor="t" lIns="0" rIns="0" tIns="0" bIns="0">
+          <a:bodyPr wrap="square" lIns="0" tIns="0" rIns="0" bIns="0" anchor="t">
             <a:spAutoFit/>
           </a:bodyPr>
           <a:lstStyle/>
@@ -10418,6 +11300,7 @@
           <a:lstStyle/>
           <a:p>
             <a:pPr algn="ctr"/>
+            <a:endParaRPr/>
           </a:p>
         </p:txBody>
       </p:sp>
@@ -10462,6 +11345,7 @@
           <a:lstStyle/>
           <a:p>
             <a:pPr algn="ctr"/>
+            <a:endParaRPr/>
           </a:p>
         </p:txBody>
       </p:sp>
@@ -10482,7 +11366,7 @@
           <a:noFill/>
         </p:spPr>
         <p:txBody>
-          <a:bodyPr wrap="square" anchor="t" lIns="0" rIns="0" tIns="0" bIns="0">
+          <a:bodyPr wrap="square" lIns="0" tIns="0" rIns="0" bIns="0" anchor="t">
             <a:spAutoFit/>
           </a:bodyPr>
           <a:lstStyle/>
@@ -10521,7 +11405,7 @@
           <a:noFill/>
         </p:spPr>
         <p:txBody>
-          <a:bodyPr wrap="square" anchor="t" lIns="0" rIns="0" tIns="0" bIns="0">
+          <a:bodyPr wrap="square" lIns="0" tIns="0" rIns="0" bIns="0" anchor="t">
             <a:spAutoFit/>
           </a:bodyPr>
           <a:lstStyle/>
@@ -10560,7 +11444,7 @@
           <a:noFill/>
         </p:spPr>
         <p:txBody>
-          <a:bodyPr wrap="square" anchor="t" lIns="0" rIns="0" tIns="0" bIns="0">
+          <a:bodyPr wrap="square" lIns="0" tIns="0" rIns="0" bIns="0" anchor="t">
             <a:spAutoFit/>
           </a:bodyPr>
           <a:lstStyle/>
@@ -10599,7 +11483,7 @@
           <a:noFill/>
         </p:spPr>
         <p:txBody>
-          <a:bodyPr wrap="square" anchor="t" lIns="0" rIns="0" tIns="0" bIns="0">
+          <a:bodyPr wrap="square" lIns="0" tIns="0" rIns="0" bIns="0" anchor="t">
             <a:spAutoFit/>
           </a:bodyPr>
           <a:lstStyle/>
@@ -10664,6 +11548,7 @@
           <a:lstStyle/>
           <a:p>
             <a:pPr algn="ctr"/>
+            <a:endParaRPr/>
           </a:p>
         </p:txBody>
       </p:sp>
@@ -10708,6 +11593,7 @@
           <a:lstStyle/>
           <a:p>
             <a:pPr algn="ctr"/>
+            <a:endParaRPr/>
           </a:p>
         </p:txBody>
       </p:sp>
@@ -10728,7 +11614,7 @@
           <a:noFill/>
         </p:spPr>
         <p:txBody>
-          <a:bodyPr wrap="square" anchor="t" lIns="0" rIns="0" tIns="0" bIns="0">
+          <a:bodyPr wrap="square" lIns="0" tIns="0" rIns="0" bIns="0" anchor="t">
             <a:spAutoFit/>
           </a:bodyPr>
           <a:lstStyle/>
@@ -10767,7 +11653,7 @@
           <a:noFill/>
         </p:spPr>
         <p:txBody>
-          <a:bodyPr wrap="square" anchor="t" lIns="0" rIns="0" tIns="0" bIns="0">
+          <a:bodyPr wrap="square" lIns="0" tIns="0" rIns="0" bIns="0" anchor="t">
             <a:spAutoFit/>
           </a:bodyPr>
           <a:lstStyle/>
@@ -10806,7 +11692,7 @@
           <a:noFill/>
         </p:spPr>
         <p:txBody>
-          <a:bodyPr wrap="square" anchor="t" lIns="0" rIns="0" tIns="0" bIns="0">
+          <a:bodyPr wrap="square" lIns="0" tIns="0" rIns="0" bIns="0" anchor="t">
             <a:spAutoFit/>
           </a:bodyPr>
           <a:lstStyle/>
@@ -10845,7 +11731,7 @@
           <a:noFill/>
         </p:spPr>
         <p:txBody>
-          <a:bodyPr wrap="square" anchor="t" lIns="0" rIns="0" tIns="0" bIns="0">
+          <a:bodyPr wrap="square" lIns="0" tIns="0" rIns="0" bIns="0" anchor="t">
             <a:spAutoFit/>
           </a:bodyPr>
           <a:lstStyle/>
@@ -10876,7 +11762,7 @@
 </file>
 
 <file path=ppt/slides/slide14.xml><?xml version="1.0" encoding="utf-8"?>
-<p:sld xmlns:a="http://schemas.openxmlformats.org/drawingml/2006/main" xmlns:p="http://schemas.openxmlformats.org/presentationml/2006/main" xmlns:r="http://schemas.openxmlformats.org/officeDocument/2006/relationships">
+<p:sld xmlns:a="http://schemas.openxmlformats.org/drawingml/2006/main" xmlns:r="http://schemas.openxmlformats.org/officeDocument/2006/relationships" xmlns:p="http://schemas.openxmlformats.org/presentationml/2006/main">
   <p:cSld>
     <p:spTree>
       <p:nvGrpSpPr>
@@ -10884,7 +11770,14 @@
         <p:cNvGrpSpPr/>
         <p:nvPr/>
       </p:nvGrpSpPr>
-      <p:grpSpPr/>
+      <p:grpSpPr>
+        <a:xfrm>
+          <a:off x="0" y="0"/>
+          <a:ext cx="0" cy="0"/>
+          <a:chOff x="0" y="0"/>
+          <a:chExt cx="0" cy="0"/>
+        </a:xfrm>
+      </p:grpSpPr>
       <p:sp>
         <p:nvSpPr>
           <p:cNvPr id="2" name="Rectangle 1"/>
@@ -10926,6 +11819,7 @@
           <a:lstStyle/>
           <a:p>
             <a:pPr algn="ctr"/>
+            <a:endParaRPr/>
           </a:p>
         </p:txBody>
       </p:sp>
@@ -10970,6 +11864,7 @@
           <a:lstStyle/>
           <a:p>
             <a:pPr algn="ctr"/>
+            <a:endParaRPr/>
           </a:p>
         </p:txBody>
       </p:sp>
@@ -11014,6 +11909,7 @@
           <a:lstStyle/>
           <a:p>
             <a:pPr algn="ctr"/>
+            <a:endParaRPr/>
           </a:p>
         </p:txBody>
       </p:sp>
@@ -11082,6 +11978,7 @@
           <a:lstStyle/>
           <a:p>
             <a:pPr algn="ctr"/>
+            <a:endParaRPr/>
           </a:p>
         </p:txBody>
       </p:sp>
@@ -11126,6 +12023,7 @@
           <a:lstStyle/>
           <a:p>
             <a:pPr algn="ctr"/>
+            <a:endParaRPr/>
           </a:p>
         </p:txBody>
       </p:sp>
@@ -11170,6 +12068,7 @@
           <a:lstStyle/>
           <a:p>
             <a:pPr algn="ctr"/>
+            <a:endParaRPr/>
           </a:p>
         </p:txBody>
       </p:sp>
@@ -11190,7 +12089,7 @@
           <a:noFill/>
         </p:spPr>
         <p:txBody>
-          <a:bodyPr wrap="square" anchor="t" lIns="0" rIns="0" tIns="0" bIns="0">
+          <a:bodyPr wrap="square" lIns="0" tIns="0" rIns="0" bIns="0" anchor="t">
             <a:spAutoFit/>
           </a:bodyPr>
           <a:lstStyle/>
@@ -11229,7 +12128,7 @@
           <a:noFill/>
         </p:spPr>
         <p:txBody>
-          <a:bodyPr wrap="square" anchor="t" lIns="0" rIns="0" tIns="0" bIns="0">
+          <a:bodyPr wrap="square" lIns="0" tIns="0" rIns="0" bIns="0" anchor="t">
             <a:spAutoFit/>
           </a:bodyPr>
           <a:lstStyle/>
@@ -11292,6 +12191,7 @@
           <a:lstStyle/>
           <a:p>
             <a:pPr algn="ctr"/>
+            <a:endParaRPr/>
           </a:p>
         </p:txBody>
       </p:sp>
@@ -11336,6 +12236,7 @@
           <a:lstStyle/>
           <a:p>
             <a:pPr algn="ctr"/>
+            <a:endParaRPr/>
           </a:p>
         </p:txBody>
       </p:sp>
@@ -11380,6 +12281,7 @@
           <a:lstStyle/>
           <a:p>
             <a:pPr algn="ctr"/>
+            <a:endParaRPr/>
           </a:p>
         </p:txBody>
       </p:sp>
@@ -11400,7 +12302,7 @@
           <a:noFill/>
         </p:spPr>
         <p:txBody>
-          <a:bodyPr wrap="none" anchor="t" lIns="0" rIns="0" tIns="0" bIns="0">
+          <a:bodyPr wrap="none" lIns="0" tIns="0" rIns="0" bIns="0" anchor="t">
             <a:spAutoFit/>
           </a:bodyPr>
           <a:lstStyle/>
@@ -11439,7 +12341,7 @@
           <a:noFill/>
         </p:spPr>
         <p:txBody>
-          <a:bodyPr wrap="square" anchor="t" lIns="0" rIns="0" tIns="0" bIns="0">
+          <a:bodyPr wrap="square" lIns="0" tIns="0" rIns="0" bIns="0" anchor="t">
             <a:spAutoFit/>
           </a:bodyPr>
           <a:lstStyle/>
@@ -11505,6 +12407,7 @@
           <a:lstStyle/>
           <a:p>
             <a:pPr algn="ctr"/>
+            <a:endParaRPr/>
           </a:p>
         </p:txBody>
       </p:sp>
@@ -11525,7 +12428,7 @@
           <a:noFill/>
         </p:spPr>
         <p:txBody>
-          <a:bodyPr wrap="square" anchor="t" lIns="0" rIns="0" tIns="0" bIns="0">
+          <a:bodyPr wrap="square" lIns="0" tIns="0" rIns="0" bIns="0" anchor="t">
             <a:spAutoFit/>
           </a:bodyPr>
           <a:lstStyle/>
@@ -11564,7 +12467,7 @@
           <a:noFill/>
         </p:spPr>
         <p:txBody>
-          <a:bodyPr wrap="square" anchor="t" lIns="0" rIns="0" tIns="0" bIns="0">
+          <a:bodyPr wrap="square" lIns="0" tIns="0" rIns="0" bIns="0" anchor="t">
             <a:spAutoFit/>
           </a:bodyPr>
           <a:lstStyle/>
@@ -11603,7 +12506,7 @@
           <a:noFill/>
         </p:spPr>
         <p:txBody>
-          <a:bodyPr wrap="square" anchor="t" lIns="0" rIns="0" tIns="0" bIns="0">
+          <a:bodyPr wrap="square" lIns="0" tIns="0" rIns="0" bIns="0" anchor="t">
             <a:spAutoFit/>
           </a:bodyPr>
           <a:lstStyle/>
@@ -11634,7 +12537,7 @@
 </file>
 
 <file path=ppt/slides/slide15.xml><?xml version="1.0" encoding="utf-8"?>
-<p:sld xmlns:a="http://schemas.openxmlformats.org/drawingml/2006/main" xmlns:p="http://schemas.openxmlformats.org/presentationml/2006/main" xmlns:r="http://schemas.openxmlformats.org/officeDocument/2006/relationships">
+<p:sld xmlns:a="http://schemas.openxmlformats.org/drawingml/2006/main" xmlns:r="http://schemas.openxmlformats.org/officeDocument/2006/relationships" xmlns:p="http://schemas.openxmlformats.org/presentationml/2006/main">
   <p:cSld>
     <p:spTree>
       <p:nvGrpSpPr>
@@ -11642,7 +12545,14 @@
         <p:cNvGrpSpPr/>
         <p:nvPr/>
       </p:nvGrpSpPr>
-      <p:grpSpPr/>
+      <p:grpSpPr>
+        <a:xfrm>
+          <a:off x="0" y="0"/>
+          <a:ext cx="0" cy="0"/>
+          <a:chOff x="0" y="0"/>
+          <a:chExt cx="0" cy="0"/>
+        </a:xfrm>
+      </p:grpSpPr>
       <p:sp>
         <p:nvSpPr>
           <p:cNvPr id="2" name="Rectangle 1"/>
@@ -11684,6 +12594,7 @@
           <a:lstStyle/>
           <a:p>
             <a:pPr algn="ctr"/>
+            <a:endParaRPr/>
           </a:p>
         </p:txBody>
       </p:sp>
@@ -11728,6 +12639,7 @@
           <a:lstStyle/>
           <a:p>
             <a:pPr algn="ctr"/>
+            <a:endParaRPr/>
           </a:p>
         </p:txBody>
       </p:sp>
@@ -11772,6 +12684,7 @@
           <a:lstStyle/>
           <a:p>
             <a:pPr algn="ctr"/>
+            <a:endParaRPr/>
           </a:p>
         </p:txBody>
       </p:sp>
@@ -11840,6 +12753,7 @@
           <a:lstStyle/>
           <a:p>
             <a:pPr algn="ctr"/>
+            <a:endParaRPr/>
           </a:p>
         </p:txBody>
       </p:sp>
@@ -11884,6 +12798,7 @@
           <a:lstStyle/>
           <a:p>
             <a:pPr algn="ctr"/>
+            <a:endParaRPr/>
           </a:p>
         </p:txBody>
       </p:sp>
@@ -11928,6 +12843,7 @@
           <a:lstStyle/>
           <a:p>
             <a:pPr algn="ctr"/>
+            <a:endParaRPr/>
           </a:p>
         </p:txBody>
       </p:sp>
@@ -11948,7 +12864,7 @@
           <a:noFill/>
         </p:spPr>
         <p:txBody>
-          <a:bodyPr wrap="square" anchor="t" lIns="0" rIns="0" tIns="0" bIns="0">
+          <a:bodyPr wrap="square" lIns="0" tIns="0" rIns="0" bIns="0" anchor="t">
             <a:spAutoFit/>
           </a:bodyPr>
           <a:lstStyle/>
@@ -12011,6 +12927,7 @@
           <a:lstStyle/>
           <a:p>
             <a:pPr algn="ctr"/>
+            <a:endParaRPr/>
           </a:p>
         </p:txBody>
       </p:sp>
@@ -12055,6 +12972,7 @@
           <a:lstStyle/>
           <a:p>
             <a:pPr algn="ctr"/>
+            <a:endParaRPr/>
           </a:p>
         </p:txBody>
       </p:sp>
@@ -12099,6 +13017,7 @@
           <a:lstStyle/>
           <a:p>
             <a:pPr algn="ctr"/>
+            <a:endParaRPr/>
           </a:p>
         </p:txBody>
       </p:sp>
@@ -12119,7 +13038,7 @@
           <a:noFill/>
         </p:spPr>
         <p:txBody>
-          <a:bodyPr wrap="square" anchor="t" lIns="0" rIns="0" tIns="0" bIns="0">
+          <a:bodyPr wrap="square" lIns="0" tIns="0" rIns="0" bIns="0" anchor="t">
             <a:spAutoFit/>
           </a:bodyPr>
           <a:lstStyle/>
@@ -12158,7 +13077,7 @@
           <a:noFill/>
         </p:spPr>
         <p:txBody>
-          <a:bodyPr wrap="square" anchor="t" lIns="0" rIns="0" tIns="0" bIns="0">
+          <a:bodyPr wrap="square" lIns="0" tIns="0" rIns="0" bIns="0" anchor="t">
             <a:spAutoFit/>
           </a:bodyPr>
           <a:lstStyle/>
@@ -12213,7 +13132,7 @@
           <a:noFill/>
         </p:spPr>
         <p:txBody>
-          <a:bodyPr wrap="square" anchor="t" lIns="0" rIns="0" tIns="0" bIns="0">
+          <a:bodyPr wrap="square" lIns="0" tIns="0" rIns="0" bIns="0" anchor="t">
             <a:spAutoFit/>
           </a:bodyPr>
           <a:lstStyle/>
@@ -12244,7 +13163,7 @@
 </file>
 
 <file path=ppt/slides/slide16.xml><?xml version="1.0" encoding="utf-8"?>
-<p:sld xmlns:a="http://schemas.openxmlformats.org/drawingml/2006/main" xmlns:p="http://schemas.openxmlformats.org/presentationml/2006/main" xmlns:r="http://schemas.openxmlformats.org/officeDocument/2006/relationships">
+<p:sld xmlns:a="http://schemas.openxmlformats.org/drawingml/2006/main" xmlns:r="http://schemas.openxmlformats.org/officeDocument/2006/relationships" xmlns:p="http://schemas.openxmlformats.org/presentationml/2006/main">
   <p:cSld>
     <p:spTree>
       <p:nvGrpSpPr>
@@ -12252,7 +13171,14 @@
         <p:cNvGrpSpPr/>
         <p:nvPr/>
       </p:nvGrpSpPr>
-      <p:grpSpPr/>
+      <p:grpSpPr>
+        <a:xfrm>
+          <a:off x="0" y="0"/>
+          <a:ext cx="0" cy="0"/>
+          <a:chOff x="0" y="0"/>
+          <a:chExt cx="0" cy="0"/>
+        </a:xfrm>
+      </p:grpSpPr>
       <p:sp>
         <p:nvSpPr>
           <p:cNvPr id="2" name="Rectangle 1"/>
@@ -12294,6 +13220,7 @@
           <a:lstStyle/>
           <a:p>
             <a:pPr algn="ctr"/>
+            <a:endParaRPr/>
           </a:p>
         </p:txBody>
       </p:sp>
@@ -12338,6 +13265,7 @@
           <a:lstStyle/>
           <a:p>
             <a:pPr algn="ctr"/>
+            <a:endParaRPr/>
           </a:p>
         </p:txBody>
       </p:sp>
@@ -12382,6 +13310,7 @@
           <a:lstStyle/>
           <a:p>
             <a:pPr algn="ctr"/>
+            <a:endParaRPr/>
           </a:p>
         </p:txBody>
       </p:sp>
@@ -12450,6 +13379,7 @@
           <a:lstStyle/>
           <a:p>
             <a:pPr algn="ctr"/>
+            <a:endParaRPr/>
           </a:p>
         </p:txBody>
       </p:sp>
@@ -12494,6 +13424,7 @@
           <a:lstStyle/>
           <a:p>
             <a:pPr algn="ctr"/>
+            <a:endParaRPr/>
           </a:p>
         </p:txBody>
       </p:sp>
@@ -12538,6 +13469,7 @@
           <a:lstStyle/>
           <a:p>
             <a:pPr algn="ctr"/>
+            <a:endParaRPr/>
           </a:p>
         </p:txBody>
       </p:sp>
@@ -12558,7 +13490,7 @@
           <a:noFill/>
         </p:spPr>
         <p:txBody>
-          <a:bodyPr wrap="square" anchor="t" lIns="0" rIns="0" tIns="0" bIns="0">
+          <a:bodyPr wrap="square" lIns="0" tIns="0" rIns="0" bIns="0" anchor="t">
             <a:spAutoFit/>
           </a:bodyPr>
           <a:lstStyle/>
@@ -12597,7 +13529,7 @@
           <a:noFill/>
         </p:spPr>
         <p:txBody>
-          <a:bodyPr wrap="square" anchor="t" lIns="0" rIns="0" tIns="0" bIns="0">
+          <a:bodyPr wrap="square" lIns="0" tIns="0" rIns="0" bIns="0" anchor="t">
             <a:spAutoFit/>
           </a:bodyPr>
           <a:lstStyle/>
@@ -12660,6 +13592,7 @@
           <a:lstStyle/>
           <a:p>
             <a:pPr algn="ctr"/>
+            <a:endParaRPr/>
           </a:p>
         </p:txBody>
       </p:sp>
@@ -12704,6 +13637,7 @@
           <a:lstStyle/>
           <a:p>
             <a:pPr algn="ctr"/>
+            <a:endParaRPr/>
           </a:p>
         </p:txBody>
       </p:sp>
@@ -12748,6 +13682,7 @@
           <a:lstStyle/>
           <a:p>
             <a:pPr algn="ctr"/>
+            <a:endParaRPr/>
           </a:p>
         </p:txBody>
       </p:sp>
@@ -12768,7 +13703,7 @@
           <a:noFill/>
         </p:spPr>
         <p:txBody>
-          <a:bodyPr wrap="none" anchor="t" lIns="0" rIns="0" tIns="0" bIns="0">
+          <a:bodyPr wrap="none" lIns="0" tIns="0" rIns="0" bIns="0" anchor="t">
             <a:spAutoFit/>
           </a:bodyPr>
           <a:lstStyle/>
@@ -12807,7 +13742,7 @@
           <a:noFill/>
         </p:spPr>
         <p:txBody>
-          <a:bodyPr wrap="square" anchor="t" lIns="0" rIns="0" tIns="0" bIns="0">
+          <a:bodyPr wrap="square" lIns="0" tIns="0" rIns="0" bIns="0" anchor="t">
             <a:spAutoFit/>
           </a:bodyPr>
           <a:lstStyle/>
@@ -12872,6 +13807,7 @@
           <a:lstStyle/>
           <a:p>
             <a:pPr algn="ctr"/>
+            <a:endParaRPr/>
           </a:p>
         </p:txBody>
       </p:sp>
@@ -12892,7 +13828,7 @@
           <a:noFill/>
         </p:spPr>
         <p:txBody>
-          <a:bodyPr wrap="square" anchor="t" lIns="0" rIns="0" tIns="0" bIns="0">
+          <a:bodyPr wrap="square" lIns="0" tIns="0" rIns="0" bIns="0" anchor="t">
             <a:spAutoFit/>
           </a:bodyPr>
           <a:lstStyle/>
@@ -12931,7 +13867,7 @@
           <a:noFill/>
         </p:spPr>
         <p:txBody>
-          <a:bodyPr wrap="square" anchor="t" lIns="0" rIns="0" tIns="0" bIns="0">
+          <a:bodyPr wrap="square" lIns="0" tIns="0" rIns="0" bIns="0" anchor="t">
             <a:spAutoFit/>
           </a:bodyPr>
           <a:lstStyle/>
@@ -12970,7 +13906,7 @@
           <a:noFill/>
         </p:spPr>
         <p:txBody>
-          <a:bodyPr wrap="square" anchor="t" lIns="0" rIns="0" tIns="0" bIns="0">
+          <a:bodyPr wrap="square" lIns="0" tIns="0" rIns="0" bIns="0" anchor="t">
             <a:spAutoFit/>
           </a:bodyPr>
           <a:lstStyle/>
@@ -13035,6 +13971,7 @@
           <a:lstStyle/>
           <a:p>
             <a:pPr algn="ctr"/>
+            <a:endParaRPr/>
           </a:p>
         </p:txBody>
       </p:sp>
@@ -13055,7 +13992,7 @@
           <a:noFill/>
         </p:spPr>
         <p:txBody>
-          <a:bodyPr wrap="square" anchor="t" lIns="0" rIns="0" tIns="0" bIns="0">
+          <a:bodyPr wrap="square" lIns="0" tIns="0" rIns="0" bIns="0" anchor="t">
             <a:spAutoFit/>
           </a:bodyPr>
           <a:lstStyle/>
@@ -13094,7 +14031,7 @@
           <a:noFill/>
         </p:spPr>
         <p:txBody>
-          <a:bodyPr wrap="square" anchor="t" lIns="0" rIns="0" tIns="0" bIns="0">
+          <a:bodyPr wrap="square" lIns="0" tIns="0" rIns="0" bIns="0" anchor="t">
             <a:spAutoFit/>
           </a:bodyPr>
           <a:lstStyle/>
@@ -13133,7 +14070,7 @@
           <a:noFill/>
         </p:spPr>
         <p:txBody>
-          <a:bodyPr wrap="square" anchor="t" lIns="0" rIns="0" tIns="0" bIns="0">
+          <a:bodyPr wrap="square" lIns="0" tIns="0" rIns="0" bIns="0" anchor="t">
             <a:spAutoFit/>
           </a:bodyPr>
           <a:lstStyle/>
@@ -13198,6 +14135,7 @@
           <a:lstStyle/>
           <a:p>
             <a:pPr algn="ctr"/>
+            <a:endParaRPr/>
           </a:p>
         </p:txBody>
       </p:sp>
@@ -13218,7 +14156,7 @@
           <a:noFill/>
         </p:spPr>
         <p:txBody>
-          <a:bodyPr wrap="square" anchor="t" lIns="0" rIns="0" tIns="0" bIns="0">
+          <a:bodyPr wrap="square" lIns="0" tIns="0" rIns="0" bIns="0" anchor="t">
             <a:spAutoFit/>
           </a:bodyPr>
           <a:lstStyle/>
@@ -13257,7 +14195,7 @@
           <a:noFill/>
         </p:spPr>
         <p:txBody>
-          <a:bodyPr wrap="square" anchor="t" lIns="0" rIns="0" tIns="0" bIns="0">
+          <a:bodyPr wrap="square" lIns="0" tIns="0" rIns="0" bIns="0" anchor="t">
             <a:spAutoFit/>
           </a:bodyPr>
           <a:lstStyle/>
@@ -13296,7 +14234,7 @@
           <a:noFill/>
         </p:spPr>
         <p:txBody>
-          <a:bodyPr wrap="square" anchor="t" lIns="0" rIns="0" tIns="0" bIns="0">
+          <a:bodyPr wrap="square" lIns="0" tIns="0" rIns="0" bIns="0" anchor="t">
             <a:spAutoFit/>
           </a:bodyPr>
           <a:lstStyle/>
@@ -13327,7 +14265,7 @@
 </file>
 
 <file path=ppt/slides/slide17.xml><?xml version="1.0" encoding="utf-8"?>
-<p:sld xmlns:a="http://schemas.openxmlformats.org/drawingml/2006/main" xmlns:p="http://schemas.openxmlformats.org/presentationml/2006/main" xmlns:r="http://schemas.openxmlformats.org/officeDocument/2006/relationships">
+<p:sld xmlns:a="http://schemas.openxmlformats.org/drawingml/2006/main" xmlns:r="http://schemas.openxmlformats.org/officeDocument/2006/relationships" xmlns:p="http://schemas.openxmlformats.org/presentationml/2006/main">
   <p:cSld>
     <p:spTree>
       <p:nvGrpSpPr>
@@ -13335,7 +14273,14 @@
         <p:cNvGrpSpPr/>
         <p:nvPr/>
       </p:nvGrpSpPr>
-      <p:grpSpPr/>
+      <p:grpSpPr>
+        <a:xfrm>
+          <a:off x="0" y="0"/>
+          <a:ext cx="0" cy="0"/>
+          <a:chOff x="0" y="0"/>
+          <a:chExt cx="0" cy="0"/>
+        </a:xfrm>
+      </p:grpSpPr>
       <p:sp>
         <p:nvSpPr>
           <p:cNvPr id="2" name="Rectangle 1"/>
@@ -13377,6 +14322,7 @@
           <a:lstStyle/>
           <a:p>
             <a:pPr algn="ctr"/>
+            <a:endParaRPr/>
           </a:p>
         </p:txBody>
       </p:sp>
@@ -13421,6 +14367,7 @@
           <a:lstStyle/>
           <a:p>
             <a:pPr algn="ctr"/>
+            <a:endParaRPr/>
           </a:p>
         </p:txBody>
       </p:sp>
@@ -13465,6 +14412,7 @@
           <a:lstStyle/>
           <a:p>
             <a:pPr algn="ctr"/>
+            <a:endParaRPr/>
           </a:p>
         </p:txBody>
       </p:sp>
@@ -13533,6 +14481,7 @@
           <a:lstStyle/>
           <a:p>
             <a:pPr algn="ctr"/>
+            <a:endParaRPr/>
           </a:p>
         </p:txBody>
       </p:sp>
@@ -13577,6 +14526,7 @@
           <a:lstStyle/>
           <a:p>
             <a:pPr algn="ctr"/>
+            <a:endParaRPr/>
           </a:p>
         </p:txBody>
       </p:sp>
@@ -13621,6 +14571,7 @@
           <a:lstStyle/>
           <a:p>
             <a:pPr algn="ctr"/>
+            <a:endParaRPr/>
           </a:p>
         </p:txBody>
       </p:sp>
@@ -13641,7 +14592,7 @@
           <a:noFill/>
         </p:spPr>
         <p:txBody>
-          <a:bodyPr wrap="square" anchor="t" lIns="0" rIns="0" tIns="0" bIns="0">
+          <a:bodyPr wrap="square" lIns="0" tIns="0" rIns="0" bIns="0" anchor="t">
             <a:spAutoFit/>
           </a:bodyPr>
           <a:lstStyle/>
@@ -13680,7 +14631,7 @@
           <a:noFill/>
         </p:spPr>
         <p:txBody>
-          <a:bodyPr wrap="square" anchor="t" lIns="0" rIns="0" tIns="0" bIns="0">
+          <a:bodyPr wrap="square" lIns="0" tIns="0" rIns="0" bIns="0" anchor="t">
             <a:spAutoFit/>
           </a:bodyPr>
           <a:lstStyle/>
@@ -13743,6 +14694,7 @@
           <a:lstStyle/>
           <a:p>
             <a:pPr algn="ctr"/>
+            <a:endParaRPr/>
           </a:p>
         </p:txBody>
       </p:sp>
@@ -13787,6 +14739,7 @@
           <a:lstStyle/>
           <a:p>
             <a:pPr algn="ctr"/>
+            <a:endParaRPr/>
           </a:p>
         </p:txBody>
       </p:sp>
@@ -13831,6 +14784,7 @@
           <a:lstStyle/>
           <a:p>
             <a:pPr algn="ctr"/>
+            <a:endParaRPr/>
           </a:p>
         </p:txBody>
       </p:sp>
@@ -13851,7 +14805,7 @@
           <a:noFill/>
         </p:spPr>
         <p:txBody>
-          <a:bodyPr wrap="none" anchor="t" lIns="0" rIns="0" tIns="0" bIns="0">
+          <a:bodyPr wrap="none" lIns="0" tIns="0" rIns="0" bIns="0" anchor="t">
             <a:spAutoFit/>
           </a:bodyPr>
           <a:lstStyle/>
@@ -13890,7 +14844,7 @@
           <a:noFill/>
         </p:spPr>
         <p:txBody>
-          <a:bodyPr wrap="square" anchor="t" lIns="0" rIns="0" tIns="0" bIns="0">
+          <a:bodyPr wrap="square" lIns="0" tIns="0" rIns="0" bIns="0" anchor="t">
             <a:spAutoFit/>
           </a:bodyPr>
           <a:lstStyle/>
@@ -13955,6 +14909,7 @@
           <a:lstStyle/>
           <a:p>
             <a:pPr algn="ctr"/>
+            <a:endParaRPr/>
           </a:p>
         </p:txBody>
       </p:sp>
@@ -13999,7 +14954,7 @@
           <a:noFill/>
         </p:spPr>
         <p:txBody>
-          <a:bodyPr wrap="square" anchor="t" lIns="0" rIns="0" tIns="0" bIns="0">
+          <a:bodyPr wrap="square" lIns="0" tIns="0" rIns="0" bIns="0" anchor="t">
             <a:spAutoFit/>
           </a:bodyPr>
           <a:lstStyle/>
@@ -14190,7 +15145,7 @@
           <a:noFill/>
         </p:spPr>
         <p:txBody>
-          <a:bodyPr wrap="square" anchor="t" lIns="0" rIns="0" tIns="0" bIns="0">
+          <a:bodyPr wrap="square" lIns="0" tIns="0" rIns="0" bIns="0" anchor="t">
             <a:spAutoFit/>
           </a:bodyPr>
           <a:lstStyle/>
@@ -14221,7 +15176,7 @@
 </file>
 
 <file path=ppt/slides/slide18.xml><?xml version="1.0" encoding="utf-8"?>
-<p:sld xmlns:a="http://schemas.openxmlformats.org/drawingml/2006/main" xmlns:p="http://schemas.openxmlformats.org/presentationml/2006/main" xmlns:r="http://schemas.openxmlformats.org/officeDocument/2006/relationships">
+<p:sld xmlns:a="http://schemas.openxmlformats.org/drawingml/2006/main" xmlns:r="http://schemas.openxmlformats.org/officeDocument/2006/relationships" xmlns:p="http://schemas.openxmlformats.org/presentationml/2006/main">
   <p:cSld>
     <p:spTree>
       <p:nvGrpSpPr>
@@ -14229,7 +15184,14 @@
         <p:cNvGrpSpPr/>
         <p:nvPr/>
       </p:nvGrpSpPr>
-      <p:grpSpPr/>
+      <p:grpSpPr>
+        <a:xfrm>
+          <a:off x="0" y="0"/>
+          <a:ext cx="0" cy="0"/>
+          <a:chOff x="0" y="0"/>
+          <a:chExt cx="0" cy="0"/>
+        </a:xfrm>
+      </p:grpSpPr>
       <p:sp>
         <p:nvSpPr>
           <p:cNvPr id="2" name="Rectangle 1"/>
@@ -14271,6 +15233,7 @@
           <a:lstStyle/>
           <a:p>
             <a:pPr algn="ctr"/>
+            <a:endParaRPr/>
           </a:p>
         </p:txBody>
       </p:sp>
@@ -14315,6 +15278,7 @@
           <a:lstStyle/>
           <a:p>
             <a:pPr algn="ctr"/>
+            <a:endParaRPr/>
           </a:p>
         </p:txBody>
       </p:sp>
@@ -14359,6 +15323,7 @@
           <a:lstStyle/>
           <a:p>
             <a:pPr algn="ctr"/>
+            <a:endParaRPr/>
           </a:p>
         </p:txBody>
       </p:sp>
@@ -14427,6 +15392,7 @@
           <a:lstStyle/>
           <a:p>
             <a:pPr algn="ctr"/>
+            <a:endParaRPr/>
           </a:p>
         </p:txBody>
       </p:sp>
@@ -14471,6 +15437,7 @@
           <a:lstStyle/>
           <a:p>
             <a:pPr algn="ctr"/>
+            <a:endParaRPr/>
           </a:p>
         </p:txBody>
       </p:sp>
@@ -14515,6 +15482,7 @@
           <a:lstStyle/>
           <a:p>
             <a:pPr algn="ctr"/>
+            <a:endParaRPr/>
           </a:p>
         </p:txBody>
       </p:sp>
@@ -14535,7 +15503,7 @@
           <a:noFill/>
         </p:spPr>
         <p:txBody>
-          <a:bodyPr wrap="square" anchor="t" lIns="0" rIns="0" tIns="0" bIns="0">
+          <a:bodyPr wrap="square" lIns="0" tIns="0" rIns="0" bIns="0" anchor="t">
             <a:spAutoFit/>
           </a:bodyPr>
           <a:lstStyle/>
@@ -14574,7 +15542,7 @@
           <a:noFill/>
         </p:spPr>
         <p:txBody>
-          <a:bodyPr wrap="square" anchor="t" lIns="0" rIns="0" tIns="0" bIns="0">
+          <a:bodyPr wrap="square" lIns="0" tIns="0" rIns="0" bIns="0" anchor="t">
             <a:spAutoFit/>
           </a:bodyPr>
           <a:lstStyle/>
@@ -14637,6 +15605,7 @@
           <a:lstStyle/>
           <a:p>
             <a:pPr algn="ctr"/>
+            <a:endParaRPr/>
           </a:p>
         </p:txBody>
       </p:sp>
@@ -14681,6 +15650,7 @@
           <a:lstStyle/>
           <a:p>
             <a:pPr algn="ctr"/>
+            <a:endParaRPr/>
           </a:p>
         </p:txBody>
       </p:sp>
@@ -14725,6 +15695,7 @@
           <a:lstStyle/>
           <a:p>
             <a:pPr algn="ctr"/>
+            <a:endParaRPr/>
           </a:p>
         </p:txBody>
       </p:sp>
@@ -14745,7 +15716,7 @@
           <a:noFill/>
         </p:spPr>
         <p:txBody>
-          <a:bodyPr wrap="none" anchor="t" lIns="0" rIns="0" tIns="0" bIns="0">
+          <a:bodyPr wrap="none" lIns="0" tIns="0" rIns="0" bIns="0" anchor="t">
             <a:spAutoFit/>
           </a:bodyPr>
           <a:lstStyle/>
@@ -14784,7 +15755,7 @@
           <a:noFill/>
         </p:spPr>
         <p:txBody>
-          <a:bodyPr wrap="square" anchor="t" lIns="0" rIns="0" tIns="0" bIns="0">
+          <a:bodyPr wrap="square" lIns="0" tIns="0" rIns="0" bIns="0" anchor="t">
             <a:spAutoFit/>
           </a:bodyPr>
           <a:lstStyle/>
@@ -14849,6 +15820,7 @@
           <a:lstStyle/>
           <a:p>
             <a:pPr algn="ctr"/>
+            <a:endParaRPr/>
           </a:p>
         </p:txBody>
       </p:sp>
@@ -14919,6 +15891,7 @@
           <a:lstStyle/>
           <a:p>
             <a:pPr algn="ctr"/>
+            <a:endParaRPr/>
           </a:p>
         </p:txBody>
       </p:sp>
@@ -14963,7 +15936,7 @@
           <a:noFill/>
         </p:spPr>
         <p:txBody>
-          <a:bodyPr wrap="square" anchor="t" lIns="0" rIns="0" tIns="0" bIns="0">
+          <a:bodyPr wrap="square" lIns="0" tIns="0" rIns="0" bIns="0" anchor="t">
             <a:spAutoFit/>
           </a:bodyPr>
           <a:lstStyle/>
@@ -15042,7 +16015,7 @@
           <a:noFill/>
         </p:spPr>
         <p:txBody>
-          <a:bodyPr wrap="square" anchor="t" lIns="0" rIns="0" tIns="0" bIns="0">
+          <a:bodyPr wrap="square" lIns="0" tIns="0" rIns="0" bIns="0" anchor="t">
             <a:spAutoFit/>
           </a:bodyPr>
           <a:lstStyle/>
@@ -15073,7 +16046,7 @@
 </file>
 
 <file path=ppt/slides/slide19.xml><?xml version="1.0" encoding="utf-8"?>
-<p:sld xmlns:a="http://schemas.openxmlformats.org/drawingml/2006/main" xmlns:p="http://schemas.openxmlformats.org/presentationml/2006/main" xmlns:r="http://schemas.openxmlformats.org/officeDocument/2006/relationships">
+<p:sld xmlns:a="http://schemas.openxmlformats.org/drawingml/2006/main" xmlns:r="http://schemas.openxmlformats.org/officeDocument/2006/relationships" xmlns:p="http://schemas.openxmlformats.org/presentationml/2006/main">
   <p:cSld>
     <p:spTree>
       <p:nvGrpSpPr>
@@ -15081,7 +16054,14 @@
         <p:cNvGrpSpPr/>
         <p:nvPr/>
       </p:nvGrpSpPr>
-      <p:grpSpPr/>
+      <p:grpSpPr>
+        <a:xfrm>
+          <a:off x="0" y="0"/>
+          <a:ext cx="0" cy="0"/>
+          <a:chOff x="0" y="0"/>
+          <a:chExt cx="0" cy="0"/>
+        </a:xfrm>
+      </p:grpSpPr>
       <p:sp>
         <p:nvSpPr>
           <p:cNvPr id="2" name="Rectangle 1"/>
@@ -15123,6 +16103,7 @@
           <a:lstStyle/>
           <a:p>
             <a:pPr algn="ctr"/>
+            <a:endParaRPr/>
           </a:p>
         </p:txBody>
       </p:sp>
@@ -15167,6 +16148,7 @@
           <a:lstStyle/>
           <a:p>
             <a:pPr algn="ctr"/>
+            <a:endParaRPr/>
           </a:p>
         </p:txBody>
       </p:sp>
@@ -15211,6 +16193,7 @@
           <a:lstStyle/>
           <a:p>
             <a:pPr algn="ctr"/>
+            <a:endParaRPr/>
           </a:p>
         </p:txBody>
       </p:sp>
@@ -15279,6 +16262,7 @@
           <a:lstStyle/>
           <a:p>
             <a:pPr algn="ctr"/>
+            <a:endParaRPr/>
           </a:p>
         </p:txBody>
       </p:sp>
@@ -15323,6 +16307,7 @@
           <a:lstStyle/>
           <a:p>
             <a:pPr algn="ctr"/>
+            <a:endParaRPr/>
           </a:p>
         </p:txBody>
       </p:sp>
@@ -15367,6 +16352,7 @@
           <a:lstStyle/>
           <a:p>
             <a:pPr algn="ctr"/>
+            <a:endParaRPr/>
           </a:p>
         </p:txBody>
       </p:sp>
@@ -15387,7 +16373,7 @@
           <a:noFill/>
         </p:spPr>
         <p:txBody>
-          <a:bodyPr wrap="square" anchor="t" lIns="0" rIns="0" tIns="0" bIns="0">
+          <a:bodyPr wrap="square" lIns="0" tIns="0" rIns="0" bIns="0" anchor="t">
             <a:spAutoFit/>
           </a:bodyPr>
           <a:lstStyle/>
@@ -15426,7 +16412,7 @@
           <a:noFill/>
         </p:spPr>
         <p:txBody>
-          <a:bodyPr wrap="square" anchor="t" lIns="0" rIns="0" tIns="0" bIns="0">
+          <a:bodyPr wrap="square" lIns="0" tIns="0" rIns="0" bIns="0" anchor="t">
             <a:spAutoFit/>
           </a:bodyPr>
           <a:lstStyle/>
@@ -15489,6 +16475,7 @@
           <a:lstStyle/>
           <a:p>
             <a:pPr algn="ctr"/>
+            <a:endParaRPr/>
           </a:p>
         </p:txBody>
       </p:sp>
@@ -15533,6 +16520,7 @@
           <a:lstStyle/>
           <a:p>
             <a:pPr algn="ctr"/>
+            <a:endParaRPr/>
           </a:p>
         </p:txBody>
       </p:sp>
@@ -15577,6 +16565,7 @@
           <a:lstStyle/>
           <a:p>
             <a:pPr algn="ctr"/>
+            <a:endParaRPr/>
           </a:p>
         </p:txBody>
       </p:sp>
@@ -15597,7 +16586,7 @@
           <a:noFill/>
         </p:spPr>
         <p:txBody>
-          <a:bodyPr wrap="none" anchor="t" lIns="0" rIns="0" tIns="0" bIns="0">
+          <a:bodyPr wrap="none" lIns="0" tIns="0" rIns="0" bIns="0" anchor="t">
             <a:spAutoFit/>
           </a:bodyPr>
           <a:lstStyle/>
@@ -15636,7 +16625,7 @@
           <a:noFill/>
         </p:spPr>
         <p:txBody>
-          <a:bodyPr wrap="square" anchor="t" lIns="0" rIns="0" tIns="0" bIns="0">
+          <a:bodyPr wrap="square" lIns="0" tIns="0" rIns="0" bIns="0" anchor="t">
             <a:spAutoFit/>
           </a:bodyPr>
           <a:lstStyle/>
@@ -15701,6 +16690,7 @@
           <a:lstStyle/>
           <a:p>
             <a:pPr algn="ctr"/>
+            <a:endParaRPr/>
           </a:p>
         </p:txBody>
       </p:sp>
@@ -15745,7 +16735,7 @@
           <a:noFill/>
         </p:spPr>
         <p:txBody>
-          <a:bodyPr wrap="square" anchor="t" lIns="0" rIns="0" tIns="0" bIns="0">
+          <a:bodyPr wrap="square" lIns="0" tIns="0" rIns="0" bIns="0" anchor="t">
             <a:spAutoFit/>
           </a:bodyPr>
           <a:lstStyle/>
@@ -15872,7 +16862,7 @@
 </file>
 
 <file path=ppt/slides/slide2.xml><?xml version="1.0" encoding="utf-8"?>
-<p:sld xmlns:a="http://schemas.openxmlformats.org/drawingml/2006/main" xmlns:p="http://schemas.openxmlformats.org/presentationml/2006/main" xmlns:r="http://schemas.openxmlformats.org/officeDocument/2006/relationships">
+<p:sld xmlns:a="http://schemas.openxmlformats.org/drawingml/2006/main" xmlns:r="http://schemas.openxmlformats.org/officeDocument/2006/relationships" xmlns:p="http://schemas.openxmlformats.org/presentationml/2006/main">
   <p:cSld>
     <p:spTree>
       <p:nvGrpSpPr>
@@ -15880,7 +16870,14 @@
         <p:cNvGrpSpPr/>
         <p:nvPr/>
       </p:nvGrpSpPr>
-      <p:grpSpPr/>
+      <p:grpSpPr>
+        <a:xfrm>
+          <a:off x="0" y="0"/>
+          <a:ext cx="0" cy="0"/>
+          <a:chOff x="0" y="0"/>
+          <a:chExt cx="0" cy="0"/>
+        </a:xfrm>
+      </p:grpSpPr>
       <p:sp>
         <p:nvSpPr>
           <p:cNvPr id="2" name="Rectangle 1"/>
@@ -15922,6 +16919,7 @@
           <a:lstStyle/>
           <a:p>
             <a:pPr algn="ctr"/>
+            <a:endParaRPr/>
           </a:p>
         </p:txBody>
       </p:sp>
@@ -15966,6 +16964,7 @@
           <a:lstStyle/>
           <a:p>
             <a:pPr algn="ctr"/>
+            <a:endParaRPr/>
           </a:p>
         </p:txBody>
       </p:sp>
@@ -16010,6 +17009,7 @@
           <a:lstStyle/>
           <a:p>
             <a:pPr algn="ctr"/>
+            <a:endParaRPr/>
           </a:p>
         </p:txBody>
       </p:sp>
@@ -16078,6 +17078,7 @@
           <a:lstStyle/>
           <a:p>
             <a:pPr algn="ctr"/>
+            <a:endParaRPr/>
           </a:p>
         </p:txBody>
       </p:sp>
@@ -16122,6 +17123,7 @@
           <a:lstStyle/>
           <a:p>
             <a:pPr algn="ctr"/>
+            <a:endParaRPr/>
           </a:p>
         </p:txBody>
       </p:sp>
@@ -16166,6 +17168,7 @@
           <a:lstStyle/>
           <a:p>
             <a:pPr algn="ctr"/>
+            <a:endParaRPr/>
           </a:p>
         </p:txBody>
       </p:sp>
@@ -16186,7 +17189,7 @@
           <a:noFill/>
         </p:spPr>
         <p:txBody>
-          <a:bodyPr wrap="square" anchor="t" lIns="0" rIns="0" tIns="0" bIns="0">
+          <a:bodyPr wrap="square" lIns="0" tIns="0" rIns="0" bIns="0" anchor="t">
             <a:spAutoFit/>
           </a:bodyPr>
           <a:lstStyle/>
@@ -16197,7 +17200,7 @@
               </a:lnSpc>
             </a:pPr>
             <a:r>
-              <a:rPr sz="1050" b="0" i="0">
+              <a:rPr sz="1050" b="0" i="0" dirty="0">
                 <a:solidFill>
                   <a:srgbClr val="B29E84"/>
                 </a:solidFill>
@@ -16217,7 +17220,7 @@
         <p:spPr>
           <a:xfrm>
             <a:off x="758952" y="1005840"/>
-            <a:ext cx="10881360" cy="566928"/>
+            <a:ext cx="10881360" cy="430887"/>
           </a:xfrm>
           <a:prstGeom prst="rect">
             <a:avLst/>
@@ -16225,7 +17228,7 @@
           <a:noFill/>
         </p:spPr>
         <p:txBody>
-          <a:bodyPr wrap="square" anchor="t" lIns="0" rIns="0" tIns="0" bIns="0">
+          <a:bodyPr wrap="square" lIns="0" tIns="0" rIns="0" bIns="0" anchor="t">
             <a:spAutoFit/>
           </a:bodyPr>
           <a:lstStyle/>
@@ -16236,14 +17239,20 @@
               </a:lnSpc>
             </a:pPr>
             <a:r>
-              <a:rPr sz="2900" b="0" i="0">
+              <a:rPr lang="en-GB" sz="2800" b="1" dirty="0">
                 <a:solidFill>
                   <a:srgbClr val="253439"/>
                 </a:solidFill>
-                <a:latin typeface="Segoe UI Light"/>
-              </a:rPr>
-              <a:t>What the next 30 minutes cover</a:t>
-            </a:r>
+                <a:latin typeface="Lato"/>
+              </a:rPr>
+              <a:t>Today, in six parts</a:t>
+            </a:r>
+            <a:endParaRPr sz="2800" b="1" dirty="0">
+              <a:solidFill>
+                <a:srgbClr val="253439"/>
+              </a:solidFill>
+              <a:latin typeface="Lato"/>
+            </a:endParaRPr>
           </a:p>
         </p:txBody>
       </p:sp>
@@ -16288,6 +17297,7 @@
           <a:lstStyle/>
           <a:p>
             <a:pPr algn="ctr"/>
+            <a:endParaRPr/>
           </a:p>
         </p:txBody>
       </p:sp>
@@ -16332,6 +17342,7 @@
           <a:lstStyle/>
           <a:p>
             <a:pPr algn="ctr"/>
+            <a:endParaRPr/>
           </a:p>
         </p:txBody>
       </p:sp>
@@ -16376,6 +17387,7 @@
           <a:lstStyle/>
           <a:p>
             <a:pPr algn="ctr"/>
+            <a:endParaRPr/>
           </a:p>
         </p:txBody>
       </p:sp>
@@ -16396,7 +17408,7 @@
           <a:noFill/>
         </p:spPr>
         <p:txBody>
-          <a:bodyPr wrap="none" anchor="t" lIns="0" rIns="0" tIns="0" bIns="0">
+          <a:bodyPr wrap="none" lIns="0" tIns="0" rIns="0" bIns="0" anchor="t">
             <a:spAutoFit/>
           </a:bodyPr>
           <a:lstStyle/>
@@ -16435,7 +17447,7 @@
           <a:noFill/>
         </p:spPr>
         <p:txBody>
-          <a:bodyPr wrap="square" anchor="t" lIns="0" rIns="0" tIns="0" bIns="0">
+          <a:bodyPr wrap="square" lIns="0" tIns="0" rIns="0" bIns="0" anchor="t">
             <a:spAutoFit/>
           </a:bodyPr>
           <a:lstStyle/>
@@ -16466,7 +17478,7 @@
         <p:spPr>
           <a:xfrm>
             <a:off x="777240" y="2011680"/>
-            <a:ext cx="5257800" cy="1078992"/>
+            <a:ext cx="5257800" cy="923544"/>
           </a:xfrm>
           <a:prstGeom prst="rect">
             <a:avLst/>
@@ -16500,6 +17512,7 @@
           <a:lstStyle/>
           <a:p>
             <a:pPr algn="ctr"/>
+            <a:endParaRPr/>
           </a:p>
         </p:txBody>
       </p:sp>
@@ -16512,7 +17525,7 @@
         <p:spPr>
           <a:xfrm>
             <a:off x="978408" y="2157984"/>
-            <a:ext cx="868680" cy="731520"/>
+            <a:ext cx="868680" cy="461665"/>
           </a:xfrm>
           <a:prstGeom prst="rect">
             <a:avLst/>
@@ -16520,7 +17533,7 @@
           <a:noFill/>
         </p:spPr>
         <p:txBody>
-          <a:bodyPr wrap="square" anchor="t" lIns="0" rIns="0" tIns="0" bIns="0">
+          <a:bodyPr wrap="square" lIns="0" tIns="0" rIns="0" bIns="0" anchor="t">
             <a:spAutoFit/>
           </a:bodyPr>
           <a:lstStyle/>
@@ -16531,7 +17544,7 @@
               </a:lnSpc>
             </a:pPr>
             <a:r>
-              <a:rPr sz="3000" b="0" i="0">
+              <a:rPr sz="3000" b="1" i="0" dirty="0">
                 <a:solidFill>
                   <a:srgbClr val="B29E84"/>
                 </a:solidFill>
@@ -16559,7 +17572,7 @@
           <a:noFill/>
         </p:spPr>
         <p:txBody>
-          <a:bodyPr wrap="square" anchor="t" lIns="0" rIns="0" tIns="0" bIns="0">
+          <a:bodyPr wrap="square" lIns="0" tIns="0" rIns="0" bIns="0" anchor="t">
             <a:spAutoFit/>
           </a:bodyPr>
           <a:lstStyle/>
@@ -16598,7 +17611,7 @@
           <a:noFill/>
         </p:spPr>
         <p:txBody>
-          <a:bodyPr wrap="square" anchor="t" lIns="0" rIns="0" tIns="0" bIns="0">
+          <a:bodyPr wrap="square" lIns="0" tIns="0" rIns="0" bIns="0" anchor="t">
             <a:spAutoFit/>
           </a:bodyPr>
           <a:lstStyle/>
@@ -16629,7 +17642,7 @@
         <p:spPr>
           <a:xfrm>
             <a:off x="6400800" y="2011680"/>
-            <a:ext cx="5257800" cy="1078992"/>
+            <a:ext cx="5257800" cy="923544"/>
           </a:xfrm>
           <a:prstGeom prst="rect">
             <a:avLst/>
@@ -16663,6 +17676,7 @@
           <a:lstStyle/>
           <a:p>
             <a:pPr algn="ctr"/>
+            <a:endParaRPr/>
           </a:p>
         </p:txBody>
       </p:sp>
@@ -16675,7 +17689,7 @@
         <p:spPr>
           <a:xfrm>
             <a:off x="6601968" y="2157984"/>
-            <a:ext cx="868680" cy="731520"/>
+            <a:ext cx="868680" cy="461665"/>
           </a:xfrm>
           <a:prstGeom prst="rect">
             <a:avLst/>
@@ -16683,7 +17697,7 @@
           <a:noFill/>
         </p:spPr>
         <p:txBody>
-          <a:bodyPr wrap="square" anchor="t" lIns="0" rIns="0" tIns="0" bIns="0">
+          <a:bodyPr wrap="square" lIns="0" tIns="0" rIns="0" bIns="0" anchor="t">
             <a:spAutoFit/>
           </a:bodyPr>
           <a:lstStyle/>
@@ -16694,7 +17708,7 @@
               </a:lnSpc>
             </a:pPr>
             <a:r>
-              <a:rPr sz="3000" b="0" i="0">
+              <a:rPr sz="3000" b="1" i="0" dirty="0">
                 <a:solidFill>
                   <a:srgbClr val="B29E84"/>
                 </a:solidFill>
@@ -16722,7 +17736,7 @@
           <a:noFill/>
         </p:spPr>
         <p:txBody>
-          <a:bodyPr wrap="square" anchor="t" lIns="0" rIns="0" tIns="0" bIns="0">
+          <a:bodyPr wrap="square" lIns="0" tIns="0" rIns="0" bIns="0" anchor="t">
             <a:spAutoFit/>
           </a:bodyPr>
           <a:lstStyle/>
@@ -16761,7 +17775,7 @@
           <a:noFill/>
         </p:spPr>
         <p:txBody>
-          <a:bodyPr wrap="square" anchor="t" lIns="0" rIns="0" tIns="0" bIns="0">
+          <a:bodyPr wrap="square" lIns="0" tIns="0" rIns="0" bIns="0" anchor="t">
             <a:spAutoFit/>
           </a:bodyPr>
           <a:lstStyle/>
@@ -16792,7 +17806,7 @@
         <p:spPr>
           <a:xfrm>
             <a:off x="777240" y="3337560"/>
-            <a:ext cx="5257800" cy="1078992"/>
+            <a:ext cx="5257800" cy="923544"/>
           </a:xfrm>
           <a:prstGeom prst="rect">
             <a:avLst/>
@@ -16826,6 +17840,7 @@
           <a:lstStyle/>
           <a:p>
             <a:pPr algn="ctr"/>
+            <a:endParaRPr/>
           </a:p>
         </p:txBody>
       </p:sp>
@@ -16838,7 +17853,7 @@
         <p:spPr>
           <a:xfrm>
             <a:off x="978408" y="3483864"/>
-            <a:ext cx="868680" cy="731520"/>
+            <a:ext cx="868680" cy="461665"/>
           </a:xfrm>
           <a:prstGeom prst="rect">
             <a:avLst/>
@@ -16846,7 +17861,7 @@
           <a:noFill/>
         </p:spPr>
         <p:txBody>
-          <a:bodyPr wrap="square" anchor="t" lIns="0" rIns="0" tIns="0" bIns="0">
+          <a:bodyPr wrap="square" lIns="0" tIns="0" rIns="0" bIns="0" anchor="t">
             <a:spAutoFit/>
           </a:bodyPr>
           <a:lstStyle/>
@@ -16857,7 +17872,7 @@
               </a:lnSpc>
             </a:pPr>
             <a:r>
-              <a:rPr sz="3000" b="0" i="0">
+              <a:rPr sz="3000" b="1" i="0" dirty="0">
                 <a:solidFill>
                   <a:srgbClr val="B29E84"/>
                 </a:solidFill>
@@ -16885,7 +17900,7 @@
           <a:noFill/>
         </p:spPr>
         <p:txBody>
-          <a:bodyPr wrap="square" anchor="t" lIns="0" rIns="0" tIns="0" bIns="0">
+          <a:bodyPr wrap="square" lIns="0" tIns="0" rIns="0" bIns="0" anchor="t">
             <a:spAutoFit/>
           </a:bodyPr>
           <a:lstStyle/>
@@ -16924,7 +17939,7 @@
           <a:noFill/>
         </p:spPr>
         <p:txBody>
-          <a:bodyPr wrap="square" anchor="t" lIns="0" rIns="0" tIns="0" bIns="0">
+          <a:bodyPr wrap="square" lIns="0" tIns="0" rIns="0" bIns="0" anchor="t">
             <a:spAutoFit/>
           </a:bodyPr>
           <a:lstStyle/>
@@ -16935,7 +17950,7 @@
               </a:lnSpc>
             </a:pPr>
             <a:r>
-              <a:rPr sz="1050" b="0" i="0">
+              <a:rPr sz="1050" b="0" i="0" dirty="0">
                 <a:solidFill>
                   <a:srgbClr val="7C898B"/>
                 </a:solidFill>
@@ -16955,7 +17970,7 @@
         <p:spPr>
           <a:xfrm>
             <a:off x="6400800" y="3337560"/>
-            <a:ext cx="5257800" cy="1078992"/>
+            <a:ext cx="5257800" cy="923544"/>
           </a:xfrm>
           <a:prstGeom prst="rect">
             <a:avLst/>
@@ -16989,6 +18004,7 @@
           <a:lstStyle/>
           <a:p>
             <a:pPr algn="ctr"/>
+            <a:endParaRPr/>
           </a:p>
         </p:txBody>
       </p:sp>
@@ -17001,7 +18017,7 @@
         <p:spPr>
           <a:xfrm>
             <a:off x="6601968" y="3483864"/>
-            <a:ext cx="868680" cy="731520"/>
+            <a:ext cx="868680" cy="461665"/>
           </a:xfrm>
           <a:prstGeom prst="rect">
             <a:avLst/>
@@ -17009,7 +18025,7 @@
           <a:noFill/>
         </p:spPr>
         <p:txBody>
-          <a:bodyPr wrap="square" anchor="t" lIns="0" rIns="0" tIns="0" bIns="0">
+          <a:bodyPr wrap="square" lIns="0" tIns="0" rIns="0" bIns="0" anchor="t">
             <a:spAutoFit/>
           </a:bodyPr>
           <a:lstStyle/>
@@ -17020,7 +18036,7 @@
               </a:lnSpc>
             </a:pPr>
             <a:r>
-              <a:rPr sz="3000" b="0" i="0">
+              <a:rPr sz="3000" b="1" i="0" dirty="0">
                 <a:solidFill>
                   <a:srgbClr val="B29E84"/>
                 </a:solidFill>
@@ -17048,7 +18064,7 @@
           <a:noFill/>
         </p:spPr>
         <p:txBody>
-          <a:bodyPr wrap="square" anchor="t" lIns="0" rIns="0" tIns="0" bIns="0">
+          <a:bodyPr wrap="square" lIns="0" tIns="0" rIns="0" bIns="0" anchor="t">
             <a:spAutoFit/>
           </a:bodyPr>
           <a:lstStyle/>
@@ -17087,7 +18103,7 @@
           <a:noFill/>
         </p:spPr>
         <p:txBody>
-          <a:bodyPr wrap="square" anchor="t" lIns="0" rIns="0" tIns="0" bIns="0">
+          <a:bodyPr wrap="square" lIns="0" tIns="0" rIns="0" bIns="0" anchor="t">
             <a:spAutoFit/>
           </a:bodyPr>
           <a:lstStyle/>
@@ -17118,7 +18134,7 @@
         <p:spPr>
           <a:xfrm>
             <a:off x="777240" y="4663440"/>
-            <a:ext cx="5257800" cy="1078992"/>
+            <a:ext cx="5257800" cy="923544"/>
           </a:xfrm>
           <a:prstGeom prst="rect">
             <a:avLst/>
@@ -17152,6 +18168,7 @@
           <a:lstStyle/>
           <a:p>
             <a:pPr algn="ctr"/>
+            <a:endParaRPr/>
           </a:p>
         </p:txBody>
       </p:sp>
@@ -17164,7 +18181,7 @@
         <p:spPr>
           <a:xfrm>
             <a:off x="978408" y="4809744"/>
-            <a:ext cx="868680" cy="731520"/>
+            <a:ext cx="868680" cy="461665"/>
           </a:xfrm>
           <a:prstGeom prst="rect">
             <a:avLst/>
@@ -17172,7 +18189,7 @@
           <a:noFill/>
         </p:spPr>
         <p:txBody>
-          <a:bodyPr wrap="square" anchor="t" lIns="0" rIns="0" tIns="0" bIns="0">
+          <a:bodyPr wrap="square" lIns="0" tIns="0" rIns="0" bIns="0" anchor="t">
             <a:spAutoFit/>
           </a:bodyPr>
           <a:lstStyle/>
@@ -17183,7 +18200,7 @@
               </a:lnSpc>
             </a:pPr>
             <a:r>
-              <a:rPr sz="3000" b="0" i="0">
+              <a:rPr sz="3000" b="1" i="0" dirty="0">
                 <a:solidFill>
                   <a:srgbClr val="B29E84"/>
                 </a:solidFill>
@@ -17211,7 +18228,7 @@
           <a:noFill/>
         </p:spPr>
         <p:txBody>
-          <a:bodyPr wrap="square" anchor="t" lIns="0" rIns="0" tIns="0" bIns="0">
+          <a:bodyPr wrap="square" lIns="0" tIns="0" rIns="0" bIns="0" anchor="t">
             <a:spAutoFit/>
           </a:bodyPr>
           <a:lstStyle/>
@@ -17250,7 +18267,7 @@
           <a:noFill/>
         </p:spPr>
         <p:txBody>
-          <a:bodyPr wrap="square" anchor="t" lIns="0" rIns="0" tIns="0" bIns="0">
+          <a:bodyPr wrap="square" lIns="0" tIns="0" rIns="0" bIns="0" anchor="t">
             <a:spAutoFit/>
           </a:bodyPr>
           <a:lstStyle/>
@@ -17281,7 +18298,7 @@
         <p:spPr>
           <a:xfrm>
             <a:off x="6400800" y="4663440"/>
-            <a:ext cx="5257800" cy="1078992"/>
+            <a:ext cx="5257800" cy="923544"/>
           </a:xfrm>
           <a:prstGeom prst="rect">
             <a:avLst/>
@@ -17315,6 +18332,7 @@
           <a:lstStyle/>
           <a:p>
             <a:pPr algn="ctr"/>
+            <a:endParaRPr/>
           </a:p>
         </p:txBody>
       </p:sp>
@@ -17327,7 +18345,7 @@
         <p:spPr>
           <a:xfrm>
             <a:off x="6601968" y="4809744"/>
-            <a:ext cx="868680" cy="731520"/>
+            <a:ext cx="868680" cy="461665"/>
           </a:xfrm>
           <a:prstGeom prst="rect">
             <a:avLst/>
@@ -17335,7 +18353,7 @@
           <a:noFill/>
         </p:spPr>
         <p:txBody>
-          <a:bodyPr wrap="square" anchor="t" lIns="0" rIns="0" tIns="0" bIns="0">
+          <a:bodyPr wrap="square" lIns="0" tIns="0" rIns="0" bIns="0" anchor="t">
             <a:spAutoFit/>
           </a:bodyPr>
           <a:lstStyle/>
@@ -17346,7 +18364,7 @@
               </a:lnSpc>
             </a:pPr>
             <a:r>
-              <a:rPr sz="3000" b="0" i="0">
+              <a:rPr sz="3000" b="1" i="0" dirty="0">
                 <a:solidFill>
                   <a:srgbClr val="B29E84"/>
                 </a:solidFill>
@@ -17374,7 +18392,7 @@
           <a:noFill/>
         </p:spPr>
         <p:txBody>
-          <a:bodyPr wrap="square" anchor="t" lIns="0" rIns="0" tIns="0" bIns="0">
+          <a:bodyPr wrap="square" lIns="0" tIns="0" rIns="0" bIns="0" anchor="t">
             <a:spAutoFit/>
           </a:bodyPr>
           <a:lstStyle/>
@@ -17413,7 +18431,7 @@
           <a:noFill/>
         </p:spPr>
         <p:txBody>
-          <a:bodyPr wrap="square" anchor="t" lIns="0" rIns="0" tIns="0" bIns="0">
+          <a:bodyPr wrap="square" lIns="0" tIns="0" rIns="0" bIns="0" anchor="t">
             <a:spAutoFit/>
           </a:bodyPr>
           <a:lstStyle/>
@@ -17452,7 +18470,7 @@
           <a:noFill/>
         </p:spPr>
         <p:txBody>
-          <a:bodyPr wrap="square" anchor="t" lIns="0" rIns="0" tIns="0" bIns="0">
+          <a:bodyPr wrap="square" lIns="0" tIns="0" rIns="0" bIns="0" anchor="t">
             <a:spAutoFit/>
           </a:bodyPr>
           <a:lstStyle/>
@@ -17463,7 +18481,7 @@
               </a:lnSpc>
             </a:pPr>
             <a:r>
-              <a:rPr sz="1050" b="0" i="0">
+              <a:rPr sz="1050" b="0" i="0" dirty="0">
                 <a:solidFill>
                   <a:srgbClr val="7C898B"/>
                 </a:solidFill>
@@ -17483,7 +18501,7 @@
 </file>
 
 <file path=ppt/slides/slide3.xml><?xml version="1.0" encoding="utf-8"?>
-<p:sld xmlns:a="http://schemas.openxmlformats.org/drawingml/2006/main" xmlns:p="http://schemas.openxmlformats.org/presentationml/2006/main" xmlns:r="http://schemas.openxmlformats.org/officeDocument/2006/relationships">
+<p:sld xmlns:a="http://schemas.openxmlformats.org/drawingml/2006/main" xmlns:r="http://schemas.openxmlformats.org/officeDocument/2006/relationships" xmlns:p="http://schemas.openxmlformats.org/presentationml/2006/main">
   <p:cSld>
     <p:spTree>
       <p:nvGrpSpPr>
@@ -17491,7 +18509,14 @@
         <p:cNvGrpSpPr/>
         <p:nvPr/>
       </p:nvGrpSpPr>
-      <p:grpSpPr/>
+      <p:grpSpPr>
+        <a:xfrm>
+          <a:off x="0" y="0"/>
+          <a:ext cx="0" cy="0"/>
+          <a:chOff x="0" y="0"/>
+          <a:chExt cx="0" cy="0"/>
+        </a:xfrm>
+      </p:grpSpPr>
       <p:sp>
         <p:nvSpPr>
           <p:cNvPr id="2" name="Rectangle 1"/>
@@ -18070,14 +19095,53 @@
       </p:sp>
       <p:sp>
         <p:nvSpPr>
-          <p:cNvPr id="16" name="Rectangle 15"/>
+          <p:cNvPr id="16" name="TextBox 15"/>
+          <p:cNvSpPr txBox="1"/>
+          <p:nvPr/>
+        </p:nvSpPr>
+        <p:spPr>
+          <a:xfrm>
+            <a:off x="777240" y="1810512"/>
+            <a:ext cx="10607040" cy="365760"/>
+          </a:xfrm>
+          <a:prstGeom prst="rect">
+            <a:avLst/>
+          </a:prstGeom>
+          <a:noFill/>
+        </p:spPr>
+        <p:txBody>
+          <a:bodyPr wrap="square" anchor="t" lIns="0" rIns="0" tIns="0" bIns="0">
+            <a:spAutoFit/>
+          </a:bodyPr>
+          <a:lstStyle/>
+          <a:p>
+            <a:pPr algn="l">
+              <a:lnSpc>
+                <a:spcPct val="100000"/>
+              </a:lnSpc>
+            </a:pPr>
+            <a:r>
+              <a:rPr sz="1200" b="0" i="0">
+                <a:solidFill>
+                  <a:srgbClr val="253439"/>
+                </a:solidFill>
+                <a:latin typeface="Segoe UI"/>
+              </a:rPr>
+              <a:t>DIC — Digital Image Correlation — measures how a part deforms by comparing photographs of its surface while it is loaded; here in its simplest two-dot form.</a:t>
+            </a:r>
+          </a:p>
+        </p:txBody>
+      </p:sp>
+      <p:sp>
+        <p:nvSpPr>
+          <p:cNvPr id="17" name="Rectangle 16"/>
           <p:cNvSpPr/>
           <p:nvPr/>
         </p:nvSpPr>
         <p:spPr>
           <a:xfrm>
-            <a:off x="777240" y="1874519"/>
-            <a:ext cx="10607040" cy="2788920"/>
+            <a:off x="2258568" y="2304288"/>
+            <a:ext cx="7680960" cy="2240280"/>
           </a:xfrm>
           <a:prstGeom prst="rect">
             <a:avLst/>
@@ -18116,7 +19180,7 @@
       </p:sp>
       <p:pic>
         <p:nvPicPr>
-          <p:cNvPr id="17" name="Picture 16" descr="ppd_dic_explain.png"/>
+          <p:cNvPr id="18" name="Picture 17" descr="ppd_dic_explain.png"/>
           <p:cNvPicPr>
             <a:picLocks noChangeAspect="1"/>
           </p:cNvPicPr>
@@ -18130,8 +19194,8 @@
         </p:blipFill>
         <p:spPr>
           <a:xfrm>
-            <a:off x="868680" y="1965960"/>
-            <a:ext cx="10424159" cy="2606040"/>
+            <a:off x="2350008" y="2487168"/>
+            <a:ext cx="7498080" cy="1874520"/>
           </a:xfrm>
           <a:prstGeom prst="rect">
             <a:avLst/>
@@ -18140,13 +19204,13 @@
       </p:pic>
       <p:sp>
         <p:nvSpPr>
-          <p:cNvPr id="18" name="Rectangle 17"/>
+          <p:cNvPr id="19" name="Rectangle 18"/>
           <p:cNvSpPr/>
           <p:nvPr/>
         </p:nvSpPr>
         <p:spPr>
           <a:xfrm>
-            <a:off x="777240" y="4892040"/>
+            <a:off x="777240" y="4846320"/>
             <a:ext cx="3383280" cy="1325880"/>
           </a:xfrm>
           <a:prstGeom prst="rect">
@@ -18186,13 +19250,13 @@
       </p:sp>
       <p:sp>
         <p:nvSpPr>
-          <p:cNvPr id="19" name="Rectangle 18"/>
+          <p:cNvPr id="20" name="Rectangle 19"/>
           <p:cNvSpPr/>
           <p:nvPr/>
         </p:nvSpPr>
         <p:spPr>
           <a:xfrm>
-            <a:off x="777240" y="4892040"/>
+            <a:off x="777240" y="4846320"/>
             <a:ext cx="64008" cy="1325880"/>
           </a:xfrm>
           <a:prstGeom prst="rect">
@@ -18230,13 +19294,13 @@
       </p:sp>
       <p:sp>
         <p:nvSpPr>
-          <p:cNvPr id="20" name="TextBox 19"/>
+          <p:cNvPr id="21" name="TextBox 20"/>
           <p:cNvSpPr txBox="1"/>
           <p:nvPr/>
         </p:nvSpPr>
         <p:spPr>
           <a:xfrm>
-            <a:off x="1005840" y="5047488"/>
+            <a:off x="1005840" y="5001768"/>
             <a:ext cx="3017520" cy="320040"/>
           </a:xfrm>
           <a:prstGeom prst="rect">
@@ -18269,13 +19333,13 @@
       </p:sp>
       <p:sp>
         <p:nvSpPr>
-          <p:cNvPr id="21" name="TextBox 20"/>
+          <p:cNvPr id="22" name="TextBox 21"/>
           <p:cNvSpPr txBox="1"/>
           <p:nvPr/>
         </p:nvSpPr>
         <p:spPr>
           <a:xfrm>
-            <a:off x="1005840" y="5394960"/>
+            <a:off x="1005840" y="5349240"/>
             <a:ext cx="3017520" cy="777240"/>
           </a:xfrm>
           <a:prstGeom prst="rect">
@@ -18308,13 +19372,13 @@
       </p:sp>
       <p:sp>
         <p:nvSpPr>
-          <p:cNvPr id="22" name="Rectangle 21"/>
+          <p:cNvPr id="23" name="Rectangle 22"/>
           <p:cNvSpPr/>
           <p:nvPr/>
         </p:nvSpPr>
         <p:spPr>
           <a:xfrm>
-            <a:off x="4389120" y="4892040"/>
+            <a:off x="4389120" y="4846320"/>
             <a:ext cx="3383280" cy="1325880"/>
           </a:xfrm>
           <a:prstGeom prst="rect">
@@ -18354,13 +19418,13 @@
       </p:sp>
       <p:sp>
         <p:nvSpPr>
-          <p:cNvPr id="23" name="Rectangle 22"/>
+          <p:cNvPr id="24" name="Rectangle 23"/>
           <p:cNvSpPr/>
           <p:nvPr/>
         </p:nvSpPr>
         <p:spPr>
           <a:xfrm>
-            <a:off x="4389120" y="4892040"/>
+            <a:off x="4389120" y="4846320"/>
             <a:ext cx="64008" cy="1325880"/>
           </a:xfrm>
           <a:prstGeom prst="rect">
@@ -18398,13 +19462,13 @@
       </p:sp>
       <p:sp>
         <p:nvSpPr>
-          <p:cNvPr id="24" name="TextBox 23"/>
+          <p:cNvPr id="25" name="TextBox 24"/>
           <p:cNvSpPr txBox="1"/>
           <p:nvPr/>
         </p:nvSpPr>
         <p:spPr>
           <a:xfrm>
-            <a:off x="4617720" y="5047488"/>
+            <a:off x="4617720" y="5001768"/>
             <a:ext cx="3017520" cy="320040"/>
           </a:xfrm>
           <a:prstGeom prst="rect">
@@ -18437,13 +19501,13 @@
       </p:sp>
       <p:sp>
         <p:nvSpPr>
-          <p:cNvPr id="25" name="TextBox 24"/>
+          <p:cNvPr id="26" name="TextBox 25"/>
           <p:cNvSpPr txBox="1"/>
           <p:nvPr/>
         </p:nvSpPr>
         <p:spPr>
           <a:xfrm>
-            <a:off x="4617720" y="5394960"/>
+            <a:off x="4617720" y="5349240"/>
             <a:ext cx="3017520" cy="777240"/>
           </a:xfrm>
           <a:prstGeom prst="rect">
@@ -18476,13 +19540,13 @@
       </p:sp>
       <p:sp>
         <p:nvSpPr>
-          <p:cNvPr id="26" name="Rectangle 25"/>
+          <p:cNvPr id="27" name="Rectangle 26"/>
           <p:cNvSpPr/>
           <p:nvPr/>
         </p:nvSpPr>
         <p:spPr>
           <a:xfrm>
-            <a:off x="8001000" y="4892040"/>
+            <a:off x="8001000" y="4846320"/>
             <a:ext cx="3383280" cy="1325880"/>
           </a:xfrm>
           <a:prstGeom prst="rect">
@@ -18522,13 +19586,13 @@
       </p:sp>
       <p:sp>
         <p:nvSpPr>
-          <p:cNvPr id="27" name="Rectangle 26"/>
+          <p:cNvPr id="28" name="Rectangle 27"/>
           <p:cNvSpPr/>
           <p:nvPr/>
         </p:nvSpPr>
         <p:spPr>
           <a:xfrm>
-            <a:off x="8001000" y="4892040"/>
+            <a:off x="8001000" y="4846320"/>
             <a:ext cx="64008" cy="1325880"/>
           </a:xfrm>
           <a:prstGeom prst="rect">
@@ -18566,13 +19630,13 @@
       </p:sp>
       <p:sp>
         <p:nvSpPr>
-          <p:cNvPr id="28" name="TextBox 27"/>
+          <p:cNvPr id="29" name="TextBox 28"/>
           <p:cNvSpPr txBox="1"/>
           <p:nvPr/>
         </p:nvSpPr>
         <p:spPr>
           <a:xfrm>
-            <a:off x="8229600" y="5047488"/>
+            <a:off x="8229600" y="5001768"/>
             <a:ext cx="3017520" cy="320040"/>
           </a:xfrm>
           <a:prstGeom prst="rect">
@@ -18605,13 +19669,13 @@
       </p:sp>
       <p:sp>
         <p:nvSpPr>
-          <p:cNvPr id="29" name="TextBox 28"/>
+          <p:cNvPr id="30" name="TextBox 29"/>
           <p:cNvSpPr txBox="1"/>
           <p:nvPr/>
         </p:nvSpPr>
         <p:spPr>
           <a:xfrm>
-            <a:off x="8229600" y="5394960"/>
+            <a:off x="8229600" y="5349240"/>
             <a:ext cx="3017520" cy="777240"/>
           </a:xfrm>
           <a:prstGeom prst="rect">
@@ -18638,45 +19702,6 @@
                 <a:latin typeface="Segoe UI"/>
               </a:rPr>
               <a:t>35 measurements per second, live on screen while the test runs</a:t>
-            </a:r>
-          </a:p>
-        </p:txBody>
-      </p:sp>
-      <p:sp>
-        <p:nvSpPr>
-          <p:cNvPr id="30" name="TextBox 29"/>
-          <p:cNvSpPr txBox="1"/>
-          <p:nvPr/>
-        </p:nvSpPr>
-        <p:spPr>
-          <a:xfrm>
-            <a:off x="777240" y="6355080"/>
-            <a:ext cx="10607040" cy="274320"/>
-          </a:xfrm>
-          <a:prstGeom prst="rect">
-            <a:avLst/>
-          </a:prstGeom>
-          <a:noFill/>
-        </p:spPr>
-        <p:txBody>
-          <a:bodyPr wrap="square" anchor="t" lIns="0" rIns="0" tIns="0" bIns="0">
-            <a:spAutoFit/>
-          </a:bodyPr>
-          <a:lstStyle/>
-          <a:p>
-            <a:pPr algn="l">
-              <a:lnSpc>
-                <a:spcPct val="100000"/>
-              </a:lnSpc>
-            </a:pPr>
-            <a:r>
-              <a:rPr sz="1000" b="0" i="0">
-                <a:solidFill>
-                  <a:srgbClr val="7C898B"/>
-                </a:solidFill>
-                <a:latin typeface="Segoe UI"/>
-              </a:rPr>
-              <a:t>DIC = Digital Image Correlation — here in its simplest two-marker form.</a:t>
             </a:r>
           </a:p>
         </p:txBody>
@@ -18690,7 +19715,7 @@
 </file>
 
 <file path=ppt/slides/slide4.xml><?xml version="1.0" encoding="utf-8"?>
-<p:sld xmlns:a="http://schemas.openxmlformats.org/drawingml/2006/main" xmlns:p="http://schemas.openxmlformats.org/presentationml/2006/main" xmlns:r="http://schemas.openxmlformats.org/officeDocument/2006/relationships">
+<p:sld xmlns:a="http://schemas.openxmlformats.org/drawingml/2006/main" xmlns:r="http://schemas.openxmlformats.org/officeDocument/2006/relationships" xmlns:p="http://schemas.openxmlformats.org/presentationml/2006/main">
   <p:cSld>
     <p:spTree>
       <p:nvGrpSpPr>
@@ -18698,7 +19723,14 @@
         <p:cNvGrpSpPr/>
         <p:nvPr/>
       </p:nvGrpSpPr>
-      <p:grpSpPr/>
+      <p:grpSpPr>
+        <a:xfrm>
+          <a:off x="0" y="0"/>
+          <a:ext cx="0" cy="0"/>
+          <a:chOff x="0" y="0"/>
+          <a:chExt cx="0" cy="0"/>
+        </a:xfrm>
+      </p:grpSpPr>
       <p:sp>
         <p:nvSpPr>
           <p:cNvPr id="2" name="Rectangle 1"/>
@@ -18740,6 +19772,7 @@
           <a:lstStyle/>
           <a:p>
             <a:pPr algn="ctr"/>
+            <a:endParaRPr/>
           </a:p>
         </p:txBody>
       </p:sp>
@@ -18784,6 +19817,7 @@
           <a:lstStyle/>
           <a:p>
             <a:pPr algn="ctr"/>
+            <a:endParaRPr/>
           </a:p>
         </p:txBody>
       </p:sp>
@@ -18828,6 +19862,7 @@
           <a:lstStyle/>
           <a:p>
             <a:pPr algn="ctr"/>
+            <a:endParaRPr/>
           </a:p>
         </p:txBody>
       </p:sp>
@@ -18896,6 +19931,7 @@
           <a:lstStyle/>
           <a:p>
             <a:pPr algn="ctr"/>
+            <a:endParaRPr/>
           </a:p>
         </p:txBody>
       </p:sp>
@@ -18940,6 +19976,7 @@
           <a:lstStyle/>
           <a:p>
             <a:pPr algn="ctr"/>
+            <a:endParaRPr/>
           </a:p>
         </p:txBody>
       </p:sp>
@@ -18984,6 +20021,7 @@
           <a:lstStyle/>
           <a:p>
             <a:pPr algn="ctr"/>
+            <a:endParaRPr/>
           </a:p>
         </p:txBody>
       </p:sp>
@@ -19004,7 +20042,7 @@
           <a:noFill/>
         </p:spPr>
         <p:txBody>
-          <a:bodyPr wrap="square" anchor="t" lIns="0" rIns="0" tIns="0" bIns="0">
+          <a:bodyPr wrap="square" lIns="0" tIns="0" rIns="0" bIns="0" anchor="t">
             <a:spAutoFit/>
           </a:bodyPr>
           <a:lstStyle/>
@@ -19043,7 +20081,7 @@
           <a:noFill/>
         </p:spPr>
         <p:txBody>
-          <a:bodyPr wrap="square" anchor="t" lIns="0" rIns="0" tIns="0" bIns="0">
+          <a:bodyPr wrap="square" lIns="0" tIns="0" rIns="0" bIns="0" anchor="t">
             <a:spAutoFit/>
           </a:bodyPr>
           <a:lstStyle/>
@@ -19106,6 +20144,7 @@
           <a:lstStyle/>
           <a:p>
             <a:pPr algn="ctr"/>
+            <a:endParaRPr/>
           </a:p>
         </p:txBody>
       </p:sp>
@@ -19150,6 +20189,7 @@
           <a:lstStyle/>
           <a:p>
             <a:pPr algn="ctr"/>
+            <a:endParaRPr/>
           </a:p>
         </p:txBody>
       </p:sp>
@@ -19194,6 +20234,7 @@
           <a:lstStyle/>
           <a:p>
             <a:pPr algn="ctr"/>
+            <a:endParaRPr/>
           </a:p>
         </p:txBody>
       </p:sp>
@@ -19214,7 +20255,7 @@
           <a:noFill/>
         </p:spPr>
         <p:txBody>
-          <a:bodyPr wrap="none" anchor="t" lIns="0" rIns="0" tIns="0" bIns="0">
+          <a:bodyPr wrap="none" lIns="0" tIns="0" rIns="0" bIns="0" anchor="t">
             <a:spAutoFit/>
           </a:bodyPr>
           <a:lstStyle/>
@@ -19253,7 +20294,7 @@
           <a:noFill/>
         </p:spPr>
         <p:txBody>
-          <a:bodyPr wrap="square" anchor="t" lIns="0" rIns="0" tIns="0" bIns="0">
+          <a:bodyPr wrap="square" lIns="0" tIns="0" rIns="0" bIns="0" anchor="t">
             <a:spAutoFit/>
           </a:bodyPr>
           <a:lstStyle/>
@@ -19318,6 +20359,7 @@
           <a:lstStyle/>
           <a:p>
             <a:pPr algn="ctr"/>
+            <a:endParaRPr/>
           </a:p>
         </p:txBody>
       </p:sp>
@@ -19362,7 +20404,7 @@
           <a:noFill/>
         </p:spPr>
         <p:txBody>
-          <a:bodyPr wrap="square" anchor="t" lIns="0" rIns="0" tIns="0" bIns="0">
+          <a:bodyPr wrap="square" lIns="0" tIns="0" rIns="0" bIns="0" anchor="t">
             <a:spAutoFit/>
           </a:bodyPr>
           <a:lstStyle/>
@@ -19401,7 +20443,7 @@
           <a:noFill/>
         </p:spPr>
         <p:txBody>
-          <a:bodyPr wrap="square" anchor="t" lIns="0" rIns="0" tIns="0" bIns="0">
+          <a:bodyPr wrap="square" lIns="0" tIns="0" rIns="0" bIns="0" anchor="t">
             <a:spAutoFit/>
           </a:bodyPr>
           <a:lstStyle/>
@@ -19440,7 +20482,7 @@
           <a:noFill/>
         </p:spPr>
         <p:txBody>
-          <a:bodyPr wrap="square" anchor="t" lIns="0" rIns="0" tIns="0" bIns="0">
+          <a:bodyPr wrap="square" lIns="0" tIns="0" rIns="0" bIns="0" anchor="t">
             <a:spAutoFit/>
           </a:bodyPr>
           <a:lstStyle/>
@@ -19547,7 +20589,7 @@
           <a:noFill/>
         </p:spPr>
         <p:txBody>
-          <a:bodyPr wrap="square" anchor="t" lIns="0" rIns="0" tIns="0" bIns="0">
+          <a:bodyPr wrap="square" lIns="0" tIns="0" rIns="0" bIns="0" anchor="t">
             <a:spAutoFit/>
           </a:bodyPr>
           <a:lstStyle/>
@@ -19586,7 +20628,7 @@
           <a:noFill/>
         </p:spPr>
         <p:txBody>
-          <a:bodyPr wrap="square" anchor="t" lIns="0" rIns="0" tIns="0" bIns="0">
+          <a:bodyPr wrap="square" lIns="0" tIns="0" rIns="0" bIns="0" anchor="t">
             <a:spAutoFit/>
           </a:bodyPr>
           <a:lstStyle/>
@@ -19747,6 +20789,7 @@
           <a:lstStyle/>
           <a:p>
             <a:pPr algn="ctr"/>
+            <a:endParaRPr/>
           </a:p>
         </p:txBody>
       </p:sp>
@@ -19767,7 +20810,7 @@
           <a:noFill/>
         </p:spPr>
         <p:txBody>
-          <a:bodyPr wrap="square" anchor="t" lIns="0" rIns="0" tIns="0" bIns="0">
+          <a:bodyPr wrap="square" lIns="0" tIns="0" rIns="0" bIns="0" anchor="t">
             <a:spAutoFit/>
           </a:bodyPr>
           <a:lstStyle/>
@@ -19806,7 +20849,7 @@
           <a:noFill/>
         </p:spPr>
         <p:txBody>
-          <a:bodyPr wrap="square" anchor="t" lIns="0" rIns="0" tIns="0" bIns="0">
+          <a:bodyPr wrap="square" lIns="0" tIns="0" rIns="0" bIns="0" anchor="t">
             <a:spAutoFit/>
           </a:bodyPr>
           <a:lstStyle/>
@@ -19871,6 +20914,7 @@
           <a:lstStyle/>
           <a:p>
             <a:pPr algn="ctr"/>
+            <a:endParaRPr/>
           </a:p>
         </p:txBody>
       </p:sp>
@@ -19891,7 +20935,7 @@
           <a:noFill/>
         </p:spPr>
         <p:txBody>
-          <a:bodyPr wrap="square" anchor="t" lIns="0" rIns="0" tIns="0" bIns="0">
+          <a:bodyPr wrap="square" lIns="0" tIns="0" rIns="0" bIns="0" anchor="t">
             <a:spAutoFit/>
           </a:bodyPr>
           <a:lstStyle/>
@@ -19930,7 +20974,7 @@
           <a:noFill/>
         </p:spPr>
         <p:txBody>
-          <a:bodyPr wrap="square" anchor="t" lIns="0" rIns="0" tIns="0" bIns="0">
+          <a:bodyPr wrap="square" lIns="0" tIns="0" rIns="0" bIns="0" anchor="t">
             <a:spAutoFit/>
           </a:bodyPr>
           <a:lstStyle/>
@@ -19995,6 +21039,7 @@
           <a:lstStyle/>
           <a:p>
             <a:pPr algn="ctr"/>
+            <a:endParaRPr/>
           </a:p>
         </p:txBody>
       </p:sp>
@@ -20015,7 +21060,7 @@
           <a:noFill/>
         </p:spPr>
         <p:txBody>
-          <a:bodyPr wrap="square" anchor="t" lIns="0" rIns="0" tIns="0" bIns="0">
+          <a:bodyPr wrap="square" lIns="0" tIns="0" rIns="0" bIns="0" anchor="t">
             <a:spAutoFit/>
           </a:bodyPr>
           <a:lstStyle/>
@@ -20054,7 +21099,7 @@
           <a:noFill/>
         </p:spPr>
         <p:txBody>
-          <a:bodyPr wrap="square" anchor="t" lIns="0" rIns="0" tIns="0" bIns="0">
+          <a:bodyPr wrap="square" lIns="0" tIns="0" rIns="0" bIns="0" anchor="t">
             <a:spAutoFit/>
           </a:bodyPr>
           <a:lstStyle/>
@@ -20119,6 +21164,7 @@
           <a:lstStyle/>
           <a:p>
             <a:pPr algn="ctr"/>
+            <a:endParaRPr/>
           </a:p>
         </p:txBody>
       </p:sp>
@@ -20139,7 +21185,7 @@
           <a:noFill/>
         </p:spPr>
         <p:txBody>
-          <a:bodyPr wrap="square" anchor="t" lIns="0" rIns="0" tIns="0" bIns="0">
+          <a:bodyPr wrap="square" lIns="0" tIns="0" rIns="0" bIns="0" anchor="t">
             <a:spAutoFit/>
           </a:bodyPr>
           <a:lstStyle/>
@@ -20178,7 +21224,7 @@
           <a:noFill/>
         </p:spPr>
         <p:txBody>
-          <a:bodyPr wrap="square" anchor="t" lIns="0" rIns="0" tIns="0" bIns="0">
+          <a:bodyPr wrap="square" lIns="0" tIns="0" rIns="0" bIns="0" anchor="t">
             <a:spAutoFit/>
           </a:bodyPr>
           <a:lstStyle/>
@@ -20243,6 +21289,7 @@
           <a:lstStyle/>
           <a:p>
             <a:pPr algn="ctr"/>
+            <a:endParaRPr/>
           </a:p>
         </p:txBody>
       </p:sp>
@@ -20263,7 +21310,7 @@
           <a:noFill/>
         </p:spPr>
         <p:txBody>
-          <a:bodyPr wrap="square" anchor="t" lIns="0" rIns="0" tIns="0" bIns="0">
+          <a:bodyPr wrap="square" lIns="0" tIns="0" rIns="0" bIns="0" anchor="t">
             <a:spAutoFit/>
           </a:bodyPr>
           <a:lstStyle/>
@@ -20302,7 +21349,7 @@
           <a:noFill/>
         </p:spPr>
         <p:txBody>
-          <a:bodyPr wrap="square" anchor="t" lIns="0" rIns="0" tIns="0" bIns="0">
+          <a:bodyPr wrap="square" lIns="0" tIns="0" rIns="0" bIns="0" anchor="t">
             <a:spAutoFit/>
           </a:bodyPr>
           <a:lstStyle/>
@@ -20341,7 +21388,7 @@
           <a:noFill/>
         </p:spPr>
         <p:txBody>
-          <a:bodyPr wrap="square" anchor="t" lIns="0" rIns="0" tIns="0" bIns="0">
+          <a:bodyPr wrap="square" lIns="0" tIns="0" rIns="0" bIns="0" anchor="t">
             <a:spAutoFit/>
           </a:bodyPr>
           <a:lstStyle/>
@@ -20372,7 +21419,7 @@
 </file>
 
 <file path=ppt/slides/slide5.xml><?xml version="1.0" encoding="utf-8"?>
-<p:sld xmlns:a="http://schemas.openxmlformats.org/drawingml/2006/main" xmlns:p="http://schemas.openxmlformats.org/presentationml/2006/main" xmlns:r="http://schemas.openxmlformats.org/officeDocument/2006/relationships">
+<p:sld xmlns:a="http://schemas.openxmlformats.org/drawingml/2006/main" xmlns:r="http://schemas.openxmlformats.org/officeDocument/2006/relationships" xmlns:p="http://schemas.openxmlformats.org/presentationml/2006/main">
   <p:cSld>
     <p:spTree>
       <p:nvGrpSpPr>
@@ -20380,7 +21427,14 @@
         <p:cNvGrpSpPr/>
         <p:nvPr/>
       </p:nvGrpSpPr>
-      <p:grpSpPr/>
+      <p:grpSpPr>
+        <a:xfrm>
+          <a:off x="0" y="0"/>
+          <a:ext cx="0" cy="0"/>
+          <a:chOff x="0" y="0"/>
+          <a:chExt cx="0" cy="0"/>
+        </a:xfrm>
+      </p:grpSpPr>
       <p:sp>
         <p:nvSpPr>
           <p:cNvPr id="2" name="Rectangle 1"/>
@@ -20422,6 +21476,7 @@
           <a:lstStyle/>
           <a:p>
             <a:pPr algn="ctr"/>
+            <a:endParaRPr/>
           </a:p>
         </p:txBody>
       </p:sp>
@@ -20466,6 +21521,7 @@
           <a:lstStyle/>
           <a:p>
             <a:pPr algn="ctr"/>
+            <a:endParaRPr/>
           </a:p>
         </p:txBody>
       </p:sp>
@@ -20510,6 +21566,7 @@
           <a:lstStyle/>
           <a:p>
             <a:pPr algn="ctr"/>
+            <a:endParaRPr/>
           </a:p>
         </p:txBody>
       </p:sp>
@@ -20578,6 +21635,7 @@
           <a:lstStyle/>
           <a:p>
             <a:pPr algn="ctr"/>
+            <a:endParaRPr/>
           </a:p>
         </p:txBody>
       </p:sp>
@@ -20622,6 +21680,7 @@
           <a:lstStyle/>
           <a:p>
             <a:pPr algn="ctr"/>
+            <a:endParaRPr/>
           </a:p>
         </p:txBody>
       </p:sp>
@@ -20666,6 +21725,7 @@
           <a:lstStyle/>
           <a:p>
             <a:pPr algn="ctr"/>
+            <a:endParaRPr/>
           </a:p>
         </p:txBody>
       </p:sp>
@@ -20686,7 +21746,7 @@
           <a:noFill/>
         </p:spPr>
         <p:txBody>
-          <a:bodyPr wrap="square" anchor="t" lIns="0" rIns="0" tIns="0" bIns="0">
+          <a:bodyPr wrap="square" lIns="0" tIns="0" rIns="0" bIns="0" anchor="t">
             <a:spAutoFit/>
           </a:bodyPr>
           <a:lstStyle/>
@@ -20725,7 +21785,7 @@
           <a:noFill/>
         </p:spPr>
         <p:txBody>
-          <a:bodyPr wrap="square" anchor="t" lIns="0" rIns="0" tIns="0" bIns="0">
+          <a:bodyPr wrap="square" lIns="0" tIns="0" rIns="0" bIns="0" anchor="t">
             <a:spAutoFit/>
           </a:bodyPr>
           <a:lstStyle/>
@@ -20788,6 +21848,7 @@
           <a:lstStyle/>
           <a:p>
             <a:pPr algn="ctr"/>
+            <a:endParaRPr/>
           </a:p>
         </p:txBody>
       </p:sp>
@@ -20832,6 +21893,7 @@
           <a:lstStyle/>
           <a:p>
             <a:pPr algn="ctr"/>
+            <a:endParaRPr/>
           </a:p>
         </p:txBody>
       </p:sp>
@@ -20876,6 +21938,7 @@
           <a:lstStyle/>
           <a:p>
             <a:pPr algn="ctr"/>
+            <a:endParaRPr/>
           </a:p>
         </p:txBody>
       </p:sp>
@@ -20896,7 +21959,7 @@
           <a:noFill/>
         </p:spPr>
         <p:txBody>
-          <a:bodyPr wrap="none" anchor="t" lIns="0" rIns="0" tIns="0" bIns="0">
+          <a:bodyPr wrap="none" lIns="0" tIns="0" rIns="0" bIns="0" anchor="t">
             <a:spAutoFit/>
           </a:bodyPr>
           <a:lstStyle/>
@@ -20935,7 +21998,7 @@
           <a:noFill/>
         </p:spPr>
         <p:txBody>
-          <a:bodyPr wrap="square" anchor="t" lIns="0" rIns="0" tIns="0" bIns="0">
+          <a:bodyPr wrap="square" lIns="0" tIns="0" rIns="0" bIns="0" anchor="t">
             <a:spAutoFit/>
           </a:bodyPr>
           <a:lstStyle/>
@@ -21000,6 +22063,7 @@
           <a:lstStyle/>
           <a:p>
             <a:pPr algn="ctr"/>
+            <a:endParaRPr/>
           </a:p>
         </p:txBody>
       </p:sp>
@@ -21044,6 +22108,7 @@
           <a:lstStyle/>
           <a:p>
             <a:pPr algn="ctr"/>
+            <a:endParaRPr/>
           </a:p>
         </p:txBody>
       </p:sp>
@@ -21064,7 +22129,7 @@
           <a:noFill/>
         </p:spPr>
         <p:txBody>
-          <a:bodyPr wrap="square" anchor="t" lIns="0" rIns="0" tIns="0" bIns="0">
+          <a:bodyPr wrap="square" lIns="0" tIns="0" rIns="0" bIns="0" anchor="t">
             <a:spAutoFit/>
           </a:bodyPr>
           <a:lstStyle/>
@@ -21103,7 +22168,7 @@
           <a:noFill/>
         </p:spPr>
         <p:txBody>
-          <a:bodyPr wrap="square" anchor="t" lIns="0" rIns="0" tIns="0" bIns="0">
+          <a:bodyPr wrap="square" lIns="0" tIns="0" rIns="0" bIns="0" anchor="t">
             <a:spAutoFit/>
           </a:bodyPr>
           <a:lstStyle/>
@@ -21168,6 +22233,7 @@
           <a:lstStyle/>
           <a:p>
             <a:pPr algn="ctr"/>
+            <a:endParaRPr/>
           </a:p>
         </p:txBody>
       </p:sp>
@@ -21212,6 +22278,7 @@
           <a:lstStyle/>
           <a:p>
             <a:pPr algn="ctr"/>
+            <a:endParaRPr/>
           </a:p>
         </p:txBody>
       </p:sp>
@@ -21232,7 +22299,7 @@
           <a:noFill/>
         </p:spPr>
         <p:txBody>
-          <a:bodyPr wrap="square" anchor="t" lIns="0" rIns="0" tIns="0" bIns="0">
+          <a:bodyPr wrap="square" lIns="0" tIns="0" rIns="0" bIns="0" anchor="t">
             <a:spAutoFit/>
           </a:bodyPr>
           <a:lstStyle/>
@@ -21271,7 +22338,7 @@
           <a:noFill/>
         </p:spPr>
         <p:txBody>
-          <a:bodyPr wrap="square" anchor="t" lIns="0" rIns="0" tIns="0" bIns="0">
+          <a:bodyPr wrap="square" lIns="0" tIns="0" rIns="0" bIns="0" anchor="t">
             <a:spAutoFit/>
           </a:bodyPr>
           <a:lstStyle/>
@@ -21336,6 +22403,7 @@
           <a:lstStyle/>
           <a:p>
             <a:pPr algn="ctr"/>
+            <a:endParaRPr/>
           </a:p>
         </p:txBody>
       </p:sp>
@@ -21380,6 +22448,7 @@
           <a:lstStyle/>
           <a:p>
             <a:pPr algn="ctr"/>
+            <a:endParaRPr/>
           </a:p>
         </p:txBody>
       </p:sp>
@@ -21400,7 +22469,7 @@
           <a:noFill/>
         </p:spPr>
         <p:txBody>
-          <a:bodyPr wrap="square" anchor="t" lIns="0" rIns="0" tIns="0" bIns="0">
+          <a:bodyPr wrap="square" lIns="0" tIns="0" rIns="0" bIns="0" anchor="t">
             <a:spAutoFit/>
           </a:bodyPr>
           <a:lstStyle/>
@@ -21439,7 +22508,7 @@
           <a:noFill/>
         </p:spPr>
         <p:txBody>
-          <a:bodyPr wrap="square" anchor="t" lIns="0" rIns="0" tIns="0" bIns="0">
+          <a:bodyPr wrap="square" lIns="0" tIns="0" rIns="0" bIns="0" anchor="t">
             <a:spAutoFit/>
           </a:bodyPr>
           <a:lstStyle/>
@@ -21504,6 +22573,7 @@
           <a:lstStyle/>
           <a:p>
             <a:pPr algn="ctr"/>
+            <a:endParaRPr/>
           </a:p>
         </p:txBody>
       </p:sp>
@@ -21548,6 +22618,7 @@
           <a:lstStyle/>
           <a:p>
             <a:pPr algn="ctr"/>
+            <a:endParaRPr/>
           </a:p>
         </p:txBody>
       </p:sp>
@@ -21568,7 +22639,7 @@
           <a:noFill/>
         </p:spPr>
         <p:txBody>
-          <a:bodyPr wrap="square" anchor="t" lIns="0" rIns="0" tIns="0" bIns="0">
+          <a:bodyPr wrap="square" lIns="0" tIns="0" rIns="0" bIns="0" anchor="t">
             <a:spAutoFit/>
           </a:bodyPr>
           <a:lstStyle/>
@@ -21607,7 +22678,7 @@
           <a:noFill/>
         </p:spPr>
         <p:txBody>
-          <a:bodyPr wrap="square" anchor="t" lIns="0" rIns="0" tIns="0" bIns="0">
+          <a:bodyPr wrap="square" lIns="0" tIns="0" rIns="0" bIns="0" anchor="t">
             <a:spAutoFit/>
           </a:bodyPr>
           <a:lstStyle/>
@@ -21672,6 +22743,7 @@
           <a:lstStyle/>
           <a:p>
             <a:pPr algn="ctr"/>
+            <a:endParaRPr/>
           </a:p>
         </p:txBody>
       </p:sp>
@@ -21716,6 +22788,7 @@
           <a:lstStyle/>
           <a:p>
             <a:pPr algn="ctr"/>
+            <a:endParaRPr/>
           </a:p>
         </p:txBody>
       </p:sp>
@@ -21736,7 +22809,7 @@
           <a:noFill/>
         </p:spPr>
         <p:txBody>
-          <a:bodyPr wrap="square" anchor="t" lIns="0" rIns="0" tIns="0" bIns="0">
+          <a:bodyPr wrap="square" lIns="0" tIns="0" rIns="0" bIns="0" anchor="t">
             <a:spAutoFit/>
           </a:bodyPr>
           <a:lstStyle/>
@@ -21775,7 +22848,7 @@
           <a:noFill/>
         </p:spPr>
         <p:txBody>
-          <a:bodyPr wrap="square" anchor="t" lIns="0" rIns="0" tIns="0" bIns="0">
+          <a:bodyPr wrap="square" lIns="0" tIns="0" rIns="0" bIns="0" anchor="t">
             <a:spAutoFit/>
           </a:bodyPr>
           <a:lstStyle/>
@@ -21840,6 +22913,7 @@
           <a:lstStyle/>
           <a:p>
             <a:pPr algn="ctr"/>
+            <a:endParaRPr/>
           </a:p>
         </p:txBody>
       </p:sp>
@@ -21884,6 +22958,7 @@
           <a:lstStyle/>
           <a:p>
             <a:pPr algn="ctr"/>
+            <a:endParaRPr/>
           </a:p>
         </p:txBody>
       </p:sp>
@@ -21904,7 +22979,7 @@
           <a:noFill/>
         </p:spPr>
         <p:txBody>
-          <a:bodyPr wrap="square" anchor="t" lIns="0" rIns="0" tIns="0" bIns="0">
+          <a:bodyPr wrap="square" lIns="0" tIns="0" rIns="0" bIns="0" anchor="t">
             <a:spAutoFit/>
           </a:bodyPr>
           <a:lstStyle/>
@@ -21943,7 +23018,7 @@
           <a:noFill/>
         </p:spPr>
         <p:txBody>
-          <a:bodyPr wrap="square" anchor="t" lIns="0" rIns="0" tIns="0" bIns="0">
+          <a:bodyPr wrap="square" lIns="0" tIns="0" rIns="0" bIns="0" anchor="t">
             <a:spAutoFit/>
           </a:bodyPr>
           <a:lstStyle/>
@@ -22008,6 +23083,7 @@
           <a:lstStyle/>
           <a:p>
             <a:pPr algn="ctr"/>
+            <a:endParaRPr/>
           </a:p>
         </p:txBody>
       </p:sp>
@@ -22052,6 +23128,7 @@
           <a:lstStyle/>
           <a:p>
             <a:pPr algn="ctr"/>
+            <a:endParaRPr/>
           </a:p>
         </p:txBody>
       </p:sp>
@@ -22072,7 +23149,7 @@
           <a:noFill/>
         </p:spPr>
         <p:txBody>
-          <a:bodyPr wrap="square" anchor="t" lIns="0" rIns="0" tIns="0" bIns="0">
+          <a:bodyPr wrap="square" lIns="0" tIns="0" rIns="0" bIns="0" anchor="t">
             <a:spAutoFit/>
           </a:bodyPr>
           <a:lstStyle/>
@@ -22111,7 +23188,7 @@
           <a:noFill/>
         </p:spPr>
         <p:txBody>
-          <a:bodyPr wrap="square" anchor="t" lIns="0" rIns="0" tIns="0" bIns="0">
+          <a:bodyPr wrap="square" lIns="0" tIns="0" rIns="0" bIns="0" anchor="t">
             <a:spAutoFit/>
           </a:bodyPr>
           <a:lstStyle/>
@@ -22176,6 +23253,7 @@
           <a:lstStyle/>
           <a:p>
             <a:pPr algn="ctr"/>
+            <a:endParaRPr/>
           </a:p>
         </p:txBody>
       </p:sp>
@@ -22220,6 +23298,7 @@
           <a:lstStyle/>
           <a:p>
             <a:pPr algn="ctr"/>
+            <a:endParaRPr/>
           </a:p>
         </p:txBody>
       </p:sp>
@@ -22240,7 +23319,7 @@
           <a:noFill/>
         </p:spPr>
         <p:txBody>
-          <a:bodyPr wrap="square" anchor="t" lIns="0" rIns="0" tIns="0" bIns="0">
+          <a:bodyPr wrap="square" lIns="0" tIns="0" rIns="0" bIns="0" anchor="t">
             <a:spAutoFit/>
           </a:bodyPr>
           <a:lstStyle/>
@@ -22279,7 +23358,7 @@
           <a:noFill/>
         </p:spPr>
         <p:txBody>
-          <a:bodyPr wrap="square" anchor="t" lIns="0" rIns="0" tIns="0" bIns="0">
+          <a:bodyPr wrap="square" lIns="0" tIns="0" rIns="0" bIns="0" anchor="t">
             <a:spAutoFit/>
           </a:bodyPr>
           <a:lstStyle/>
@@ -22344,6 +23423,7 @@
           <a:lstStyle/>
           <a:p>
             <a:pPr algn="ctr"/>
+            <a:endParaRPr/>
           </a:p>
         </p:txBody>
       </p:sp>
@@ -22388,6 +23468,7 @@
           <a:lstStyle/>
           <a:p>
             <a:pPr algn="ctr"/>
+            <a:endParaRPr/>
           </a:p>
         </p:txBody>
       </p:sp>
@@ -22408,7 +23489,7 @@
           <a:noFill/>
         </p:spPr>
         <p:txBody>
-          <a:bodyPr wrap="square" anchor="t" lIns="0" rIns="0" tIns="0" bIns="0">
+          <a:bodyPr wrap="square" lIns="0" tIns="0" rIns="0" bIns="0" anchor="t">
             <a:spAutoFit/>
           </a:bodyPr>
           <a:lstStyle/>
@@ -22447,7 +23528,7 @@
           <a:noFill/>
         </p:spPr>
         <p:txBody>
-          <a:bodyPr wrap="square" anchor="t" lIns="0" rIns="0" tIns="0" bIns="0">
+          <a:bodyPr wrap="square" lIns="0" tIns="0" rIns="0" bIns="0" anchor="t">
             <a:spAutoFit/>
           </a:bodyPr>
           <a:lstStyle/>
@@ -22512,6 +23593,7 @@
           <a:lstStyle/>
           <a:p>
             <a:pPr algn="ctr"/>
+            <a:endParaRPr/>
           </a:p>
         </p:txBody>
       </p:sp>
@@ -22556,6 +23638,7 @@
           <a:lstStyle/>
           <a:p>
             <a:pPr algn="ctr"/>
+            <a:endParaRPr/>
           </a:p>
         </p:txBody>
       </p:sp>
@@ -22576,7 +23659,7 @@
           <a:noFill/>
         </p:spPr>
         <p:txBody>
-          <a:bodyPr wrap="square" anchor="t" lIns="0" rIns="0" tIns="0" bIns="0">
+          <a:bodyPr wrap="square" lIns="0" tIns="0" rIns="0" bIns="0" anchor="t">
             <a:spAutoFit/>
           </a:bodyPr>
           <a:lstStyle/>
@@ -22615,7 +23698,7 @@
           <a:noFill/>
         </p:spPr>
         <p:txBody>
-          <a:bodyPr wrap="square" anchor="t" lIns="0" rIns="0" tIns="0" bIns="0">
+          <a:bodyPr wrap="square" lIns="0" tIns="0" rIns="0" bIns="0" anchor="t">
             <a:spAutoFit/>
           </a:bodyPr>
           <a:lstStyle/>
@@ -22680,6 +23763,7 @@
           <a:lstStyle/>
           <a:p>
             <a:pPr algn="ctr"/>
+            <a:endParaRPr/>
           </a:p>
         </p:txBody>
       </p:sp>
@@ -22724,6 +23808,7 @@
           <a:lstStyle/>
           <a:p>
             <a:pPr algn="ctr"/>
+            <a:endParaRPr/>
           </a:p>
         </p:txBody>
       </p:sp>
@@ -22744,7 +23829,7 @@
           <a:noFill/>
         </p:spPr>
         <p:txBody>
-          <a:bodyPr wrap="square" anchor="t" lIns="0" rIns="0" tIns="0" bIns="0">
+          <a:bodyPr wrap="square" lIns="0" tIns="0" rIns="0" bIns="0" anchor="t">
             <a:spAutoFit/>
           </a:bodyPr>
           <a:lstStyle/>
@@ -22783,7 +23868,7 @@
           <a:noFill/>
         </p:spPr>
         <p:txBody>
-          <a:bodyPr wrap="square" anchor="t" lIns="0" rIns="0" tIns="0" bIns="0">
+          <a:bodyPr wrap="square" lIns="0" tIns="0" rIns="0" bIns="0" anchor="t">
             <a:spAutoFit/>
           </a:bodyPr>
           <a:lstStyle/>
@@ -22848,6 +23933,7 @@
           <a:lstStyle/>
           <a:p>
             <a:pPr algn="ctr"/>
+            <a:endParaRPr/>
           </a:p>
         </p:txBody>
       </p:sp>
@@ -22892,6 +23978,7 @@
           <a:lstStyle/>
           <a:p>
             <a:pPr algn="ctr"/>
+            <a:endParaRPr/>
           </a:p>
         </p:txBody>
       </p:sp>
@@ -22912,7 +23999,7 @@
           <a:noFill/>
         </p:spPr>
         <p:txBody>
-          <a:bodyPr wrap="square" anchor="t" lIns="0" rIns="0" tIns="0" bIns="0">
+          <a:bodyPr wrap="square" lIns="0" tIns="0" rIns="0" bIns="0" anchor="t">
             <a:spAutoFit/>
           </a:bodyPr>
           <a:lstStyle/>
@@ -22951,7 +24038,7 @@
           <a:noFill/>
         </p:spPr>
         <p:txBody>
-          <a:bodyPr wrap="square" anchor="t" lIns="0" rIns="0" tIns="0" bIns="0">
+          <a:bodyPr wrap="square" lIns="0" tIns="0" rIns="0" bIns="0" anchor="t">
             <a:spAutoFit/>
           </a:bodyPr>
           <a:lstStyle/>
@@ -23016,6 +24103,7 @@
           <a:lstStyle/>
           <a:p>
             <a:pPr algn="ctr"/>
+            <a:endParaRPr/>
           </a:p>
         </p:txBody>
       </p:sp>
@@ -23060,6 +24148,7 @@
           <a:lstStyle/>
           <a:p>
             <a:pPr algn="ctr"/>
+            <a:endParaRPr/>
           </a:p>
         </p:txBody>
       </p:sp>
@@ -23080,7 +24169,7 @@
           <a:noFill/>
         </p:spPr>
         <p:txBody>
-          <a:bodyPr wrap="square" anchor="t" lIns="0" rIns="0" tIns="0" bIns="0">
+          <a:bodyPr wrap="square" lIns="0" tIns="0" rIns="0" bIns="0" anchor="t">
             <a:spAutoFit/>
           </a:bodyPr>
           <a:lstStyle/>
@@ -23119,7 +24208,7 @@
           <a:noFill/>
         </p:spPr>
         <p:txBody>
-          <a:bodyPr wrap="square" anchor="t" lIns="0" rIns="0" tIns="0" bIns="0">
+          <a:bodyPr wrap="square" lIns="0" tIns="0" rIns="0" bIns="0" anchor="t">
             <a:spAutoFit/>
           </a:bodyPr>
           <a:lstStyle/>
@@ -23184,6 +24273,7 @@
           <a:lstStyle/>
           <a:p>
             <a:pPr algn="ctr"/>
+            <a:endParaRPr/>
           </a:p>
         </p:txBody>
       </p:sp>
@@ -23228,6 +24318,7 @@
           <a:lstStyle/>
           <a:p>
             <a:pPr algn="ctr"/>
+            <a:endParaRPr/>
           </a:p>
         </p:txBody>
       </p:sp>
@@ -23248,7 +24339,7 @@
           <a:noFill/>
         </p:spPr>
         <p:txBody>
-          <a:bodyPr wrap="square" anchor="t" lIns="0" rIns="0" tIns="0" bIns="0">
+          <a:bodyPr wrap="square" lIns="0" tIns="0" rIns="0" bIns="0" anchor="t">
             <a:spAutoFit/>
           </a:bodyPr>
           <a:lstStyle/>
@@ -23287,7 +24378,7 @@
           <a:noFill/>
         </p:spPr>
         <p:txBody>
-          <a:bodyPr wrap="square" anchor="t" lIns="0" rIns="0" tIns="0" bIns="0">
+          <a:bodyPr wrap="square" lIns="0" tIns="0" rIns="0" bIns="0" anchor="t">
             <a:spAutoFit/>
           </a:bodyPr>
           <a:lstStyle/>
@@ -23352,6 +24443,7 @@
           <a:lstStyle/>
           <a:p>
             <a:pPr algn="ctr"/>
+            <a:endParaRPr/>
           </a:p>
         </p:txBody>
       </p:sp>
@@ -23396,6 +24488,7 @@
           <a:lstStyle/>
           <a:p>
             <a:pPr algn="ctr"/>
+            <a:endParaRPr/>
           </a:p>
         </p:txBody>
       </p:sp>
@@ -23416,7 +24509,7 @@
           <a:noFill/>
         </p:spPr>
         <p:txBody>
-          <a:bodyPr wrap="square" anchor="t" lIns="0" rIns="0" tIns="0" bIns="0">
+          <a:bodyPr wrap="square" lIns="0" tIns="0" rIns="0" bIns="0" anchor="t">
             <a:spAutoFit/>
           </a:bodyPr>
           <a:lstStyle/>
@@ -23455,7 +24548,7 @@
           <a:noFill/>
         </p:spPr>
         <p:txBody>
-          <a:bodyPr wrap="square" anchor="t" lIns="0" rIns="0" tIns="0" bIns="0">
+          <a:bodyPr wrap="square" lIns="0" tIns="0" rIns="0" bIns="0" anchor="t">
             <a:spAutoFit/>
           </a:bodyPr>
           <a:lstStyle/>
@@ -23520,6 +24613,7 @@
           <a:lstStyle/>
           <a:p>
             <a:pPr algn="ctr"/>
+            <a:endParaRPr/>
           </a:p>
         </p:txBody>
       </p:sp>
@@ -23564,6 +24658,7 @@
           <a:lstStyle/>
           <a:p>
             <a:pPr algn="ctr"/>
+            <a:endParaRPr/>
           </a:p>
         </p:txBody>
       </p:sp>
@@ -23584,7 +24679,7 @@
           <a:noFill/>
         </p:spPr>
         <p:txBody>
-          <a:bodyPr wrap="square" anchor="t" lIns="0" rIns="0" tIns="0" bIns="0">
+          <a:bodyPr wrap="square" lIns="0" tIns="0" rIns="0" bIns="0" anchor="t">
             <a:spAutoFit/>
           </a:bodyPr>
           <a:lstStyle/>
@@ -23623,7 +24718,7 @@
           <a:noFill/>
         </p:spPr>
         <p:txBody>
-          <a:bodyPr wrap="square" anchor="t" lIns="0" rIns="0" tIns="0" bIns="0">
+          <a:bodyPr wrap="square" lIns="0" tIns="0" rIns="0" bIns="0" anchor="t">
             <a:spAutoFit/>
           </a:bodyPr>
           <a:lstStyle/>
@@ -23688,6 +24783,7 @@
           <a:lstStyle/>
           <a:p>
             <a:pPr algn="ctr"/>
+            <a:endParaRPr/>
           </a:p>
         </p:txBody>
       </p:sp>
@@ -23732,6 +24828,7 @@
           <a:lstStyle/>
           <a:p>
             <a:pPr algn="ctr"/>
+            <a:endParaRPr/>
           </a:p>
         </p:txBody>
       </p:sp>
@@ -23752,7 +24849,7 @@
           <a:noFill/>
         </p:spPr>
         <p:txBody>
-          <a:bodyPr wrap="square" anchor="t" lIns="0" rIns="0" tIns="0" bIns="0">
+          <a:bodyPr wrap="square" lIns="0" tIns="0" rIns="0" bIns="0" anchor="t">
             <a:spAutoFit/>
           </a:bodyPr>
           <a:lstStyle/>
@@ -23791,7 +24888,7 @@
           <a:noFill/>
         </p:spPr>
         <p:txBody>
-          <a:bodyPr wrap="square" anchor="t" lIns="0" rIns="0" tIns="0" bIns="0">
+          <a:bodyPr wrap="square" lIns="0" tIns="0" rIns="0" bIns="0" anchor="t">
             <a:spAutoFit/>
           </a:bodyPr>
           <a:lstStyle/>
@@ -23856,6 +24953,7 @@
           <a:lstStyle/>
           <a:p>
             <a:pPr algn="ctr"/>
+            <a:endParaRPr/>
           </a:p>
         </p:txBody>
       </p:sp>
@@ -23900,6 +24998,7 @@
           <a:lstStyle/>
           <a:p>
             <a:pPr algn="ctr"/>
+            <a:endParaRPr/>
           </a:p>
         </p:txBody>
       </p:sp>
@@ -23920,7 +25019,7 @@
           <a:noFill/>
         </p:spPr>
         <p:txBody>
-          <a:bodyPr wrap="square" anchor="t" lIns="0" rIns="0" tIns="0" bIns="0">
+          <a:bodyPr wrap="square" lIns="0" tIns="0" rIns="0" bIns="0" anchor="t">
             <a:spAutoFit/>
           </a:bodyPr>
           <a:lstStyle/>
@@ -23959,7 +25058,7 @@
           <a:noFill/>
         </p:spPr>
         <p:txBody>
-          <a:bodyPr wrap="square" anchor="t" lIns="0" rIns="0" tIns="0" bIns="0">
+          <a:bodyPr wrap="square" lIns="0" tIns="0" rIns="0" bIns="0" anchor="t">
             <a:spAutoFit/>
           </a:bodyPr>
           <a:lstStyle/>
@@ -24024,6 +25123,7 @@
           <a:lstStyle/>
           <a:p>
             <a:pPr algn="ctr"/>
+            <a:endParaRPr/>
           </a:p>
         </p:txBody>
       </p:sp>
@@ -24068,6 +25168,7 @@
           <a:lstStyle/>
           <a:p>
             <a:pPr algn="ctr"/>
+            <a:endParaRPr/>
           </a:p>
         </p:txBody>
       </p:sp>
@@ -24088,7 +25189,7 @@
           <a:noFill/>
         </p:spPr>
         <p:txBody>
-          <a:bodyPr wrap="square" anchor="t" lIns="0" rIns="0" tIns="0" bIns="0">
+          <a:bodyPr wrap="square" lIns="0" tIns="0" rIns="0" bIns="0" anchor="t">
             <a:spAutoFit/>
           </a:bodyPr>
           <a:lstStyle/>
@@ -24127,7 +25228,7 @@
           <a:noFill/>
         </p:spPr>
         <p:txBody>
-          <a:bodyPr wrap="square" anchor="t" lIns="0" rIns="0" tIns="0" bIns="0">
+          <a:bodyPr wrap="square" lIns="0" tIns="0" rIns="0" bIns="0" anchor="t">
             <a:spAutoFit/>
           </a:bodyPr>
           <a:lstStyle/>
@@ -24166,7 +25267,7 @@
           <a:noFill/>
         </p:spPr>
         <p:txBody>
-          <a:bodyPr wrap="square" anchor="t" lIns="0" rIns="0" tIns="0" bIns="0">
+          <a:bodyPr wrap="square" lIns="0" tIns="0" rIns="0" bIns="0" anchor="t">
             <a:spAutoFit/>
           </a:bodyPr>
           <a:lstStyle/>
@@ -24197,7 +25298,7 @@
 </file>
 
 <file path=ppt/slides/slide6.xml><?xml version="1.0" encoding="utf-8"?>
-<p:sld xmlns:a="http://schemas.openxmlformats.org/drawingml/2006/main" xmlns:p="http://schemas.openxmlformats.org/presentationml/2006/main" xmlns:r="http://schemas.openxmlformats.org/officeDocument/2006/relationships">
+<p:sld xmlns:a="http://schemas.openxmlformats.org/drawingml/2006/main" xmlns:r="http://schemas.openxmlformats.org/officeDocument/2006/relationships" xmlns:p="http://schemas.openxmlformats.org/presentationml/2006/main">
   <p:cSld>
     <p:spTree>
       <p:nvGrpSpPr>
@@ -24205,7 +25306,14 @@
         <p:cNvGrpSpPr/>
         <p:nvPr/>
       </p:nvGrpSpPr>
-      <p:grpSpPr/>
+      <p:grpSpPr>
+        <a:xfrm>
+          <a:off x="0" y="0"/>
+          <a:ext cx="0" cy="0"/>
+          <a:chOff x="0" y="0"/>
+          <a:chExt cx="0" cy="0"/>
+        </a:xfrm>
+      </p:grpSpPr>
       <p:sp>
         <p:nvSpPr>
           <p:cNvPr id="2" name="Rectangle 1"/>
@@ -24247,6 +25355,7 @@
           <a:lstStyle/>
           <a:p>
             <a:pPr algn="ctr"/>
+            <a:endParaRPr/>
           </a:p>
         </p:txBody>
       </p:sp>
@@ -24291,6 +25400,7 @@
           <a:lstStyle/>
           <a:p>
             <a:pPr algn="ctr"/>
+            <a:endParaRPr/>
           </a:p>
         </p:txBody>
       </p:sp>
@@ -24335,6 +25445,7 @@
           <a:lstStyle/>
           <a:p>
             <a:pPr algn="ctr"/>
+            <a:endParaRPr/>
           </a:p>
         </p:txBody>
       </p:sp>
@@ -24403,6 +25514,7 @@
           <a:lstStyle/>
           <a:p>
             <a:pPr algn="ctr"/>
+            <a:endParaRPr/>
           </a:p>
         </p:txBody>
       </p:sp>
@@ -24447,6 +25559,7 @@
           <a:lstStyle/>
           <a:p>
             <a:pPr algn="ctr"/>
+            <a:endParaRPr/>
           </a:p>
         </p:txBody>
       </p:sp>
@@ -24491,6 +25604,7 @@
           <a:lstStyle/>
           <a:p>
             <a:pPr algn="ctr"/>
+            <a:endParaRPr/>
           </a:p>
         </p:txBody>
       </p:sp>
@@ -24511,7 +25625,7 @@
           <a:noFill/>
         </p:spPr>
         <p:txBody>
-          <a:bodyPr wrap="square" anchor="t" lIns="0" rIns="0" tIns="0" bIns="0">
+          <a:bodyPr wrap="square" lIns="0" tIns="0" rIns="0" bIns="0" anchor="t">
             <a:spAutoFit/>
           </a:bodyPr>
           <a:lstStyle/>
@@ -24550,7 +25664,7 @@
           <a:noFill/>
         </p:spPr>
         <p:txBody>
-          <a:bodyPr wrap="square" anchor="t" lIns="0" rIns="0" tIns="0" bIns="0">
+          <a:bodyPr wrap="square" lIns="0" tIns="0" rIns="0" bIns="0" anchor="t">
             <a:spAutoFit/>
           </a:bodyPr>
           <a:lstStyle/>
@@ -24613,6 +25727,7 @@
           <a:lstStyle/>
           <a:p>
             <a:pPr algn="ctr"/>
+            <a:endParaRPr/>
           </a:p>
         </p:txBody>
       </p:sp>
@@ -24657,6 +25772,7 @@
           <a:lstStyle/>
           <a:p>
             <a:pPr algn="ctr"/>
+            <a:endParaRPr/>
           </a:p>
         </p:txBody>
       </p:sp>
@@ -24701,6 +25817,7 @@
           <a:lstStyle/>
           <a:p>
             <a:pPr algn="ctr"/>
+            <a:endParaRPr/>
           </a:p>
         </p:txBody>
       </p:sp>
@@ -24721,7 +25838,7 @@
           <a:noFill/>
         </p:spPr>
         <p:txBody>
-          <a:bodyPr wrap="none" anchor="t" lIns="0" rIns="0" tIns="0" bIns="0">
+          <a:bodyPr wrap="none" lIns="0" tIns="0" rIns="0" bIns="0" anchor="t">
             <a:spAutoFit/>
           </a:bodyPr>
           <a:lstStyle/>
@@ -24760,7 +25877,7 @@
           <a:noFill/>
         </p:spPr>
         <p:txBody>
-          <a:bodyPr wrap="square" anchor="t" lIns="0" rIns="0" tIns="0" bIns="0">
+          <a:bodyPr wrap="square" lIns="0" tIns="0" rIns="0" bIns="0" anchor="t">
             <a:spAutoFit/>
           </a:bodyPr>
           <a:lstStyle/>
@@ -24825,6 +25942,7 @@
           <a:lstStyle/>
           <a:p>
             <a:pPr algn="ctr"/>
+            <a:endParaRPr/>
           </a:p>
         </p:txBody>
       </p:sp>
@@ -24845,7 +25963,7 @@
           <a:noFill/>
         </p:spPr>
         <p:txBody>
-          <a:bodyPr wrap="square" anchor="t" lIns="0" rIns="0" tIns="0" bIns="0">
+          <a:bodyPr wrap="square" lIns="0" tIns="0" rIns="0" bIns="0" anchor="t">
             <a:spAutoFit/>
           </a:bodyPr>
           <a:lstStyle/>
@@ -24884,7 +26002,7 @@
           <a:noFill/>
         </p:spPr>
         <p:txBody>
-          <a:bodyPr wrap="square" anchor="t" lIns="0" rIns="0" tIns="0" bIns="0">
+          <a:bodyPr wrap="square" lIns="0" tIns="0" rIns="0" bIns="0" anchor="t">
             <a:spAutoFit/>
           </a:bodyPr>
           <a:lstStyle/>
@@ -24949,6 +26067,7 @@
           <a:lstStyle/>
           <a:p>
             <a:pPr algn="ctr"/>
+            <a:endParaRPr/>
           </a:p>
         </p:txBody>
       </p:sp>
@@ -24969,7 +26088,7 @@
           <a:noFill/>
         </p:spPr>
         <p:txBody>
-          <a:bodyPr wrap="square" anchor="t" lIns="0" rIns="0" tIns="0" bIns="0">
+          <a:bodyPr wrap="square" lIns="0" tIns="0" rIns="0" bIns="0" anchor="t">
             <a:spAutoFit/>
           </a:bodyPr>
           <a:lstStyle/>
@@ -25008,7 +26127,7 @@
           <a:noFill/>
         </p:spPr>
         <p:txBody>
-          <a:bodyPr wrap="square" anchor="t" lIns="0" rIns="0" tIns="0" bIns="0">
+          <a:bodyPr wrap="square" lIns="0" tIns="0" rIns="0" bIns="0" anchor="t">
             <a:spAutoFit/>
           </a:bodyPr>
           <a:lstStyle/>
@@ -25073,6 +26192,7 @@
           <a:lstStyle/>
           <a:p>
             <a:pPr algn="ctr"/>
+            <a:endParaRPr/>
           </a:p>
         </p:txBody>
       </p:sp>
@@ -25093,7 +26213,7 @@
           <a:noFill/>
         </p:spPr>
         <p:txBody>
-          <a:bodyPr wrap="square" anchor="t" lIns="0" rIns="0" tIns="0" bIns="0">
+          <a:bodyPr wrap="square" lIns="0" tIns="0" rIns="0" bIns="0" anchor="t">
             <a:spAutoFit/>
           </a:bodyPr>
           <a:lstStyle/>
@@ -25132,7 +26252,7 @@
           <a:noFill/>
         </p:spPr>
         <p:txBody>
-          <a:bodyPr wrap="square" anchor="t" lIns="0" rIns="0" tIns="0" bIns="0">
+          <a:bodyPr wrap="square" lIns="0" tIns="0" rIns="0" bIns="0" anchor="t">
             <a:spAutoFit/>
           </a:bodyPr>
           <a:lstStyle/>
@@ -25197,6 +26317,7 @@
           <a:lstStyle/>
           <a:p>
             <a:pPr algn="ctr"/>
+            <a:endParaRPr/>
           </a:p>
         </p:txBody>
       </p:sp>
@@ -25217,7 +26338,7 @@
           <a:noFill/>
         </p:spPr>
         <p:txBody>
-          <a:bodyPr wrap="square" anchor="t" lIns="0" rIns="0" tIns="0" bIns="0">
+          <a:bodyPr wrap="square" lIns="0" tIns="0" rIns="0" bIns="0" anchor="t">
             <a:spAutoFit/>
           </a:bodyPr>
           <a:lstStyle/>
@@ -25256,7 +26377,7 @@
           <a:noFill/>
         </p:spPr>
         <p:txBody>
-          <a:bodyPr wrap="square" anchor="t" lIns="0" rIns="0" tIns="0" bIns="0">
+          <a:bodyPr wrap="square" lIns="0" tIns="0" rIns="0" bIns="0" anchor="t">
             <a:spAutoFit/>
           </a:bodyPr>
           <a:lstStyle/>
@@ -25321,6 +26442,7 @@
           <a:lstStyle/>
           <a:p>
             <a:pPr algn="ctr"/>
+            <a:endParaRPr/>
           </a:p>
         </p:txBody>
       </p:sp>
@@ -25341,7 +26463,7 @@
           <a:noFill/>
         </p:spPr>
         <p:txBody>
-          <a:bodyPr wrap="square" anchor="t" lIns="0" rIns="0" tIns="0" bIns="0">
+          <a:bodyPr wrap="square" lIns="0" tIns="0" rIns="0" bIns="0" anchor="t">
             <a:spAutoFit/>
           </a:bodyPr>
           <a:lstStyle/>
@@ -25380,7 +26502,7 @@
           <a:noFill/>
         </p:spPr>
         <p:txBody>
-          <a:bodyPr wrap="square" anchor="t" lIns="0" rIns="0" tIns="0" bIns="0">
+          <a:bodyPr wrap="square" lIns="0" tIns="0" rIns="0" bIns="0" anchor="t">
             <a:spAutoFit/>
           </a:bodyPr>
           <a:lstStyle/>
@@ -25419,7 +26541,7 @@
           <a:noFill/>
         </p:spPr>
         <p:txBody>
-          <a:bodyPr wrap="square" anchor="t" lIns="0" rIns="0" tIns="0" bIns="0">
+          <a:bodyPr wrap="square" lIns="0" tIns="0" rIns="0" bIns="0" anchor="t">
             <a:spAutoFit/>
           </a:bodyPr>
           <a:lstStyle/>
@@ -25484,6 +26606,7 @@
           <a:lstStyle/>
           <a:p>
             <a:pPr algn="ctr"/>
+            <a:endParaRPr/>
           </a:p>
         </p:txBody>
       </p:sp>
@@ -25504,7 +26627,7 @@
           <a:noFill/>
         </p:spPr>
         <p:txBody>
-          <a:bodyPr wrap="square" anchor="t" lIns="0" rIns="0" tIns="0" bIns="0">
+          <a:bodyPr wrap="square" lIns="0" tIns="0" rIns="0" bIns="0" anchor="t">
             <a:spAutoFit/>
           </a:bodyPr>
           <a:lstStyle/>
@@ -25543,7 +26666,7 @@
           <a:noFill/>
         </p:spPr>
         <p:txBody>
-          <a:bodyPr wrap="square" anchor="t" lIns="0" rIns="0" tIns="0" bIns="0">
+          <a:bodyPr wrap="square" lIns="0" tIns="0" rIns="0" bIns="0" anchor="t">
             <a:spAutoFit/>
           </a:bodyPr>
           <a:lstStyle/>
@@ -25582,7 +26705,7 @@
           <a:noFill/>
         </p:spPr>
         <p:txBody>
-          <a:bodyPr wrap="square" anchor="t" lIns="0" rIns="0" tIns="0" bIns="0">
+          <a:bodyPr wrap="square" lIns="0" tIns="0" rIns="0" bIns="0" anchor="t">
             <a:spAutoFit/>
           </a:bodyPr>
           <a:lstStyle/>
@@ -25647,6 +26770,7 @@
           <a:lstStyle/>
           <a:p>
             <a:pPr algn="ctr"/>
+            <a:endParaRPr/>
           </a:p>
         </p:txBody>
       </p:sp>
@@ -25667,7 +26791,7 @@
           <a:noFill/>
         </p:spPr>
         <p:txBody>
-          <a:bodyPr wrap="square" anchor="t" lIns="0" rIns="0" tIns="0" bIns="0">
+          <a:bodyPr wrap="square" lIns="0" tIns="0" rIns="0" bIns="0" anchor="t">
             <a:spAutoFit/>
           </a:bodyPr>
           <a:lstStyle/>
@@ -25706,7 +26830,7 @@
           <a:noFill/>
         </p:spPr>
         <p:txBody>
-          <a:bodyPr wrap="square" anchor="t" lIns="0" rIns="0" tIns="0" bIns="0">
+          <a:bodyPr wrap="square" lIns="0" tIns="0" rIns="0" bIns="0" anchor="t">
             <a:spAutoFit/>
           </a:bodyPr>
           <a:lstStyle/>
@@ -25771,6 +26895,7 @@
           <a:lstStyle/>
           <a:p>
             <a:pPr algn="ctr"/>
+            <a:endParaRPr/>
           </a:p>
         </p:txBody>
       </p:sp>
@@ -25791,7 +26916,7 @@
           <a:noFill/>
         </p:spPr>
         <p:txBody>
-          <a:bodyPr wrap="square" anchor="t" lIns="0" rIns="0" tIns="0" bIns="0">
+          <a:bodyPr wrap="square" lIns="0" tIns="0" rIns="0" bIns="0" anchor="t">
             <a:spAutoFit/>
           </a:bodyPr>
           <a:lstStyle/>
@@ -25830,7 +26955,7 @@
           <a:noFill/>
         </p:spPr>
         <p:txBody>
-          <a:bodyPr wrap="square" anchor="t" lIns="0" rIns="0" tIns="0" bIns="0">
+          <a:bodyPr wrap="square" lIns="0" tIns="0" rIns="0" bIns="0" anchor="t">
             <a:spAutoFit/>
           </a:bodyPr>
           <a:lstStyle/>
@@ -25895,6 +27020,7 @@
           <a:lstStyle/>
           <a:p>
             <a:pPr algn="ctr"/>
+            <a:endParaRPr/>
           </a:p>
         </p:txBody>
       </p:sp>
@@ -25915,7 +27041,7 @@
           <a:noFill/>
         </p:spPr>
         <p:txBody>
-          <a:bodyPr wrap="square" anchor="t" lIns="0" rIns="0" tIns="0" bIns="0">
+          <a:bodyPr wrap="square" lIns="0" tIns="0" rIns="0" bIns="0" anchor="t">
             <a:spAutoFit/>
           </a:bodyPr>
           <a:lstStyle/>
@@ -25954,7 +27080,7 @@
           <a:noFill/>
         </p:spPr>
         <p:txBody>
-          <a:bodyPr wrap="square" anchor="t" lIns="0" rIns="0" tIns="0" bIns="0">
+          <a:bodyPr wrap="square" lIns="0" tIns="0" rIns="0" bIns="0" anchor="t">
             <a:spAutoFit/>
           </a:bodyPr>
           <a:lstStyle/>
@@ -26019,6 +27145,7 @@
           <a:lstStyle/>
           <a:p>
             <a:pPr algn="ctr"/>
+            <a:endParaRPr/>
           </a:p>
         </p:txBody>
       </p:sp>
@@ -26039,7 +27166,7 @@
           <a:noFill/>
         </p:spPr>
         <p:txBody>
-          <a:bodyPr wrap="square" anchor="t" lIns="0" rIns="0" tIns="0" bIns="0">
+          <a:bodyPr wrap="square" lIns="0" tIns="0" rIns="0" bIns="0" anchor="t">
             <a:spAutoFit/>
           </a:bodyPr>
           <a:lstStyle/>
@@ -26078,7 +27205,7 @@
           <a:noFill/>
         </p:spPr>
         <p:txBody>
-          <a:bodyPr wrap="square" anchor="t" lIns="0" rIns="0" tIns="0" bIns="0">
+          <a:bodyPr wrap="square" lIns="0" tIns="0" rIns="0" bIns="0" anchor="t">
             <a:spAutoFit/>
           </a:bodyPr>
           <a:lstStyle/>
@@ -26143,6 +27270,7 @@
           <a:lstStyle/>
           <a:p>
             <a:pPr algn="ctr"/>
+            <a:endParaRPr/>
           </a:p>
         </p:txBody>
       </p:sp>
@@ -26163,7 +27291,7 @@
           <a:noFill/>
         </p:spPr>
         <p:txBody>
-          <a:bodyPr wrap="square" anchor="t" lIns="0" rIns="0" tIns="0" bIns="0">
+          <a:bodyPr wrap="square" lIns="0" tIns="0" rIns="0" bIns="0" anchor="t">
             <a:spAutoFit/>
           </a:bodyPr>
           <a:lstStyle/>
@@ -26202,7 +27330,7 @@
           <a:noFill/>
         </p:spPr>
         <p:txBody>
-          <a:bodyPr wrap="square" anchor="t" lIns="0" rIns="0" tIns="0" bIns="0">
+          <a:bodyPr wrap="square" lIns="0" tIns="0" rIns="0" bIns="0" anchor="t">
             <a:spAutoFit/>
           </a:bodyPr>
           <a:lstStyle/>
@@ -26267,6 +27395,7 @@
           <a:lstStyle/>
           <a:p>
             <a:pPr algn="ctr"/>
+            <a:endParaRPr/>
           </a:p>
         </p:txBody>
       </p:sp>
@@ -26287,7 +27416,7 @@
           <a:noFill/>
         </p:spPr>
         <p:txBody>
-          <a:bodyPr wrap="square" anchor="t" lIns="0" rIns="0" tIns="0" bIns="0">
+          <a:bodyPr wrap="square" lIns="0" tIns="0" rIns="0" bIns="0" anchor="t">
             <a:spAutoFit/>
           </a:bodyPr>
           <a:lstStyle/>
@@ -26326,7 +27455,7 @@
           <a:noFill/>
         </p:spPr>
         <p:txBody>
-          <a:bodyPr wrap="square" anchor="t" lIns="0" rIns="0" tIns="0" bIns="0">
+          <a:bodyPr wrap="square" lIns="0" tIns="0" rIns="0" bIns="0" anchor="t">
             <a:spAutoFit/>
           </a:bodyPr>
           <a:lstStyle/>
@@ -26391,6 +27520,7 @@
           <a:lstStyle/>
           <a:p>
             <a:pPr algn="ctr"/>
+            <a:endParaRPr/>
           </a:p>
         </p:txBody>
       </p:sp>
@@ -26411,7 +27541,7 @@
           <a:noFill/>
         </p:spPr>
         <p:txBody>
-          <a:bodyPr wrap="square" anchor="t" lIns="0" rIns="0" tIns="0" bIns="0">
+          <a:bodyPr wrap="square" lIns="0" tIns="0" rIns="0" bIns="0" anchor="t">
             <a:spAutoFit/>
           </a:bodyPr>
           <a:lstStyle/>
@@ -26450,7 +27580,7 @@
           <a:noFill/>
         </p:spPr>
         <p:txBody>
-          <a:bodyPr wrap="square" anchor="t" lIns="0" rIns="0" tIns="0" bIns="0">
+          <a:bodyPr wrap="square" lIns="0" tIns="0" rIns="0" bIns="0" anchor="t">
             <a:spAutoFit/>
           </a:bodyPr>
           <a:lstStyle/>
@@ -26515,6 +27645,7 @@
           <a:lstStyle/>
           <a:p>
             <a:pPr algn="ctr"/>
+            <a:endParaRPr/>
           </a:p>
         </p:txBody>
       </p:sp>
@@ -26535,7 +27666,7 @@
           <a:noFill/>
         </p:spPr>
         <p:txBody>
-          <a:bodyPr wrap="square" anchor="t" lIns="0" rIns="0" tIns="0" bIns="0">
+          <a:bodyPr wrap="square" lIns="0" tIns="0" rIns="0" bIns="0" anchor="t">
             <a:spAutoFit/>
           </a:bodyPr>
           <a:lstStyle/>
@@ -26574,7 +27705,7 @@
           <a:noFill/>
         </p:spPr>
         <p:txBody>
-          <a:bodyPr wrap="square" anchor="t" lIns="0" rIns="0" tIns="0" bIns="0">
+          <a:bodyPr wrap="square" lIns="0" tIns="0" rIns="0" bIns="0" anchor="t">
             <a:spAutoFit/>
           </a:bodyPr>
           <a:lstStyle/>
@@ -26639,6 +27770,7 @@
           <a:lstStyle/>
           <a:p>
             <a:pPr algn="ctr"/>
+            <a:endParaRPr/>
           </a:p>
         </p:txBody>
       </p:sp>
@@ -26659,7 +27791,7 @@
           <a:noFill/>
         </p:spPr>
         <p:txBody>
-          <a:bodyPr wrap="square" anchor="t" lIns="0" rIns="0" tIns="0" bIns="0">
+          <a:bodyPr wrap="square" lIns="0" tIns="0" rIns="0" bIns="0" anchor="t">
             <a:spAutoFit/>
           </a:bodyPr>
           <a:lstStyle/>
@@ -26698,7 +27830,7 @@
           <a:noFill/>
         </p:spPr>
         <p:txBody>
-          <a:bodyPr wrap="square" anchor="t" lIns="0" rIns="0" tIns="0" bIns="0">
+          <a:bodyPr wrap="square" lIns="0" tIns="0" rIns="0" bIns="0" anchor="t">
             <a:spAutoFit/>
           </a:bodyPr>
           <a:lstStyle/>
@@ -26763,6 +27895,7 @@
           <a:lstStyle/>
           <a:p>
             <a:pPr algn="ctr"/>
+            <a:endParaRPr/>
           </a:p>
         </p:txBody>
       </p:sp>
@@ -26783,7 +27916,7 @@
           <a:noFill/>
         </p:spPr>
         <p:txBody>
-          <a:bodyPr wrap="square" anchor="t" lIns="0" rIns="0" tIns="0" bIns="0">
+          <a:bodyPr wrap="square" lIns="0" tIns="0" rIns="0" bIns="0" anchor="t">
             <a:spAutoFit/>
           </a:bodyPr>
           <a:lstStyle/>
@@ -26822,7 +27955,7 @@
           <a:noFill/>
         </p:spPr>
         <p:txBody>
-          <a:bodyPr wrap="square" anchor="t" lIns="0" rIns="0" tIns="0" bIns="0">
+          <a:bodyPr wrap="square" lIns="0" tIns="0" rIns="0" bIns="0" anchor="t">
             <a:spAutoFit/>
           </a:bodyPr>
           <a:lstStyle/>
@@ -26887,6 +28020,7 @@
           <a:lstStyle/>
           <a:p>
             <a:pPr algn="ctr"/>
+            <a:endParaRPr/>
           </a:p>
         </p:txBody>
       </p:sp>
@@ -26907,7 +28041,7 @@
           <a:noFill/>
         </p:spPr>
         <p:txBody>
-          <a:bodyPr wrap="square" anchor="t" lIns="0" rIns="0" tIns="0" bIns="0">
+          <a:bodyPr wrap="square" lIns="0" tIns="0" rIns="0" bIns="0" anchor="t">
             <a:spAutoFit/>
           </a:bodyPr>
           <a:lstStyle/>
@@ -26946,7 +28080,7 @@
           <a:noFill/>
         </p:spPr>
         <p:txBody>
-          <a:bodyPr wrap="square" anchor="t" lIns="0" rIns="0" tIns="0" bIns="0">
+          <a:bodyPr wrap="square" lIns="0" tIns="0" rIns="0" bIns="0" anchor="t">
             <a:spAutoFit/>
           </a:bodyPr>
           <a:lstStyle/>
@@ -27011,6 +28145,7 @@
           <a:lstStyle/>
           <a:p>
             <a:pPr algn="ctr"/>
+            <a:endParaRPr/>
           </a:p>
         </p:txBody>
       </p:sp>
@@ -27031,7 +28166,7 @@
           <a:noFill/>
         </p:spPr>
         <p:txBody>
-          <a:bodyPr wrap="square" anchor="t" lIns="0" rIns="0" tIns="0" bIns="0">
+          <a:bodyPr wrap="square" lIns="0" tIns="0" rIns="0" bIns="0" anchor="t">
             <a:spAutoFit/>
           </a:bodyPr>
           <a:lstStyle/>
@@ -27070,7 +28205,7 @@
           <a:noFill/>
         </p:spPr>
         <p:txBody>
-          <a:bodyPr wrap="square" anchor="t" lIns="0" rIns="0" tIns="0" bIns="0">
+          <a:bodyPr wrap="square" lIns="0" tIns="0" rIns="0" bIns="0" anchor="t">
             <a:spAutoFit/>
           </a:bodyPr>
           <a:lstStyle/>
@@ -27109,7 +28244,7 @@
           <a:noFill/>
         </p:spPr>
         <p:txBody>
-          <a:bodyPr wrap="square" anchor="t" lIns="0" rIns="0" tIns="0" bIns="0">
+          <a:bodyPr wrap="square" lIns="0" tIns="0" rIns="0" bIns="0" anchor="t">
             <a:spAutoFit/>
           </a:bodyPr>
           <a:lstStyle/>
@@ -27174,6 +28309,7 @@
           <a:lstStyle/>
           <a:p>
             <a:pPr algn="ctr"/>
+            <a:endParaRPr/>
           </a:p>
         </p:txBody>
       </p:sp>
@@ -27194,7 +28330,7 @@
           <a:noFill/>
         </p:spPr>
         <p:txBody>
-          <a:bodyPr wrap="square" anchor="t" lIns="0" rIns="0" tIns="0" bIns="0">
+          <a:bodyPr wrap="square" lIns="0" tIns="0" rIns="0" bIns="0" anchor="t">
             <a:spAutoFit/>
           </a:bodyPr>
           <a:lstStyle/>
@@ -27233,7 +28369,7 @@
           <a:noFill/>
         </p:spPr>
         <p:txBody>
-          <a:bodyPr wrap="square" anchor="t" lIns="0" rIns="0" tIns="0" bIns="0">
+          <a:bodyPr wrap="square" lIns="0" tIns="0" rIns="0" bIns="0" anchor="t">
             <a:spAutoFit/>
           </a:bodyPr>
           <a:lstStyle/>
@@ -27272,7 +28408,7 @@
           <a:noFill/>
         </p:spPr>
         <p:txBody>
-          <a:bodyPr wrap="square" anchor="t" lIns="0" rIns="0" tIns="0" bIns="0">
+          <a:bodyPr wrap="square" lIns="0" tIns="0" rIns="0" bIns="0" anchor="t">
             <a:spAutoFit/>
           </a:bodyPr>
           <a:lstStyle/>
@@ -27303,7 +28439,7 @@
 </file>
 
 <file path=ppt/slides/slide7.xml><?xml version="1.0" encoding="utf-8"?>
-<p:sld xmlns:a="http://schemas.openxmlformats.org/drawingml/2006/main" xmlns:p="http://schemas.openxmlformats.org/presentationml/2006/main" xmlns:r="http://schemas.openxmlformats.org/officeDocument/2006/relationships">
+<p:sld xmlns:a="http://schemas.openxmlformats.org/drawingml/2006/main" xmlns:r="http://schemas.openxmlformats.org/officeDocument/2006/relationships" xmlns:p="http://schemas.openxmlformats.org/presentationml/2006/main">
   <p:cSld>
     <p:spTree>
       <p:nvGrpSpPr>
@@ -27311,7 +28447,14 @@
         <p:cNvGrpSpPr/>
         <p:nvPr/>
       </p:nvGrpSpPr>
-      <p:grpSpPr/>
+      <p:grpSpPr>
+        <a:xfrm>
+          <a:off x="0" y="0"/>
+          <a:ext cx="0" cy="0"/>
+          <a:chOff x="0" y="0"/>
+          <a:chExt cx="0" cy="0"/>
+        </a:xfrm>
+      </p:grpSpPr>
       <p:sp>
         <p:nvSpPr>
           <p:cNvPr id="2" name="Rectangle 1"/>
@@ -27353,6 +28496,7 @@
           <a:lstStyle/>
           <a:p>
             <a:pPr algn="ctr"/>
+            <a:endParaRPr/>
           </a:p>
         </p:txBody>
       </p:sp>
@@ -27397,6 +28541,7 @@
           <a:lstStyle/>
           <a:p>
             <a:pPr algn="ctr"/>
+            <a:endParaRPr/>
           </a:p>
         </p:txBody>
       </p:sp>
@@ -27441,6 +28586,7 @@
           <a:lstStyle/>
           <a:p>
             <a:pPr algn="ctr"/>
+            <a:endParaRPr/>
           </a:p>
         </p:txBody>
       </p:sp>
@@ -27453,7 +28599,7 @@
           <p:nvPr/>
         </p:nvPicPr>
         <p:blipFill>
-          <a:blip r:embed="rId2"/>
+          <a:blip r:embed="rId8"/>
           <a:stretch>
             <a:fillRect/>
           </a:stretch>
@@ -27509,6 +28655,7 @@
           <a:lstStyle/>
           <a:p>
             <a:pPr algn="ctr"/>
+            <a:endParaRPr/>
           </a:p>
         </p:txBody>
       </p:sp>
@@ -27553,6 +28700,7 @@
           <a:lstStyle/>
           <a:p>
             <a:pPr algn="ctr"/>
+            <a:endParaRPr/>
           </a:p>
         </p:txBody>
       </p:sp>
@@ -27597,6 +28745,7 @@
           <a:lstStyle/>
           <a:p>
             <a:pPr algn="ctr"/>
+            <a:endParaRPr/>
           </a:p>
         </p:txBody>
       </p:sp>
@@ -27617,7 +28766,7 @@
           <a:noFill/>
         </p:spPr>
         <p:txBody>
-          <a:bodyPr wrap="square" anchor="t" lIns="0" rIns="0" tIns="0" bIns="0">
+          <a:bodyPr wrap="square" lIns="0" tIns="0" rIns="0" bIns="0" anchor="t">
             <a:spAutoFit/>
           </a:bodyPr>
           <a:lstStyle/>
@@ -27656,7 +28805,7 @@
           <a:noFill/>
         </p:spPr>
         <p:txBody>
-          <a:bodyPr wrap="square" anchor="t" lIns="0" rIns="0" tIns="0" bIns="0">
+          <a:bodyPr wrap="square" lIns="0" tIns="0" rIns="0" bIns="0" anchor="t">
             <a:spAutoFit/>
           </a:bodyPr>
           <a:lstStyle/>
@@ -27719,6 +28868,7 @@
           <a:lstStyle/>
           <a:p>
             <a:pPr algn="ctr"/>
+            <a:endParaRPr/>
           </a:p>
         </p:txBody>
       </p:sp>
@@ -27763,6 +28913,7 @@
           <a:lstStyle/>
           <a:p>
             <a:pPr algn="ctr"/>
+            <a:endParaRPr/>
           </a:p>
         </p:txBody>
       </p:sp>
@@ -27807,6 +28958,7 @@
           <a:lstStyle/>
           <a:p>
             <a:pPr algn="ctr"/>
+            <a:endParaRPr/>
           </a:p>
         </p:txBody>
       </p:sp>
@@ -27827,7 +28979,7 @@
           <a:noFill/>
         </p:spPr>
         <p:txBody>
-          <a:bodyPr wrap="none" anchor="t" lIns="0" rIns="0" tIns="0" bIns="0">
+          <a:bodyPr wrap="none" lIns="0" tIns="0" rIns="0" bIns="0" anchor="t">
             <a:spAutoFit/>
           </a:bodyPr>
           <a:lstStyle/>
@@ -27866,7 +29018,7 @@
           <a:noFill/>
         </p:spPr>
         <p:txBody>
-          <a:bodyPr wrap="square" anchor="t" lIns="0" rIns="0" tIns="0" bIns="0">
+          <a:bodyPr wrap="square" lIns="0" tIns="0" rIns="0" bIns="0" anchor="t">
             <a:spAutoFit/>
           </a:bodyPr>
           <a:lstStyle/>
@@ -27931,12 +29083,224 @@
           <a:lstStyle/>
           <a:p>
             <a:pPr algn="ctr"/>
+            <a:endParaRPr/>
           </a:p>
         </p:txBody>
       </p:sp>
       <p:pic>
         <p:nvPicPr>
           <p:cNvPr id="17" name="demo_pla.mp4">
+            <a:hlinkClick r:id="" action="ppaction://media"/>
+          </p:cNvPr>
+          <p:cNvPicPr>
+            <a:picLocks noChangeAspect="1"/>
+          </p:cNvPicPr>
+          <p:nvPr>
+            <a:videoFile r:link="rId2"/>
+            <p:extLst>
+              <p:ext uri="{DAA4B4D4-6D71-4841-9C94-3DE7FCFB9230}">
+                <p14:media xmlns:p14="http://schemas.microsoft.com/office/powerpoint/2010/main" r:embed="rId1"/>
+              </p:ext>
+            </p:extLst>
+          </p:nvPr>
+        </p:nvPicPr>
+        <p:blipFill>
+          <a:blip r:embed="rId9"/>
+          <a:stretch>
+            <a:fillRect/>
+          </a:stretch>
+        </p:blipFill>
+        <p:spPr>
+          <a:xfrm>
+            <a:off x="859536" y="1851660"/>
+            <a:ext cx="8385048" cy="1325880"/>
+          </a:xfrm>
+          <a:prstGeom prst="rect">
+            <a:avLst/>
+          </a:prstGeom>
+        </p:spPr>
+      </p:pic>
+      <p:sp>
+        <p:nvSpPr>
+          <p:cNvPr id="18" name="Rectangle 17"/>
+          <p:cNvSpPr/>
+          <p:nvPr/>
+        </p:nvSpPr>
+        <p:spPr>
+          <a:xfrm>
+            <a:off x="777240" y="1805940"/>
+            <a:ext cx="903427" cy="274320"/>
+          </a:xfrm>
+          <a:prstGeom prst="rect">
+            <a:avLst/>
+          </a:prstGeom>
+          <a:solidFill>
+            <a:srgbClr val="253439"/>
+          </a:solidFill>
+          <a:ln>
+            <a:noFill/>
+          </a:ln>
+          <a:effectLst/>
+        </p:spPr>
+        <p:style>
+          <a:lnRef idx="1">
+            <a:schemeClr val="accent1"/>
+          </a:lnRef>
+          <a:fillRef idx="3">
+            <a:schemeClr val="accent1"/>
+          </a:fillRef>
+          <a:effectRef idx="2">
+            <a:schemeClr val="accent1"/>
+          </a:effectRef>
+          <a:fontRef idx="minor">
+            <a:schemeClr val="lt1"/>
+          </a:fontRef>
+        </p:style>
+        <p:txBody>
+          <a:bodyPr wrap="none" lIns="36576" tIns="0" rIns="36576" bIns="0" rtlCol="0" anchor="ctr"/>
+          <a:lstStyle/>
+          <a:p>
+            <a:pPr algn="ctr"/>
+            <a:r>
+              <a:rPr sz="900">
+                <a:solidFill>
+                  <a:srgbClr val="FFFFFF"/>
+                </a:solidFill>
+                <a:latin typeface="Segoe UI Semibold"/>
+              </a:rPr>
+              <a:t>PLA — S13</a:t>
+            </a:r>
+          </a:p>
+        </p:txBody>
+      </p:sp>
+      <p:sp>
+        <p:nvSpPr>
+          <p:cNvPr id="19" name="TextBox 18"/>
+          <p:cNvSpPr txBox="1"/>
+          <p:nvPr/>
+        </p:nvSpPr>
+        <p:spPr>
+          <a:xfrm>
+            <a:off x="9464040" y="2029967"/>
+            <a:ext cx="2377440" cy="365760"/>
+          </a:xfrm>
+          <a:prstGeom prst="rect">
+            <a:avLst/>
+          </a:prstGeom>
+          <a:noFill/>
+        </p:spPr>
+        <p:txBody>
+          <a:bodyPr wrap="square" lIns="0" tIns="0" rIns="0" bIns="0" anchor="t">
+            <a:spAutoFit/>
+          </a:bodyPr>
+          <a:lstStyle/>
+          <a:p>
+            <a:pPr algn="l">
+              <a:lnSpc>
+                <a:spcPct val="100000"/>
+              </a:lnSpc>
+            </a:pPr>
+            <a:r>
+              <a:rPr sz="1500" b="0" i="0">
+                <a:solidFill>
+                  <a:srgbClr val="253439"/>
+                </a:solidFill>
+                <a:latin typeface="Segoe UI Semibold"/>
+              </a:rPr>
+              <a:t>PLA</a:t>
+            </a:r>
+          </a:p>
+        </p:txBody>
+      </p:sp>
+      <p:sp>
+        <p:nvSpPr>
+          <p:cNvPr id="20" name="TextBox 19"/>
+          <p:cNvSpPr txBox="1"/>
+          <p:nvPr/>
+        </p:nvSpPr>
+        <p:spPr>
+          <a:xfrm>
+            <a:off x="9464040" y="2340864"/>
+            <a:ext cx="2377440" cy="822960"/>
+          </a:xfrm>
+          <a:prstGeom prst="rect">
+            <a:avLst/>
+          </a:prstGeom>
+          <a:noFill/>
+        </p:spPr>
+        <p:txBody>
+          <a:bodyPr wrap="square" lIns="0" tIns="0" rIns="0" bIns="0" anchor="t">
+            <a:spAutoFit/>
+          </a:bodyPr>
+          <a:lstStyle/>
+          <a:p>
+            <a:pPr algn="l">
+              <a:lnSpc>
+                <a:spcPct val="100000"/>
+              </a:lnSpc>
+            </a:pPr>
+            <a:r>
+              <a:rPr sz="950" b="0" i="0">
+                <a:solidFill>
+                  <a:srgbClr val="7C898B"/>
+                </a:solidFill>
+                <a:latin typeface="Segoe UI"/>
+              </a:rPr>
+              <a:t>black PLA · fractures at ~4 % strain</a:t>
+            </a:r>
+          </a:p>
+        </p:txBody>
+      </p:sp>
+      <p:sp>
+        <p:nvSpPr>
+          <p:cNvPr id="21" name="Rectangle 20"/>
+          <p:cNvSpPr/>
+          <p:nvPr/>
+        </p:nvSpPr>
+        <p:spPr>
+          <a:xfrm>
+            <a:off x="777240" y="3314700"/>
+            <a:ext cx="8549640" cy="1408176"/>
+          </a:xfrm>
+          <a:prstGeom prst="rect">
+            <a:avLst/>
+          </a:prstGeom>
+          <a:solidFill>
+            <a:srgbClr val="FFFFFF"/>
+          </a:solidFill>
+          <a:ln w="12700">
+            <a:solidFill>
+              <a:srgbClr val="DEDAD2"/>
+            </a:solidFill>
+          </a:ln>
+          <a:effectLst/>
+        </p:spPr>
+        <p:style>
+          <a:lnRef idx="1">
+            <a:schemeClr val="accent1"/>
+          </a:lnRef>
+          <a:fillRef idx="3">
+            <a:schemeClr val="accent1"/>
+          </a:fillRef>
+          <a:effectRef idx="2">
+            <a:schemeClr val="accent1"/>
+          </a:effectRef>
+          <a:fontRef idx="minor">
+            <a:schemeClr val="lt1"/>
+          </a:fontRef>
+        </p:style>
+        <p:txBody>
+          <a:bodyPr rtlCol="0" anchor="ctr"/>
+          <a:lstStyle/>
+          <a:p>
+            <a:pPr algn="ctr"/>
+            <a:endParaRPr/>
+          </a:p>
+        </p:txBody>
+      </p:sp>
+      <p:pic>
+        <p:nvPicPr>
+          <p:cNvPr id="22" name="demo_petg.mp4">
             <a:hlinkClick r:id="" action="ppaction://media"/>
           </p:cNvPr>
           <p:cNvPicPr>
@@ -27952,14 +29316,14 @@
           </p:nvPr>
         </p:nvPicPr>
         <p:blipFill>
-          <a:blip r:embed="rId5"/>
+          <a:blip r:embed="rId10"/>
           <a:stretch>
             <a:fillRect/>
           </a:stretch>
         </p:blipFill>
         <p:spPr>
           <a:xfrm>
-            <a:off x="859536" y="1851660"/>
+            <a:off x="859536" y="3355848"/>
             <a:ext cx="8385048" cy="1325880"/>
           </a:xfrm>
           <a:prstGeom prst="rect">
@@ -27969,14 +29333,14 @@
       </p:pic>
       <p:sp>
         <p:nvSpPr>
-          <p:cNvPr id="18" name="Rectangle 17"/>
+          <p:cNvPr id="23" name="Rectangle 22"/>
           <p:cNvSpPr/>
           <p:nvPr/>
         </p:nvSpPr>
         <p:spPr>
           <a:xfrm>
-            <a:off x="777240" y="1805940"/>
-            <a:ext cx="903427" cy="274320"/>
+            <a:off x="777240" y="3310128"/>
+            <a:ext cx="987551" cy="274320"/>
           </a:xfrm>
           <a:prstGeom prst="rect">
             <a:avLst/>
@@ -28004,7 +29368,7 @@
           </a:fontRef>
         </p:style>
         <p:txBody>
-          <a:bodyPr rtlCol="0" anchor="ctr" lIns="36576" rIns="36576" tIns="0" bIns="0" wrap="none"/>
+          <a:bodyPr wrap="none" lIns="36576" tIns="0" rIns="36576" bIns="0" rtlCol="0" anchor="ctr"/>
           <a:lstStyle/>
           <a:p>
             <a:pPr algn="ctr"/>
@@ -28015,20 +29379,20 @@
                 </a:solidFill>
                 <a:latin typeface="Segoe UI Semibold"/>
               </a:rPr>
-              <a:t>PLA — S13</a:t>
-            </a:r>
-          </a:p>
-        </p:txBody>
-      </p:sp>
-      <p:sp>
-        <p:nvSpPr>
-          <p:cNvPr id="19" name="TextBox 18"/>
+              <a:t>PETG — S30</a:t>
+            </a:r>
+          </a:p>
+        </p:txBody>
+      </p:sp>
+      <p:sp>
+        <p:nvSpPr>
+          <p:cNvPr id="24" name="TextBox 23"/>
           <p:cNvSpPr txBox="1"/>
           <p:nvPr/>
         </p:nvSpPr>
         <p:spPr>
           <a:xfrm>
-            <a:off x="9464040" y="2029967"/>
+            <a:off x="9464040" y="3534156"/>
             <a:ext cx="2377440" cy="365760"/>
           </a:xfrm>
           <a:prstGeom prst="rect">
@@ -28037,7 +29401,7 @@
           <a:noFill/>
         </p:spPr>
         <p:txBody>
-          <a:bodyPr wrap="square" anchor="t" lIns="0" rIns="0" tIns="0" bIns="0">
+          <a:bodyPr wrap="square" lIns="0" tIns="0" rIns="0" bIns="0" anchor="t">
             <a:spAutoFit/>
           </a:bodyPr>
           <a:lstStyle/>
@@ -28054,20 +29418,20 @@
                 </a:solidFill>
                 <a:latin typeface="Segoe UI Semibold"/>
               </a:rPr>
-              <a:t>PLA</a:t>
-            </a:r>
-          </a:p>
-        </p:txBody>
-      </p:sp>
-      <p:sp>
-        <p:nvSpPr>
-          <p:cNvPr id="20" name="TextBox 19"/>
+              <a:t>PETG</a:t>
+            </a:r>
+          </a:p>
+        </p:txBody>
+      </p:sp>
+      <p:sp>
+        <p:nvSpPr>
+          <p:cNvPr id="25" name="TextBox 24"/>
           <p:cNvSpPr txBox="1"/>
           <p:nvPr/>
         </p:nvSpPr>
         <p:spPr>
           <a:xfrm>
-            <a:off x="9464040" y="2340864"/>
+            <a:off x="9464040" y="3845052"/>
             <a:ext cx="2377440" cy="822960"/>
           </a:xfrm>
           <a:prstGeom prst="rect">
@@ -28076,7 +29440,7 @@
           <a:noFill/>
         </p:spPr>
         <p:txBody>
-          <a:bodyPr wrap="square" anchor="t" lIns="0" rIns="0" tIns="0" bIns="0">
+          <a:bodyPr wrap="square" lIns="0" tIns="0" rIns="0" bIns="0" anchor="t">
             <a:spAutoFit/>
           </a:bodyPr>
           <a:lstStyle/>
@@ -28093,20 +29457,20 @@
                 </a:solidFill>
                 <a:latin typeface="Segoe UI"/>
               </a:rPr>
-              <a:t>black PLA · fractures at ~4 % strain</a:t>
-            </a:r>
-          </a:p>
-        </p:txBody>
-      </p:sp>
-      <p:sp>
-        <p:nvSpPr>
-          <p:cNvPr id="21" name="Rectangle 20"/>
+              <a:t>glossier, more ductile · ~8 % at fracture</a:t>
+            </a:r>
+          </a:p>
+        </p:txBody>
+      </p:sp>
+      <p:sp>
+        <p:nvSpPr>
+          <p:cNvPr id="26" name="Rectangle 25"/>
           <p:cNvSpPr/>
           <p:nvPr/>
         </p:nvSpPr>
         <p:spPr>
           <a:xfrm>
-            <a:off x="777240" y="3314700"/>
+            <a:off x="777240" y="4818888"/>
             <a:ext cx="8549640" cy="1408176"/>
           </a:xfrm>
           <a:prstGeom prst="rect">
@@ -28141,216 +29505,7 @@
           <a:lstStyle/>
           <a:p>
             <a:pPr algn="ctr"/>
-          </a:p>
-        </p:txBody>
-      </p:sp>
-      <p:pic>
-        <p:nvPicPr>
-          <p:cNvPr id="22" name="demo_petg.mp4">
-            <a:hlinkClick r:id="" action="ppaction://media"/>
-          </p:cNvPr>
-          <p:cNvPicPr>
-            <a:picLocks noChangeAspect="1"/>
-          </p:cNvPicPr>
-          <p:nvPr>
-            <a:videoFile r:link="rId7"/>
-            <p:extLst>
-              <p:ext uri="{DAA4B4D4-6D71-4841-9C94-3DE7FCFB9230}">
-                <p14:media xmlns:p14="http://schemas.microsoft.com/office/powerpoint/2010/main" r:embed="rId6"/>
-              </p:ext>
-            </p:extLst>
-          </p:nvPr>
-        </p:nvPicPr>
-        <p:blipFill>
-          <a:blip r:embed="rId8"/>
-          <a:stretch>
-            <a:fillRect/>
-          </a:stretch>
-        </p:blipFill>
-        <p:spPr>
-          <a:xfrm>
-            <a:off x="859536" y="3355848"/>
-            <a:ext cx="8385048" cy="1325880"/>
-          </a:xfrm>
-          <a:prstGeom prst="rect">
-            <a:avLst/>
-          </a:prstGeom>
-        </p:spPr>
-      </p:pic>
-      <p:sp>
-        <p:nvSpPr>
-          <p:cNvPr id="23" name="Rectangle 22"/>
-          <p:cNvSpPr/>
-          <p:nvPr/>
-        </p:nvSpPr>
-        <p:spPr>
-          <a:xfrm>
-            <a:off x="777240" y="3310128"/>
-            <a:ext cx="987551" cy="274320"/>
-          </a:xfrm>
-          <a:prstGeom prst="rect">
-            <a:avLst/>
-          </a:prstGeom>
-          <a:solidFill>
-            <a:srgbClr val="253439"/>
-          </a:solidFill>
-          <a:ln>
-            <a:noFill/>
-          </a:ln>
-          <a:effectLst/>
-        </p:spPr>
-        <p:style>
-          <a:lnRef idx="1">
-            <a:schemeClr val="accent1"/>
-          </a:lnRef>
-          <a:fillRef idx="3">
-            <a:schemeClr val="accent1"/>
-          </a:fillRef>
-          <a:effectRef idx="2">
-            <a:schemeClr val="accent1"/>
-          </a:effectRef>
-          <a:fontRef idx="minor">
-            <a:schemeClr val="lt1"/>
-          </a:fontRef>
-        </p:style>
-        <p:txBody>
-          <a:bodyPr rtlCol="0" anchor="ctr" lIns="36576" rIns="36576" tIns="0" bIns="0" wrap="none"/>
-          <a:lstStyle/>
-          <a:p>
-            <a:pPr algn="ctr"/>
-            <a:r>
-              <a:rPr sz="900">
-                <a:solidFill>
-                  <a:srgbClr val="FFFFFF"/>
-                </a:solidFill>
-                <a:latin typeface="Segoe UI Semibold"/>
-              </a:rPr>
-              <a:t>PETG — S30</a:t>
-            </a:r>
-          </a:p>
-        </p:txBody>
-      </p:sp>
-      <p:sp>
-        <p:nvSpPr>
-          <p:cNvPr id="24" name="TextBox 23"/>
-          <p:cNvSpPr txBox="1"/>
-          <p:nvPr/>
-        </p:nvSpPr>
-        <p:spPr>
-          <a:xfrm>
-            <a:off x="9464040" y="3534156"/>
-            <a:ext cx="2377440" cy="365760"/>
-          </a:xfrm>
-          <a:prstGeom prst="rect">
-            <a:avLst/>
-          </a:prstGeom>
-          <a:noFill/>
-        </p:spPr>
-        <p:txBody>
-          <a:bodyPr wrap="square" anchor="t" lIns="0" rIns="0" tIns="0" bIns="0">
-            <a:spAutoFit/>
-          </a:bodyPr>
-          <a:lstStyle/>
-          <a:p>
-            <a:pPr algn="l">
-              <a:lnSpc>
-                <a:spcPct val="100000"/>
-              </a:lnSpc>
-            </a:pPr>
-            <a:r>
-              <a:rPr sz="1500" b="0" i="0">
-                <a:solidFill>
-                  <a:srgbClr val="253439"/>
-                </a:solidFill>
-                <a:latin typeface="Segoe UI Semibold"/>
-              </a:rPr>
-              <a:t>PETG</a:t>
-            </a:r>
-          </a:p>
-        </p:txBody>
-      </p:sp>
-      <p:sp>
-        <p:nvSpPr>
-          <p:cNvPr id="25" name="TextBox 24"/>
-          <p:cNvSpPr txBox="1"/>
-          <p:nvPr/>
-        </p:nvSpPr>
-        <p:spPr>
-          <a:xfrm>
-            <a:off x="9464040" y="3845052"/>
-            <a:ext cx="2377440" cy="822960"/>
-          </a:xfrm>
-          <a:prstGeom prst="rect">
-            <a:avLst/>
-          </a:prstGeom>
-          <a:noFill/>
-        </p:spPr>
-        <p:txBody>
-          <a:bodyPr wrap="square" anchor="t" lIns="0" rIns="0" tIns="0" bIns="0">
-            <a:spAutoFit/>
-          </a:bodyPr>
-          <a:lstStyle/>
-          <a:p>
-            <a:pPr algn="l">
-              <a:lnSpc>
-                <a:spcPct val="100000"/>
-              </a:lnSpc>
-            </a:pPr>
-            <a:r>
-              <a:rPr sz="950" b="0" i="0">
-                <a:solidFill>
-                  <a:srgbClr val="7C898B"/>
-                </a:solidFill>
-                <a:latin typeface="Segoe UI"/>
-              </a:rPr>
-              <a:t>glossier, more ductile · ~8 % at fracture</a:t>
-            </a:r>
-          </a:p>
-        </p:txBody>
-      </p:sp>
-      <p:sp>
-        <p:nvSpPr>
-          <p:cNvPr id="26" name="Rectangle 25"/>
-          <p:cNvSpPr/>
-          <p:nvPr/>
-        </p:nvSpPr>
-        <p:spPr>
-          <a:xfrm>
-            <a:off x="777240" y="4818888"/>
-            <a:ext cx="8549640" cy="1408176"/>
-          </a:xfrm>
-          <a:prstGeom prst="rect">
-            <a:avLst/>
-          </a:prstGeom>
-          <a:solidFill>
-            <a:srgbClr val="FFFFFF"/>
-          </a:solidFill>
-          <a:ln w="12700">
-            <a:solidFill>
-              <a:srgbClr val="DEDAD2"/>
-            </a:solidFill>
-          </a:ln>
-          <a:effectLst/>
-        </p:spPr>
-        <p:style>
-          <a:lnRef idx="1">
-            <a:schemeClr val="accent1"/>
-          </a:lnRef>
-          <a:fillRef idx="3">
-            <a:schemeClr val="accent1"/>
-          </a:fillRef>
-          <a:effectRef idx="2">
-            <a:schemeClr val="accent1"/>
-          </a:effectRef>
-          <a:fontRef idx="minor">
-            <a:schemeClr val="lt1"/>
-          </a:fontRef>
-        </p:style>
-        <p:txBody>
-          <a:bodyPr rtlCol="0" anchor="ctr"/>
-          <a:lstStyle/>
-          <a:p>
-            <a:pPr algn="ctr"/>
+            <a:endParaRPr/>
           </a:p>
         </p:txBody>
       </p:sp>
@@ -28363,10 +29518,10 @@
             <a:picLocks noChangeAspect="1"/>
           </p:cNvPicPr>
           <p:nvPr>
-            <a:videoFile r:link="rId10"/>
+            <a:videoFile r:link="rId6"/>
             <p:extLst>
               <p:ext uri="{DAA4B4D4-6D71-4841-9C94-3DE7FCFB9230}">
-                <p14:media xmlns:p14="http://schemas.microsoft.com/office/powerpoint/2010/main" r:embed="rId9"/>
+                <p14:media xmlns:p14="http://schemas.microsoft.com/office/powerpoint/2010/main" r:embed="rId5"/>
               </p:ext>
             </p:extLst>
           </p:nvPr>
@@ -28424,7 +29579,7 @@
           </a:fontRef>
         </p:style>
         <p:txBody>
-          <a:bodyPr rtlCol="0" anchor="ctr" lIns="36576" rIns="36576" tIns="0" bIns="0" wrap="none"/>
+          <a:bodyPr wrap="none" lIns="36576" tIns="0" rIns="36576" bIns="0" rtlCol="0" anchor="ctr"/>
           <a:lstStyle/>
           <a:p>
             <a:pPr algn="ctr"/>
@@ -28457,7 +29612,7 @@
           <a:noFill/>
         </p:spPr>
         <p:txBody>
-          <a:bodyPr wrap="square" anchor="t" lIns="0" rIns="0" tIns="0" bIns="0">
+          <a:bodyPr wrap="square" lIns="0" tIns="0" rIns="0" bIns="0" anchor="t">
             <a:spAutoFit/>
           </a:bodyPr>
           <a:lstStyle/>
@@ -28496,7 +29651,7 @@
           <a:noFill/>
         </p:spPr>
         <p:txBody>
-          <a:bodyPr wrap="square" anchor="t" lIns="0" rIns="0" tIns="0" bIns="0">
+          <a:bodyPr wrap="square" lIns="0" tIns="0" rIns="0" bIns="0" anchor="t">
             <a:spAutoFit/>
           </a:bodyPr>
           <a:lstStyle/>
@@ -28535,7 +29690,7 @@
           <a:noFill/>
         </p:spPr>
         <p:txBody>
-          <a:bodyPr wrap="square" anchor="t" lIns="0" rIns="0" tIns="0" bIns="0">
+          <a:bodyPr wrap="square" lIns="0" tIns="0" rIns="0" bIns="0" anchor="t">
             <a:spAutoFit/>
           </a:bodyPr>
           <a:lstStyle/>
@@ -28612,7 +29767,7 @@
 </file>
 
 <file path=ppt/slides/slide8.xml><?xml version="1.0" encoding="utf-8"?>
-<p:sld xmlns:a="http://schemas.openxmlformats.org/drawingml/2006/main" xmlns:p="http://schemas.openxmlformats.org/presentationml/2006/main" xmlns:r="http://schemas.openxmlformats.org/officeDocument/2006/relationships">
+<p:sld xmlns:a="http://schemas.openxmlformats.org/drawingml/2006/main" xmlns:r="http://schemas.openxmlformats.org/officeDocument/2006/relationships" xmlns:p="http://schemas.openxmlformats.org/presentationml/2006/main">
   <p:cSld>
     <p:spTree>
       <p:nvGrpSpPr>
@@ -28620,7 +29775,14 @@
         <p:cNvGrpSpPr/>
         <p:nvPr/>
       </p:nvGrpSpPr>
-      <p:grpSpPr/>
+      <p:grpSpPr>
+        <a:xfrm>
+          <a:off x="0" y="0"/>
+          <a:ext cx="0" cy="0"/>
+          <a:chOff x="0" y="0"/>
+          <a:chExt cx="0" cy="0"/>
+        </a:xfrm>
+      </p:grpSpPr>
       <p:sp>
         <p:nvSpPr>
           <p:cNvPr id="2" name="Rectangle 1"/>
@@ -28662,6 +29824,7 @@
           <a:lstStyle/>
           <a:p>
             <a:pPr algn="ctr"/>
+            <a:endParaRPr/>
           </a:p>
         </p:txBody>
       </p:sp>
@@ -28706,6 +29869,7 @@
           <a:lstStyle/>
           <a:p>
             <a:pPr algn="ctr"/>
+            <a:endParaRPr/>
           </a:p>
         </p:txBody>
       </p:sp>
@@ -28750,6 +29914,7 @@
           <a:lstStyle/>
           <a:p>
             <a:pPr algn="ctr"/>
+            <a:endParaRPr/>
           </a:p>
         </p:txBody>
       </p:sp>
@@ -28818,6 +29983,7 @@
           <a:lstStyle/>
           <a:p>
             <a:pPr algn="ctr"/>
+            <a:endParaRPr/>
           </a:p>
         </p:txBody>
       </p:sp>
@@ -28862,6 +30028,7 @@
           <a:lstStyle/>
           <a:p>
             <a:pPr algn="ctr"/>
+            <a:endParaRPr/>
           </a:p>
         </p:txBody>
       </p:sp>
@@ -28906,6 +30073,7 @@
           <a:lstStyle/>
           <a:p>
             <a:pPr algn="ctr"/>
+            <a:endParaRPr/>
           </a:p>
         </p:txBody>
       </p:sp>
@@ -28926,7 +30094,7 @@
           <a:noFill/>
         </p:spPr>
         <p:txBody>
-          <a:bodyPr wrap="square" anchor="t" lIns="0" rIns="0" tIns="0" bIns="0">
+          <a:bodyPr wrap="square" lIns="0" tIns="0" rIns="0" bIns="0" anchor="t">
             <a:spAutoFit/>
           </a:bodyPr>
           <a:lstStyle/>
@@ -28965,7 +30133,7 @@
           <a:noFill/>
         </p:spPr>
         <p:txBody>
-          <a:bodyPr wrap="square" anchor="t" lIns="0" rIns="0" tIns="0" bIns="0">
+          <a:bodyPr wrap="square" lIns="0" tIns="0" rIns="0" bIns="0" anchor="t">
             <a:spAutoFit/>
           </a:bodyPr>
           <a:lstStyle/>
@@ -29028,6 +30196,7 @@
           <a:lstStyle/>
           <a:p>
             <a:pPr algn="ctr"/>
+            <a:endParaRPr/>
           </a:p>
         </p:txBody>
       </p:sp>
@@ -29072,6 +30241,7 @@
           <a:lstStyle/>
           <a:p>
             <a:pPr algn="ctr"/>
+            <a:endParaRPr/>
           </a:p>
         </p:txBody>
       </p:sp>
@@ -29116,6 +30286,7 @@
           <a:lstStyle/>
           <a:p>
             <a:pPr algn="ctr"/>
+            <a:endParaRPr/>
           </a:p>
         </p:txBody>
       </p:sp>
@@ -29136,7 +30307,7 @@
           <a:noFill/>
         </p:spPr>
         <p:txBody>
-          <a:bodyPr wrap="none" anchor="t" lIns="0" rIns="0" tIns="0" bIns="0">
+          <a:bodyPr wrap="none" lIns="0" tIns="0" rIns="0" bIns="0" anchor="t">
             <a:spAutoFit/>
           </a:bodyPr>
           <a:lstStyle/>
@@ -29175,7 +30346,7 @@
           <a:noFill/>
         </p:spPr>
         <p:txBody>
-          <a:bodyPr wrap="square" anchor="t" lIns="0" rIns="0" tIns="0" bIns="0">
+          <a:bodyPr wrap="square" lIns="0" tIns="0" rIns="0" bIns="0" anchor="t">
             <a:spAutoFit/>
           </a:bodyPr>
           <a:lstStyle/>
@@ -29241,6 +30412,7 @@
           <a:lstStyle/>
           <a:p>
             <a:pPr algn="ctr"/>
+            <a:endParaRPr/>
           </a:p>
         </p:txBody>
       </p:sp>
@@ -29261,7 +30433,7 @@
           <a:noFill/>
         </p:spPr>
         <p:txBody>
-          <a:bodyPr wrap="square" anchor="t" lIns="0" rIns="0" tIns="0" bIns="0">
+          <a:bodyPr wrap="square" lIns="0" tIns="0" rIns="0" bIns="0" anchor="t">
             <a:spAutoFit/>
           </a:bodyPr>
           <a:lstStyle/>
@@ -29300,7 +30472,7 @@
           <a:noFill/>
         </p:spPr>
         <p:txBody>
-          <a:bodyPr wrap="square" anchor="t" lIns="0" rIns="0" tIns="0" bIns="0">
+          <a:bodyPr wrap="square" lIns="0" tIns="0" rIns="0" bIns="0" anchor="t">
             <a:spAutoFit/>
           </a:bodyPr>
           <a:lstStyle/>
@@ -29339,7 +30511,7 @@
           <a:noFill/>
         </p:spPr>
         <p:txBody>
-          <a:bodyPr wrap="square" anchor="t" lIns="0" rIns="0" tIns="0" bIns="0">
+          <a:bodyPr wrap="square" lIns="0" tIns="0" rIns="0" bIns="0" anchor="t">
             <a:spAutoFit/>
           </a:bodyPr>
           <a:lstStyle/>
@@ -29378,7 +30550,7 @@
           <a:noFill/>
         </p:spPr>
         <p:txBody>
-          <a:bodyPr wrap="square" anchor="t" lIns="0" rIns="0" tIns="0" bIns="0">
+          <a:bodyPr wrap="square" lIns="0" tIns="0" rIns="0" bIns="0" anchor="t">
             <a:spAutoFit/>
           </a:bodyPr>
           <a:lstStyle/>
@@ -29485,7 +30657,7 @@
           <a:noFill/>
         </p:spPr>
         <p:txBody>
-          <a:bodyPr wrap="square" anchor="t" lIns="0" rIns="0" tIns="0" bIns="0">
+          <a:bodyPr wrap="square" lIns="0" tIns="0" rIns="0" bIns="0" anchor="t">
             <a:spAutoFit/>
           </a:bodyPr>
           <a:lstStyle/>
@@ -29544,7 +30716,7 @@
           </a:fontRef>
         </p:style>
         <p:txBody>
-          <a:bodyPr rtlCol="0" anchor="ctr" lIns="36576" rIns="36576" tIns="0" bIns="0" wrap="none"/>
+          <a:bodyPr wrap="none" lIns="36576" tIns="0" rIns="36576" bIns="0" rtlCol="0" anchor="ctr"/>
           <a:lstStyle/>
           <a:p>
             <a:pPr algn="ctr"/>
@@ -29597,7 +30769,7 @@
           </a:fontRef>
         </p:style>
         <p:txBody>
-          <a:bodyPr rtlCol="0" anchor="ctr" lIns="36576" rIns="36576" tIns="0" bIns="0" wrap="none"/>
+          <a:bodyPr wrap="none" lIns="36576" tIns="0" rIns="36576" bIns="0" rtlCol="0" anchor="ctr"/>
           <a:lstStyle/>
           <a:p>
             <a:pPr algn="ctr"/>
@@ -29650,7 +30822,7 @@
           </a:fontRef>
         </p:style>
         <p:txBody>
-          <a:bodyPr rtlCol="0" anchor="ctr" lIns="36576" rIns="36576" tIns="0" bIns="0" wrap="none"/>
+          <a:bodyPr wrap="none" lIns="36576" tIns="0" rIns="36576" bIns="0" rtlCol="0" anchor="ctr"/>
           <a:lstStyle/>
           <a:p>
             <a:pPr algn="ctr"/>
@@ -29683,7 +30855,7 @@
           <a:noFill/>
         </p:spPr>
         <p:txBody>
-          <a:bodyPr wrap="square" anchor="t" lIns="0" rIns="0" tIns="0" bIns="0">
+          <a:bodyPr wrap="square" lIns="0" tIns="0" rIns="0" bIns="0" anchor="t">
             <a:spAutoFit/>
           </a:bodyPr>
           <a:lstStyle/>
@@ -29754,7 +30926,7 @@
 </file>
 
 <file path=ppt/slides/slide9.xml><?xml version="1.0" encoding="utf-8"?>
-<p:sld xmlns:a="http://schemas.openxmlformats.org/drawingml/2006/main" xmlns:p="http://schemas.openxmlformats.org/presentationml/2006/main" xmlns:r="http://schemas.openxmlformats.org/officeDocument/2006/relationships">
+<p:sld xmlns:a="http://schemas.openxmlformats.org/drawingml/2006/main" xmlns:r="http://schemas.openxmlformats.org/officeDocument/2006/relationships" xmlns:p="http://schemas.openxmlformats.org/presentationml/2006/main">
   <p:cSld>
     <p:spTree>
       <p:nvGrpSpPr>
@@ -29762,7 +30934,14 @@
         <p:cNvGrpSpPr/>
         <p:nvPr/>
       </p:nvGrpSpPr>
-      <p:grpSpPr/>
+      <p:grpSpPr>
+        <a:xfrm>
+          <a:off x="0" y="0"/>
+          <a:ext cx="0" cy="0"/>
+          <a:chOff x="0" y="0"/>
+          <a:chExt cx="0" cy="0"/>
+        </a:xfrm>
+      </p:grpSpPr>
       <p:sp>
         <p:nvSpPr>
           <p:cNvPr id="2" name="Rectangle 1"/>
@@ -29804,6 +30983,7 @@
           <a:lstStyle/>
           <a:p>
             <a:pPr algn="ctr"/>
+            <a:endParaRPr/>
           </a:p>
         </p:txBody>
       </p:sp>
@@ -29848,6 +31028,7 @@
           <a:lstStyle/>
           <a:p>
             <a:pPr algn="ctr"/>
+            <a:endParaRPr/>
           </a:p>
         </p:txBody>
       </p:sp>
@@ -29892,6 +31073,7 @@
           <a:lstStyle/>
           <a:p>
             <a:pPr algn="ctr"/>
+            <a:endParaRPr/>
           </a:p>
         </p:txBody>
       </p:sp>
@@ -29960,6 +31142,7 @@
           <a:lstStyle/>
           <a:p>
             <a:pPr algn="ctr"/>
+            <a:endParaRPr/>
           </a:p>
         </p:txBody>
       </p:sp>
@@ -30004,6 +31187,7 @@
           <a:lstStyle/>
           <a:p>
             <a:pPr algn="ctr"/>
+            <a:endParaRPr/>
           </a:p>
         </p:txBody>
       </p:sp>
@@ -30048,6 +31232,7 @@
           <a:lstStyle/>
           <a:p>
             <a:pPr algn="ctr"/>
+            <a:endParaRPr/>
           </a:p>
         </p:txBody>
       </p:sp>
@@ -30068,7 +31253,7 @@
           <a:noFill/>
         </p:spPr>
         <p:txBody>
-          <a:bodyPr wrap="square" anchor="t" lIns="0" rIns="0" tIns="0" bIns="0">
+          <a:bodyPr wrap="square" lIns="0" tIns="0" rIns="0" bIns="0" anchor="t">
             <a:spAutoFit/>
           </a:bodyPr>
           <a:lstStyle/>
@@ -30107,7 +31292,7 @@
           <a:noFill/>
         </p:spPr>
         <p:txBody>
-          <a:bodyPr wrap="square" anchor="t" lIns="0" rIns="0" tIns="0" bIns="0">
+          <a:bodyPr wrap="square" lIns="0" tIns="0" rIns="0" bIns="0" anchor="t">
             <a:spAutoFit/>
           </a:bodyPr>
           <a:lstStyle/>
@@ -30170,6 +31355,7 @@
           <a:lstStyle/>
           <a:p>
             <a:pPr algn="ctr"/>
+            <a:endParaRPr/>
           </a:p>
         </p:txBody>
       </p:sp>
@@ -30214,6 +31400,7 @@
           <a:lstStyle/>
           <a:p>
             <a:pPr algn="ctr"/>
+            <a:endParaRPr/>
           </a:p>
         </p:txBody>
       </p:sp>
@@ -30258,6 +31445,7 @@
           <a:lstStyle/>
           <a:p>
             <a:pPr algn="ctr"/>
+            <a:endParaRPr/>
           </a:p>
         </p:txBody>
       </p:sp>
@@ -30278,7 +31466,7 @@
           <a:noFill/>
         </p:spPr>
         <p:txBody>
-          <a:bodyPr wrap="none" anchor="t" lIns="0" rIns="0" tIns="0" bIns="0">
+          <a:bodyPr wrap="none" lIns="0" tIns="0" rIns="0" bIns="0" anchor="t">
             <a:spAutoFit/>
           </a:bodyPr>
           <a:lstStyle/>
@@ -30317,7 +31505,7 @@
           <a:noFill/>
         </p:spPr>
         <p:txBody>
-          <a:bodyPr wrap="square" anchor="t" lIns="0" rIns="0" tIns="0" bIns="0">
+          <a:bodyPr wrap="square" lIns="0" tIns="0" rIns="0" bIns="0" anchor="t">
             <a:spAutoFit/>
           </a:bodyPr>
           <a:lstStyle/>
@@ -30382,6 +31570,7 @@
           <a:lstStyle/>
           <a:p>
             <a:pPr algn="ctr"/>
+            <a:endParaRPr/>
           </a:p>
         </p:txBody>
       </p:sp>
@@ -30426,7 +31615,7 @@
           <a:noFill/>
         </p:spPr>
         <p:txBody>
-          <a:bodyPr wrap="square" anchor="t" lIns="0" rIns="0" tIns="0" bIns="0">
+          <a:bodyPr wrap="square" lIns="0" tIns="0" rIns="0" bIns="0" anchor="t">
             <a:spAutoFit/>
           </a:bodyPr>
           <a:lstStyle/>
@@ -30491,6 +31680,7 @@
           <a:lstStyle/>
           <a:p>
             <a:pPr algn="ctr"/>
+            <a:endParaRPr/>
           </a:p>
         </p:txBody>
       </p:sp>
@@ -30511,7 +31701,7 @@
           <a:noFill/>
         </p:spPr>
         <p:txBody>
-          <a:bodyPr wrap="square" anchor="t" lIns="0" rIns="0" tIns="0" bIns="0">
+          <a:bodyPr wrap="square" lIns="0" tIns="0" rIns="0" bIns="0" anchor="t">
             <a:spAutoFit/>
           </a:bodyPr>
           <a:lstStyle/>
@@ -30550,7 +31740,7 @@
           <a:noFill/>
         </p:spPr>
         <p:txBody>
-          <a:bodyPr wrap="square" anchor="t" lIns="0" rIns="0" tIns="0" bIns="0">
+          <a:bodyPr wrap="square" lIns="0" tIns="0" rIns="0" bIns="0" anchor="t">
             <a:spAutoFit/>
           </a:bodyPr>
           <a:lstStyle/>
@@ -30589,7 +31779,7 @@
           <a:noFill/>
         </p:spPr>
         <p:txBody>
-          <a:bodyPr wrap="square" anchor="t" lIns="0" rIns="0" tIns="0" bIns="0">
+          <a:bodyPr wrap="square" lIns="0" tIns="0" rIns="0" bIns="0" anchor="t">
             <a:spAutoFit/>
           </a:bodyPr>
           <a:lstStyle/>
@@ -30654,6 +31844,7 @@
           <a:lstStyle/>
           <a:p>
             <a:pPr algn="ctr"/>
+            <a:endParaRPr/>
           </a:p>
         </p:txBody>
       </p:sp>
@@ -30674,7 +31865,7 @@
           <a:noFill/>
         </p:spPr>
         <p:txBody>
-          <a:bodyPr wrap="square" anchor="t" lIns="0" rIns="0" tIns="0" bIns="0">
+          <a:bodyPr wrap="square" lIns="0" tIns="0" rIns="0" bIns="0" anchor="t">
             <a:spAutoFit/>
           </a:bodyPr>
           <a:lstStyle/>
@@ -30713,7 +31904,7 @@
           <a:noFill/>
         </p:spPr>
         <p:txBody>
-          <a:bodyPr wrap="square" anchor="t" lIns="0" rIns="0" tIns="0" bIns="0">
+          <a:bodyPr wrap="square" lIns="0" tIns="0" rIns="0" bIns="0" anchor="t">
             <a:spAutoFit/>
           </a:bodyPr>
           <a:lstStyle/>
@@ -30752,7 +31943,7 @@
           <a:noFill/>
         </p:spPr>
         <p:txBody>
-          <a:bodyPr wrap="square" anchor="t" lIns="0" rIns="0" tIns="0" bIns="0">
+          <a:bodyPr wrap="square" lIns="0" tIns="0" rIns="0" bIns="0" anchor="t">
             <a:spAutoFit/>
           </a:bodyPr>
           <a:lstStyle/>
@@ -30817,6 +32008,7 @@
           <a:lstStyle/>
           <a:p>
             <a:pPr algn="ctr"/>
+            <a:endParaRPr/>
           </a:p>
         </p:txBody>
       </p:sp>
@@ -30837,7 +32029,7 @@
           <a:noFill/>
         </p:spPr>
         <p:txBody>
-          <a:bodyPr wrap="square" anchor="t" lIns="0" rIns="0" tIns="0" bIns="0">
+          <a:bodyPr wrap="square" lIns="0" tIns="0" rIns="0" bIns="0" anchor="t">
             <a:spAutoFit/>
           </a:bodyPr>
           <a:lstStyle/>
@@ -30876,7 +32068,7 @@
           <a:noFill/>
         </p:spPr>
         <p:txBody>
-          <a:bodyPr wrap="square" anchor="t" lIns="0" rIns="0" tIns="0" bIns="0">
+          <a:bodyPr wrap="square" lIns="0" tIns="0" rIns="0" bIns="0" anchor="t">
             <a:spAutoFit/>
           </a:bodyPr>
           <a:lstStyle/>
@@ -30915,7 +32107,7 @@
           <a:noFill/>
         </p:spPr>
         <p:txBody>
-          <a:bodyPr wrap="square" anchor="t" lIns="0" rIns="0" tIns="0" bIns="0">
+          <a:bodyPr wrap="square" lIns="0" tIns="0" rIns="0" bIns="0" anchor="t">
             <a:spAutoFit/>
           </a:bodyPr>
           <a:lstStyle/>
@@ -30980,6 +32172,7 @@
           <a:lstStyle/>
           <a:p>
             <a:pPr algn="ctr"/>
+            <a:endParaRPr/>
           </a:p>
         </p:txBody>
       </p:sp>
@@ -31000,7 +32193,7 @@
           <a:noFill/>
         </p:spPr>
         <p:txBody>
-          <a:bodyPr wrap="square" anchor="t" lIns="0" rIns="0" tIns="0" bIns="0">
+          <a:bodyPr wrap="square" lIns="0" tIns="0" rIns="0" bIns="0" anchor="t">
             <a:spAutoFit/>
           </a:bodyPr>
           <a:lstStyle/>
@@ -31039,7 +32232,7 @@
           <a:noFill/>
         </p:spPr>
         <p:txBody>
-          <a:bodyPr wrap="square" anchor="t" lIns="0" rIns="0" tIns="0" bIns="0">
+          <a:bodyPr wrap="square" lIns="0" tIns="0" rIns="0" bIns="0" anchor="t">
             <a:spAutoFit/>
           </a:bodyPr>
           <a:lstStyle/>
@@ -31078,7 +32271,7 @@
           <a:noFill/>
         </p:spPr>
         <p:txBody>
-          <a:bodyPr wrap="square" anchor="t" lIns="0" rIns="0" tIns="0" bIns="0">
+          <a:bodyPr wrap="square" lIns="0" tIns="0" rIns="0" bIns="0" anchor="t">
             <a:spAutoFit/>
           </a:bodyPr>
           <a:lstStyle/>
@@ -31117,7 +32310,7 @@
           <a:noFill/>
         </p:spPr>
         <p:txBody>
-          <a:bodyPr wrap="square" anchor="t" lIns="0" rIns="0" tIns="0" bIns="0">
+          <a:bodyPr wrap="square" lIns="0" tIns="0" rIns="0" bIns="0" anchor="t">
             <a:spAutoFit/>
           </a:bodyPr>
           <a:lstStyle/>
@@ -31533,4 +32726,319 @@
   </a:objectDefaults>
   <a:extraClrSchemeLst/>
 </a:theme>
+</file>
+
+<file path=ppt/theme/theme2.xml><?xml version="1.0" encoding="utf-8"?>
+<a:theme xmlns:a="http://schemas.openxmlformats.org/drawingml/2006/main" name="Office Theme">
+  <a:themeElements>
+    <a:clrScheme name="Office">
+      <a:dk1>
+        <a:sysClr val="windowText" lastClr="000000"/>
+      </a:dk1>
+      <a:lt1>
+        <a:sysClr val="window" lastClr="FFFFFF"/>
+      </a:lt1>
+      <a:dk2>
+        <a:srgbClr val="0E2841"/>
+      </a:dk2>
+      <a:lt2>
+        <a:srgbClr val="E8E8E8"/>
+      </a:lt2>
+      <a:accent1>
+        <a:srgbClr val="156082"/>
+      </a:accent1>
+      <a:accent2>
+        <a:srgbClr val="E97132"/>
+      </a:accent2>
+      <a:accent3>
+        <a:srgbClr val="196B24"/>
+      </a:accent3>
+      <a:accent4>
+        <a:srgbClr val="0F9ED5"/>
+      </a:accent4>
+      <a:accent5>
+        <a:srgbClr val="A02B93"/>
+      </a:accent5>
+      <a:accent6>
+        <a:srgbClr val="4EA72E"/>
+      </a:accent6>
+      <a:hlink>
+        <a:srgbClr val="467886"/>
+      </a:hlink>
+      <a:folHlink>
+        <a:srgbClr val="96607D"/>
+      </a:folHlink>
+    </a:clrScheme>
+    <a:fontScheme name="Office">
+      <a:majorFont>
+        <a:latin typeface="Aptos Display" panose="02110004020202020204"/>
+        <a:ea typeface=""/>
+        <a:cs typeface=""/>
+        <a:font script="Jpan" typeface="游ゴシック Light"/>
+        <a:font script="Hang" typeface="맑은 고딕"/>
+        <a:font script="Hans" typeface="等线 Light"/>
+        <a:font script="Hant" typeface="新細明體"/>
+        <a:font script="Arab" typeface="Times New Roman"/>
+        <a:font script="Hebr" typeface="Times New Roman"/>
+        <a:font script="Thai" typeface="Angsana New"/>
+        <a:font script="Ethi" typeface="Nyala"/>
+        <a:font script="Beng" typeface="Vrinda"/>
+        <a:font script="Gujr" typeface="Shruti"/>
+        <a:font script="Khmr" typeface="MoolBoran"/>
+        <a:font script="Knda" typeface="Tunga"/>
+        <a:font script="Guru" typeface="Raavi"/>
+        <a:font script="Cans" typeface="Euphemia"/>
+        <a:font script="Cher" typeface="Plantagenet Cherokee"/>
+        <a:font script="Yiii" typeface="Microsoft Yi Baiti"/>
+        <a:font script="Tibt" typeface="Microsoft Himalaya"/>
+        <a:font script="Thaa" typeface="MV Boli"/>
+        <a:font script="Deva" typeface="Mangal"/>
+        <a:font script="Telu" typeface="Gautami"/>
+        <a:font script="Taml" typeface="Latha"/>
+        <a:font script="Syrc" typeface="Estrangelo Edessa"/>
+        <a:font script="Orya" typeface="Kalinga"/>
+        <a:font script="Mlym" typeface="Kartika"/>
+        <a:font script="Laoo" typeface="DokChampa"/>
+        <a:font script="Sinh" typeface="Iskoola Pota"/>
+        <a:font script="Mong" typeface="Mongolian Baiti"/>
+        <a:font script="Viet" typeface="Times New Roman"/>
+        <a:font script="Uigh" typeface="Microsoft Uighur"/>
+        <a:font script="Geor" typeface="Sylfaen"/>
+        <a:font script="Armn" typeface="Arial"/>
+        <a:font script="Bugi" typeface="Leelawadee UI"/>
+        <a:font script="Bopo" typeface="Microsoft JhengHei"/>
+        <a:font script="Java" typeface="Javanese Text"/>
+        <a:font script="Lisu" typeface="Segoe UI"/>
+        <a:font script="Mymr" typeface="Myanmar Text"/>
+        <a:font script="Nkoo" typeface="Ebrima"/>
+        <a:font script="Olck" typeface="Nirmala UI"/>
+        <a:font script="Osma" typeface="Ebrima"/>
+        <a:font script="Phag" typeface="Phagspa"/>
+        <a:font script="Syrn" typeface="Estrangelo Edessa"/>
+        <a:font script="Syrj" typeface="Estrangelo Edessa"/>
+        <a:font script="Syre" typeface="Estrangelo Edessa"/>
+        <a:font script="Sora" typeface="Nirmala UI"/>
+        <a:font script="Tale" typeface="Microsoft Tai Le"/>
+        <a:font script="Talu" typeface="Microsoft New Tai Lue"/>
+        <a:font script="Tfng" typeface="Ebrima"/>
+      </a:majorFont>
+      <a:minorFont>
+        <a:latin typeface="Aptos" panose="02110004020202020204"/>
+        <a:ea typeface=""/>
+        <a:cs typeface=""/>
+        <a:font script="Jpan" typeface="游ゴシック"/>
+        <a:font script="Hang" typeface="맑은 고딕"/>
+        <a:font script="Hans" typeface="等线"/>
+        <a:font script="Hant" typeface="新細明體"/>
+        <a:font script="Arab" typeface="Arial"/>
+        <a:font script="Hebr" typeface="Arial"/>
+        <a:font script="Thai" typeface="Cordia New"/>
+        <a:font script="Ethi" typeface="Nyala"/>
+        <a:font script="Beng" typeface="Vrinda"/>
+        <a:font script="Gujr" typeface="Shruti"/>
+        <a:font script="Khmr" typeface="DaunPenh"/>
+        <a:font script="Knda" typeface="Tunga"/>
+        <a:font script="Guru" typeface="Raavi"/>
+        <a:font script="Cans" typeface="Euphemia"/>
+        <a:font script="Cher" typeface="Plantagenet Cherokee"/>
+        <a:font script="Yiii" typeface="Microsoft Yi Baiti"/>
+        <a:font script="Tibt" typeface="Microsoft Himalaya"/>
+        <a:font script="Thaa" typeface="MV Boli"/>
+        <a:font script="Deva" typeface="Mangal"/>
+        <a:font script="Telu" typeface="Gautami"/>
+        <a:font script="Taml" typeface="Latha"/>
+        <a:font script="Syrc" typeface="Estrangelo Edessa"/>
+        <a:font script="Orya" typeface="Kalinga"/>
+        <a:font script="Mlym" typeface="Kartika"/>
+        <a:font script="Laoo" typeface="DokChampa"/>
+        <a:font script="Sinh" typeface="Iskoola Pota"/>
+        <a:font script="Mong" typeface="Mongolian Baiti"/>
+        <a:font script="Viet" typeface="Arial"/>
+        <a:font script="Uigh" typeface="Microsoft Uighur"/>
+        <a:font script="Geor" typeface="Sylfaen"/>
+        <a:font script="Armn" typeface="Arial"/>
+        <a:font script="Bugi" typeface="Leelawadee UI"/>
+        <a:font script="Bopo" typeface="Microsoft JhengHei"/>
+        <a:font script="Java" typeface="Javanese Text"/>
+        <a:font script="Lisu" typeface="Segoe UI"/>
+        <a:font script="Mymr" typeface="Myanmar Text"/>
+        <a:font script="Nkoo" typeface="Ebrima"/>
+        <a:font script="Olck" typeface="Nirmala UI"/>
+        <a:font script="Osma" typeface="Ebrima"/>
+        <a:font script="Phag" typeface="Phagspa"/>
+        <a:font script="Syrn" typeface="Estrangelo Edessa"/>
+        <a:font script="Syrj" typeface="Estrangelo Edessa"/>
+        <a:font script="Syre" typeface="Estrangelo Edessa"/>
+        <a:font script="Sora" typeface="Nirmala UI"/>
+        <a:font script="Tale" typeface="Microsoft Tai Le"/>
+        <a:font script="Talu" typeface="Microsoft New Tai Lue"/>
+        <a:font script="Tfng" typeface="Ebrima"/>
+      </a:minorFont>
+    </a:fontScheme>
+    <a:fmtScheme name="Office">
+      <a:fillStyleLst>
+        <a:solidFill>
+          <a:schemeClr val="phClr"/>
+        </a:solidFill>
+        <a:gradFill rotWithShape="1">
+          <a:gsLst>
+            <a:gs pos="0">
+              <a:schemeClr val="phClr">
+                <a:lumMod val="110000"/>
+                <a:satMod val="105000"/>
+                <a:tint val="67000"/>
+              </a:schemeClr>
+            </a:gs>
+            <a:gs pos="50000">
+              <a:schemeClr val="phClr">
+                <a:lumMod val="105000"/>
+                <a:satMod val="103000"/>
+                <a:tint val="73000"/>
+              </a:schemeClr>
+            </a:gs>
+            <a:gs pos="100000">
+              <a:schemeClr val="phClr">
+                <a:lumMod val="105000"/>
+                <a:satMod val="109000"/>
+                <a:tint val="81000"/>
+              </a:schemeClr>
+            </a:gs>
+          </a:gsLst>
+          <a:lin ang="5400000" scaled="0"/>
+        </a:gradFill>
+        <a:gradFill rotWithShape="1">
+          <a:gsLst>
+            <a:gs pos="0">
+              <a:schemeClr val="phClr">
+                <a:satMod val="103000"/>
+                <a:lumMod val="102000"/>
+                <a:tint val="94000"/>
+              </a:schemeClr>
+            </a:gs>
+            <a:gs pos="50000">
+              <a:schemeClr val="phClr">
+                <a:satMod val="110000"/>
+                <a:lumMod val="100000"/>
+                <a:shade val="100000"/>
+              </a:schemeClr>
+            </a:gs>
+            <a:gs pos="100000">
+              <a:schemeClr val="phClr">
+                <a:lumMod val="99000"/>
+                <a:satMod val="120000"/>
+                <a:shade val="78000"/>
+              </a:schemeClr>
+            </a:gs>
+          </a:gsLst>
+          <a:lin ang="5400000" scaled="0"/>
+        </a:gradFill>
+      </a:fillStyleLst>
+      <a:lnStyleLst>
+        <a:ln w="12700" cap="flat" cmpd="sng" algn="ctr">
+          <a:solidFill>
+            <a:schemeClr val="phClr"/>
+          </a:solidFill>
+          <a:prstDash val="solid"/>
+          <a:miter lim="800000"/>
+        </a:ln>
+        <a:ln w="19050" cap="flat" cmpd="sng" algn="ctr">
+          <a:solidFill>
+            <a:schemeClr val="phClr"/>
+          </a:solidFill>
+          <a:prstDash val="solid"/>
+          <a:miter lim="800000"/>
+        </a:ln>
+        <a:ln w="25400" cap="flat" cmpd="sng" algn="ctr">
+          <a:solidFill>
+            <a:schemeClr val="phClr"/>
+          </a:solidFill>
+          <a:prstDash val="solid"/>
+          <a:miter lim="800000"/>
+        </a:ln>
+      </a:lnStyleLst>
+      <a:effectStyleLst>
+        <a:effectStyle>
+          <a:effectLst/>
+        </a:effectStyle>
+        <a:effectStyle>
+          <a:effectLst/>
+        </a:effectStyle>
+        <a:effectStyle>
+          <a:effectLst>
+            <a:outerShdw blurRad="57150" dist="19050" dir="5400000" algn="ctr" rotWithShape="0">
+              <a:srgbClr val="000000">
+                <a:alpha val="63000"/>
+              </a:srgbClr>
+            </a:outerShdw>
+          </a:effectLst>
+        </a:effectStyle>
+      </a:effectStyleLst>
+      <a:bgFillStyleLst>
+        <a:solidFill>
+          <a:schemeClr val="phClr"/>
+        </a:solidFill>
+        <a:solidFill>
+          <a:schemeClr val="phClr">
+            <a:tint val="95000"/>
+            <a:satMod val="170000"/>
+          </a:schemeClr>
+        </a:solidFill>
+        <a:gradFill rotWithShape="1">
+          <a:gsLst>
+            <a:gs pos="0">
+              <a:schemeClr val="phClr">
+                <a:tint val="93000"/>
+                <a:satMod val="150000"/>
+                <a:shade val="98000"/>
+                <a:lumMod val="102000"/>
+              </a:schemeClr>
+            </a:gs>
+            <a:gs pos="50000">
+              <a:schemeClr val="phClr">
+                <a:tint val="98000"/>
+                <a:satMod val="130000"/>
+                <a:shade val="90000"/>
+                <a:lumMod val="103000"/>
+              </a:schemeClr>
+            </a:gs>
+            <a:gs pos="100000">
+              <a:schemeClr val="phClr">
+                <a:shade val="63000"/>
+                <a:satMod val="120000"/>
+              </a:schemeClr>
+            </a:gs>
+          </a:gsLst>
+          <a:lin ang="5400000" scaled="0"/>
+        </a:gradFill>
+      </a:bgFillStyleLst>
+    </a:fmtScheme>
+  </a:themeElements>
+  <a:objectDefaults>
+    <a:lnDef>
+      <a:spPr/>
+      <a:bodyPr/>
+      <a:lstStyle/>
+      <a:style>
+        <a:lnRef idx="2">
+          <a:schemeClr val="accent1"/>
+        </a:lnRef>
+        <a:fillRef idx="0">
+          <a:schemeClr val="accent1"/>
+        </a:fillRef>
+        <a:effectRef idx="1">
+          <a:schemeClr val="accent1"/>
+        </a:effectRef>
+        <a:fontRef idx="minor">
+          <a:schemeClr val="tx1"/>
+        </a:fontRef>
+      </a:style>
+    </a:lnDef>
+  </a:objectDefaults>
+  <a:extraClrSchemeLst/>
+  <a:extLst>
+    <a:ext uri="{05A4C25C-085E-4340-85A3-A5531E510DB2}">
+      <thm15:themeFamily xmlns:thm15="http://schemas.microsoft.com/office/thememl/2012/main" name="Office Theme" id="{2E142A2C-CD16-42D6-873A-C26D2A0506FA}" vid="{1BDDFF52-6CD6-40A5-AB3C-68EB2F1E4D0A}"/>
+    </a:ext>
+  </a:extLst>
+</a:theme>
 </file>
--- a/documentation/decks/PPD_Final_Presentation.pptx
+++ b/documentation/decks/PPD_Final_Presentation.pptx
@@ -157,7 +157,7 @@
   <pc:docChgLst>
     <pc:chgData name="Adithya Sivakumar" userId="66f9b287-a2d3-4cb5-8dae-29884e733115" providerId="ADAL" clId="{937D3A49-D0E7-486D-BA98-5AD23D3FA812}"/>
     <pc:docChg chg="undo redo custSel addSld delSld modSld modMainMaster">
-      <pc:chgData name="Adithya Sivakumar" userId="66f9b287-a2d3-4cb5-8dae-29884e733115" providerId="ADAL" clId="{937D3A49-D0E7-486D-BA98-5AD23D3FA812}" dt="2026-09-04T17:25:34.983" v="137" actId="22"/>
+      <pc:chgData name="Adithya Sivakumar" userId="66f9b287-a2d3-4cb5-8dae-29884e733115" providerId="ADAL" clId="{937D3A49-D0E7-486D-BA98-5AD23D3FA812}" dt="2026-09-05T12:38:29.965" v="173" actId="1076"/>
       <pc:docMkLst>
         <pc:docMk/>
       </pc:docMkLst>
@@ -383,6 +383,53 @@
           </ac:spMkLst>
         </pc:spChg>
       </pc:sldChg>
+      <pc:sldChg chg="modSp mod">
+        <pc:chgData name="Adithya Sivakumar" userId="66f9b287-a2d3-4cb5-8dae-29884e733115" providerId="ADAL" clId="{937D3A49-D0E7-486D-BA98-5AD23D3FA812}" dt="2026-09-05T12:38:29.965" v="173" actId="1076"/>
+        <pc:sldMkLst>
+          <pc:docMk/>
+          <pc:sldMk cId="0" sldId="258"/>
+        </pc:sldMkLst>
+        <pc:spChg chg="mod">
+          <ac:chgData name="Adithya Sivakumar" userId="66f9b287-a2d3-4cb5-8dae-29884e733115" providerId="ADAL" clId="{937D3A49-D0E7-486D-BA98-5AD23D3FA812}" dt="2026-09-05T11:20:16.156" v="144" actId="14100"/>
+          <ac:spMkLst>
+            <pc:docMk/>
+            <pc:sldMk cId="0" sldId="258"/>
+            <ac:spMk id="16" creationId="{00000000-0000-0000-0000-000000000000}"/>
+          </ac:spMkLst>
+        </pc:spChg>
+        <pc:spChg chg="mod">
+          <ac:chgData name="Adithya Sivakumar" userId="66f9b287-a2d3-4cb5-8dae-29884e733115" providerId="ADAL" clId="{937D3A49-D0E7-486D-BA98-5AD23D3FA812}" dt="2026-09-05T11:19:50.508" v="143" actId="1076"/>
+          <ac:spMkLst>
+            <pc:docMk/>
+            <pc:sldMk cId="0" sldId="258"/>
+            <ac:spMk id="17" creationId="{00000000-0000-0000-0000-000000000000}"/>
+          </ac:spMkLst>
+        </pc:spChg>
+        <pc:spChg chg="mod">
+          <ac:chgData name="Adithya Sivakumar" userId="66f9b287-a2d3-4cb5-8dae-29884e733115" providerId="ADAL" clId="{937D3A49-D0E7-486D-BA98-5AD23D3FA812}" dt="2026-09-05T11:32:34.991" v="153" actId="20577"/>
+          <ac:spMkLst>
+            <pc:docMk/>
+            <pc:sldMk cId="0" sldId="258"/>
+            <ac:spMk id="29" creationId="{00000000-0000-0000-0000-000000000000}"/>
+          </ac:spMkLst>
+        </pc:spChg>
+        <pc:spChg chg="mod">
+          <ac:chgData name="Adithya Sivakumar" userId="66f9b287-a2d3-4cb5-8dae-29884e733115" providerId="ADAL" clId="{937D3A49-D0E7-486D-BA98-5AD23D3FA812}" dt="2026-09-05T11:33:00.493" v="171" actId="20577"/>
+          <ac:spMkLst>
+            <pc:docMk/>
+            <pc:sldMk cId="0" sldId="258"/>
+            <ac:spMk id="30" creationId="{00000000-0000-0000-0000-000000000000}"/>
+          </ac:spMkLst>
+        </pc:spChg>
+        <pc:picChg chg="mod">
+          <ac:chgData name="Adithya Sivakumar" userId="66f9b287-a2d3-4cb5-8dae-29884e733115" providerId="ADAL" clId="{937D3A49-D0E7-486D-BA98-5AD23D3FA812}" dt="2026-09-05T12:38:29.965" v="173" actId="1076"/>
+          <ac:picMkLst>
+            <pc:docMk/>
+            <pc:sldMk cId="0" sldId="258"/>
+            <ac:picMk id="18" creationId="{00000000-0000-0000-0000-000000000000}"/>
+          </ac:picMkLst>
+        </pc:picChg>
+      </pc:sldChg>
       <pc:sldChg chg="new del">
         <pc:chgData name="Adithya Sivakumar" userId="66f9b287-a2d3-4cb5-8dae-29884e733115" providerId="ADAL" clId="{937D3A49-D0E7-486D-BA98-5AD23D3FA812}" dt="2026-09-04T17:18:09.441" v="50" actId="680"/>
         <pc:sldMkLst>
@@ -492,7 +539,7 @@
           <a:p>
             <a:fld id="{9365FE33-248B-418E-80DF-32EE702ADF6F}" type="datetimeFigureOut">
               <a:rPr lang="en-SE" smtClean="0"/>
-              <a:t>2026-09-04</a:t>
+              <a:t>2026-09-05</a:t>
             </a:fld>
             <a:endParaRPr lang="en-SE"/>
           </a:p>
@@ -844,6 +891,90 @@
 </p:notes>
 </file>
 
+<file path=ppt/notesSlides/notesSlide2.xml><?xml version="1.0" encoding="utf-8"?>
+<p:notes xmlns:a="http://schemas.openxmlformats.org/drawingml/2006/main" xmlns:r="http://schemas.openxmlformats.org/officeDocument/2006/relationships" xmlns:p="http://schemas.openxmlformats.org/presentationml/2006/main">
+  <p:cSld>
+    <p:spTree>
+      <p:nvGrpSpPr>
+        <p:cNvPr id="1" name=""/>
+        <p:cNvGrpSpPr/>
+        <p:nvPr/>
+      </p:nvGrpSpPr>
+      <p:grpSpPr>
+        <a:xfrm>
+          <a:off x="0" y="0"/>
+          <a:ext cx="0" cy="0"/>
+          <a:chOff x="0" y="0"/>
+          <a:chExt cx="0" cy="0"/>
+        </a:xfrm>
+      </p:grpSpPr>
+      <p:sp>
+        <p:nvSpPr>
+          <p:cNvPr id="2" name="Slide Image Placeholder 1"/>
+          <p:cNvSpPr>
+            <a:spLocks noGrp="1" noRot="1" noChangeAspect="1"/>
+          </p:cNvSpPr>
+          <p:nvPr>
+            <p:ph type="sldImg"/>
+          </p:nvPr>
+        </p:nvSpPr>
+        <p:spPr/>
+      </p:sp>
+      <p:sp>
+        <p:nvSpPr>
+          <p:cNvPr id="3" name="Notes Placeholder 2"/>
+          <p:cNvSpPr>
+            <a:spLocks noGrp="1"/>
+          </p:cNvSpPr>
+          <p:nvPr>
+            <p:ph type="body" idx="1"/>
+          </p:nvPr>
+        </p:nvSpPr>
+        <p:spPr/>
+        <p:txBody>
+          <a:bodyPr/>
+          <a:lstStyle/>
+          <a:p>
+            <a:endParaRPr lang="en-SE" dirty="0"/>
+          </a:p>
+        </p:txBody>
+      </p:sp>
+      <p:sp>
+        <p:nvSpPr>
+          <p:cNvPr id="4" name="Slide Number Placeholder 3"/>
+          <p:cNvSpPr>
+            <a:spLocks noGrp="1"/>
+          </p:cNvSpPr>
+          <p:nvPr>
+            <p:ph type="sldNum" sz="quarter" idx="5"/>
+          </p:nvPr>
+        </p:nvSpPr>
+        <p:spPr/>
+        <p:txBody>
+          <a:bodyPr/>
+          <a:lstStyle/>
+          <a:p>
+            <a:fld id="{3973D6B5-9C92-4220-B47A-53362BAF60D8}" type="slidenum">
+              <a:rPr lang="en-SE" smtClean="0"/>
+              <a:t>4</a:t>
+            </a:fld>
+            <a:endParaRPr lang="en-SE"/>
+          </a:p>
+        </p:txBody>
+      </p:sp>
+    </p:spTree>
+    <p:extLst>
+      <p:ext uri="{BB962C8B-B14F-4D97-AF65-F5344CB8AC3E}">
+        <p14:creationId xmlns:p14="http://schemas.microsoft.com/office/powerpoint/2010/main" val="1100821083"/>
+      </p:ext>
+    </p:extLst>
+  </p:cSld>
+  <p:clrMapOvr>
+    <a:masterClrMapping/>
+  </p:clrMapOvr>
+</p:notes>
+</file>
+
 <file path=ppt/slideLayouts/slideLayout1.xml><?xml version="1.0" encoding="utf-8"?>
 <p:sldLayout xmlns:a="http://schemas.openxmlformats.org/drawingml/2006/main" xmlns:r="http://schemas.openxmlformats.org/officeDocument/2006/relationships" xmlns:p="http://schemas.openxmlformats.org/presentationml/2006/main" type="title" preserve="1">
   <p:cSld name="Title Slide">
@@ -1023,7 +1154,7 @@
           <a:p>
             <a:fld id="{5BCAD085-E8A6-8845-BD4E-CB4CCA059FC4}" type="datetimeFigureOut">
               <a:rPr lang="en-US" smtClean="0"/>
-              <a:t>9/4/2026</a:t>
+              <a:t>9/5/2026</a:t>
             </a:fld>
             <a:endParaRPr lang="en-US"/>
           </a:p>
@@ -1191,7 +1322,7 @@
           <a:p>
             <a:fld id="{5BCAD085-E8A6-8845-BD4E-CB4CCA059FC4}" type="datetimeFigureOut">
               <a:rPr lang="en-US" smtClean="0"/>
-              <a:t>9/4/2026</a:t>
+              <a:t>9/5/2026</a:t>
             </a:fld>
             <a:endParaRPr lang="en-US"/>
           </a:p>
@@ -1369,7 +1500,7 @@
           <a:p>
             <a:fld id="{5BCAD085-E8A6-8845-BD4E-CB4CCA059FC4}" type="datetimeFigureOut">
               <a:rPr lang="en-US" smtClean="0"/>
-              <a:t>9/4/2026</a:t>
+              <a:t>9/5/2026</a:t>
             </a:fld>
             <a:endParaRPr lang="en-US"/>
           </a:p>
@@ -1537,7 +1668,7 @@
           <a:p>
             <a:fld id="{5BCAD085-E8A6-8845-BD4E-CB4CCA059FC4}" type="datetimeFigureOut">
               <a:rPr lang="en-US" smtClean="0"/>
-              <a:t>9/4/2026</a:t>
+              <a:t>9/5/2026</a:t>
             </a:fld>
             <a:endParaRPr lang="en-US"/>
           </a:p>
@@ -1782,7 +1913,7 @@
           <a:p>
             <a:fld id="{5BCAD085-E8A6-8845-BD4E-CB4CCA059FC4}" type="datetimeFigureOut">
               <a:rPr lang="en-US" smtClean="0"/>
-              <a:t>9/4/2026</a:t>
+              <a:t>9/5/2026</a:t>
             </a:fld>
             <a:endParaRPr lang="en-US"/>
           </a:p>
@@ -2067,7 +2198,7 @@
           <a:p>
             <a:fld id="{5BCAD085-E8A6-8845-BD4E-CB4CCA059FC4}" type="datetimeFigureOut">
               <a:rPr lang="en-US" smtClean="0"/>
-              <a:t>9/4/2026</a:t>
+              <a:t>9/5/2026</a:t>
             </a:fld>
             <a:endParaRPr lang="en-US"/>
           </a:p>
@@ -2486,7 +2617,7 @@
           <a:p>
             <a:fld id="{5BCAD085-E8A6-8845-BD4E-CB4CCA059FC4}" type="datetimeFigureOut">
               <a:rPr lang="en-US" smtClean="0"/>
-              <a:t>9/4/2026</a:t>
+              <a:t>9/5/2026</a:t>
             </a:fld>
             <a:endParaRPr lang="en-US"/>
           </a:p>
@@ -2603,7 +2734,7 @@
           <a:p>
             <a:fld id="{5BCAD085-E8A6-8845-BD4E-CB4CCA059FC4}" type="datetimeFigureOut">
               <a:rPr lang="en-US" smtClean="0"/>
-              <a:t>9/4/2026</a:t>
+              <a:t>9/5/2026</a:t>
             </a:fld>
             <a:endParaRPr lang="en-US"/>
           </a:p>
@@ -2698,7 +2829,7 @@
           <a:p>
             <a:fld id="{5BCAD085-E8A6-8845-BD4E-CB4CCA059FC4}" type="datetimeFigureOut">
               <a:rPr lang="en-US" smtClean="0"/>
-              <a:t>9/4/2026</a:t>
+              <a:t>9/5/2026</a:t>
             </a:fld>
             <a:endParaRPr lang="en-US"/>
           </a:p>
@@ -2973,7 +3104,7 @@
           <a:p>
             <a:fld id="{5BCAD085-E8A6-8845-BD4E-CB4CCA059FC4}" type="datetimeFigureOut">
               <a:rPr lang="en-US" smtClean="0"/>
-              <a:t>9/4/2026</a:t>
+              <a:t>9/5/2026</a:t>
             </a:fld>
             <a:endParaRPr lang="en-US"/>
           </a:p>
@@ -3225,7 +3356,7 @@
           <a:p>
             <a:fld id="{5BCAD085-E8A6-8845-BD4E-CB4CCA059FC4}" type="datetimeFigureOut">
               <a:rPr lang="en-US" smtClean="0"/>
-              <a:t>9/4/2026</a:t>
+              <a:t>9/5/2026</a:t>
             </a:fld>
             <a:endParaRPr lang="en-US"/>
           </a:p>
@@ -3436,7 +3567,7 @@
           <a:p>
             <a:fld id="{5BCAD085-E8A6-8845-BD4E-CB4CCA059FC4}" type="datetimeFigureOut">
               <a:rPr lang="en-US" smtClean="0"/>
-              <a:t>9/4/2026</a:t>
+              <a:t>9/5/2026</a:t>
             </a:fld>
             <a:endParaRPr lang="en-US"/>
           </a:p>
@@ -18558,6 +18689,7 @@
           <a:lstStyle/>
           <a:p>
             <a:pPr algn="ctr"/>
+            <a:endParaRPr/>
           </a:p>
         </p:txBody>
       </p:sp>
@@ -18602,6 +18734,7 @@
           <a:lstStyle/>
           <a:p>
             <a:pPr algn="ctr"/>
+            <a:endParaRPr/>
           </a:p>
         </p:txBody>
       </p:sp>
@@ -18646,6 +18779,7 @@
           <a:lstStyle/>
           <a:p>
             <a:pPr algn="ctr"/>
+            <a:endParaRPr/>
           </a:p>
         </p:txBody>
       </p:sp>
@@ -18714,6 +18848,7 @@
           <a:lstStyle/>
           <a:p>
             <a:pPr algn="ctr"/>
+            <a:endParaRPr/>
           </a:p>
         </p:txBody>
       </p:sp>
@@ -18758,6 +18893,7 @@
           <a:lstStyle/>
           <a:p>
             <a:pPr algn="ctr"/>
+            <a:endParaRPr/>
           </a:p>
         </p:txBody>
       </p:sp>
@@ -18802,6 +18938,7 @@
           <a:lstStyle/>
           <a:p>
             <a:pPr algn="ctr"/>
+            <a:endParaRPr/>
           </a:p>
         </p:txBody>
       </p:sp>
@@ -18822,7 +18959,7 @@
           <a:noFill/>
         </p:spPr>
         <p:txBody>
-          <a:bodyPr wrap="square" anchor="t" lIns="0" rIns="0" tIns="0" bIns="0">
+          <a:bodyPr wrap="square" lIns="0" tIns="0" rIns="0" bIns="0" anchor="t">
             <a:spAutoFit/>
           </a:bodyPr>
           <a:lstStyle/>
@@ -18861,7 +18998,7 @@
           <a:noFill/>
         </p:spPr>
         <p:txBody>
-          <a:bodyPr wrap="square" anchor="t" lIns="0" rIns="0" tIns="0" bIns="0">
+          <a:bodyPr wrap="square" lIns="0" tIns="0" rIns="0" bIns="0" anchor="t">
             <a:spAutoFit/>
           </a:bodyPr>
           <a:lstStyle/>
@@ -18924,6 +19061,7 @@
           <a:lstStyle/>
           <a:p>
             <a:pPr algn="ctr"/>
+            <a:endParaRPr/>
           </a:p>
         </p:txBody>
       </p:sp>
@@ -18968,6 +19106,7 @@
           <a:lstStyle/>
           <a:p>
             <a:pPr algn="ctr"/>
+            <a:endParaRPr/>
           </a:p>
         </p:txBody>
       </p:sp>
@@ -19012,6 +19151,7 @@
           <a:lstStyle/>
           <a:p>
             <a:pPr algn="ctr"/>
+            <a:endParaRPr/>
           </a:p>
         </p:txBody>
       </p:sp>
@@ -19032,7 +19172,7 @@
           <a:noFill/>
         </p:spPr>
         <p:txBody>
-          <a:bodyPr wrap="none" anchor="t" lIns="0" rIns="0" tIns="0" bIns="0">
+          <a:bodyPr wrap="none" lIns="0" tIns="0" rIns="0" bIns="0" anchor="t">
             <a:spAutoFit/>
           </a:bodyPr>
           <a:lstStyle/>
@@ -19071,7 +19211,7 @@
           <a:noFill/>
         </p:spPr>
         <p:txBody>
-          <a:bodyPr wrap="square" anchor="t" lIns="0" rIns="0" tIns="0" bIns="0">
+          <a:bodyPr wrap="square" lIns="0" tIns="0" rIns="0" bIns="0" anchor="t">
             <a:spAutoFit/>
           </a:bodyPr>
           <a:lstStyle/>
@@ -19102,7 +19242,7 @@
         <p:spPr>
           <a:xfrm>
             <a:off x="777240" y="1810512"/>
-            <a:ext cx="10607040" cy="365760"/>
+            <a:ext cx="10712196" cy="184666"/>
           </a:xfrm>
           <a:prstGeom prst="rect">
             <a:avLst/>
@@ -19110,7 +19250,7 @@
           <a:noFill/>
         </p:spPr>
         <p:txBody>
-          <a:bodyPr wrap="square" anchor="t" lIns="0" rIns="0" tIns="0" bIns="0">
+          <a:bodyPr wrap="square" lIns="0" tIns="0" rIns="0" bIns="0" anchor="t">
             <a:spAutoFit/>
           </a:bodyPr>
           <a:lstStyle/>
@@ -19121,7 +19261,7 @@
               </a:lnSpc>
             </a:pPr>
             <a:r>
-              <a:rPr sz="1200" b="0" i="0">
+              <a:rPr sz="1200" b="0" i="0" dirty="0">
                 <a:solidFill>
                   <a:srgbClr val="253439"/>
                 </a:solidFill>
@@ -19140,8 +19280,8 @@
         </p:nvSpPr>
         <p:spPr>
           <a:xfrm>
-            <a:off x="2258568" y="2304288"/>
-            <a:ext cx="7680960" cy="2240280"/>
+            <a:off x="2328519" y="2578608"/>
+            <a:ext cx="7680960" cy="1623656"/>
           </a:xfrm>
           <a:prstGeom prst="rect">
             <a:avLst/>
@@ -19175,6 +19315,7 @@
           <a:lstStyle/>
           <a:p>
             <a:pPr algn="ctr"/>
+            <a:endParaRPr/>
           </a:p>
         </p:txBody>
       </p:sp>
@@ -19194,8 +19335,8 @@
         </p:blipFill>
         <p:spPr>
           <a:xfrm>
-            <a:off x="2350008" y="2487168"/>
-            <a:ext cx="7498080" cy="1874520"/>
+            <a:off x="2515891" y="2739621"/>
+            <a:ext cx="6992775" cy="1301630"/>
           </a:xfrm>
           <a:prstGeom prst="rect">
             <a:avLst/>
@@ -19245,6 +19386,7 @@
           <a:lstStyle/>
           <a:p>
             <a:pPr algn="ctr"/>
+            <a:endParaRPr/>
           </a:p>
         </p:txBody>
       </p:sp>
@@ -19289,6 +19431,7 @@
           <a:lstStyle/>
           <a:p>
             <a:pPr algn="ctr"/>
+            <a:endParaRPr/>
           </a:p>
         </p:txBody>
       </p:sp>
@@ -19309,7 +19452,7 @@
           <a:noFill/>
         </p:spPr>
         <p:txBody>
-          <a:bodyPr wrap="square" anchor="t" lIns="0" rIns="0" tIns="0" bIns="0">
+          <a:bodyPr wrap="square" lIns="0" tIns="0" rIns="0" bIns="0" anchor="t">
             <a:spAutoFit/>
           </a:bodyPr>
           <a:lstStyle/>
@@ -19348,7 +19491,7 @@
           <a:noFill/>
         </p:spPr>
         <p:txBody>
-          <a:bodyPr wrap="square" anchor="t" lIns="0" rIns="0" tIns="0" bIns="0">
+          <a:bodyPr wrap="square" lIns="0" tIns="0" rIns="0" bIns="0" anchor="t">
             <a:spAutoFit/>
           </a:bodyPr>
           <a:lstStyle/>
@@ -19365,7 +19508,7 @@
                 </a:solidFill>
                 <a:latin typeface="Segoe UI"/>
               </a:rPr>
-              <a:t>nothing touches the specimen — no clip-on gauge to knock off at fracture</a:t>
+              <a:t>no strain gauge glued on, no clip-on extensometer — nothing touches the specimen</a:t>
             </a:r>
           </a:p>
         </p:txBody>
@@ -19413,6 +19556,7 @@
           <a:lstStyle/>
           <a:p>
             <a:pPr algn="ctr"/>
+            <a:endParaRPr/>
           </a:p>
         </p:txBody>
       </p:sp>
@@ -19457,6 +19601,7 @@
           <a:lstStyle/>
           <a:p>
             <a:pPr algn="ctr"/>
+            <a:endParaRPr/>
           </a:p>
         </p:txBody>
       </p:sp>
@@ -19477,7 +19622,7 @@
           <a:noFill/>
         </p:spPr>
         <p:txBody>
-          <a:bodyPr wrap="square" anchor="t" lIns="0" rIns="0" tIns="0" bIns="0">
+          <a:bodyPr wrap="square" lIns="0" tIns="0" rIns="0" bIns="0" anchor="t">
             <a:spAutoFit/>
           </a:bodyPr>
           <a:lstStyle/>
@@ -19494,7 +19639,7 @@
                 </a:solidFill>
                 <a:latin typeface="Segoe UI Semibold"/>
               </a:rPr>
-              <a:t>No calibration</a:t>
+              <a:t>Live stress–strain</a:t>
             </a:r>
           </a:p>
         </p:txBody>
@@ -19516,7 +19661,7 @@
           <a:noFill/>
         </p:spPr>
         <p:txBody>
-          <a:bodyPr wrap="square" anchor="t" lIns="0" rIns="0" tIns="0" bIns="0">
+          <a:bodyPr wrap="square" lIns="0" tIns="0" rIns="0" bIns="0" anchor="t">
             <a:spAutoFit/>
           </a:bodyPr>
           <a:lstStyle/>
@@ -19533,7 +19678,7 @@
                 </a:solidFill>
                 <a:latin typeface="Segoe UI"/>
               </a:rPr>
-              <a:t>strain is a ratio of two pixel distances — mm per pixel cancels out</a:t>
+              <a:t>the load cell gives force, the camera gives strain — the stress–strain curve draws itself live during the pull</a:t>
             </a:r>
           </a:p>
         </p:txBody>
@@ -19581,6 +19726,7 @@
           <a:lstStyle/>
           <a:p>
             <a:pPr algn="ctr"/>
+            <a:endParaRPr/>
           </a:p>
         </p:txBody>
       </p:sp>
@@ -19625,6 +19771,7 @@
           <a:lstStyle/>
           <a:p>
             <a:pPr algn="ctr"/>
+            <a:endParaRPr/>
           </a:p>
         </p:txBody>
       </p:sp>
@@ -19637,7 +19784,7 @@
         <p:spPr>
           <a:xfrm>
             <a:off x="8229600" y="5001768"/>
-            <a:ext cx="3017520" cy="320040"/>
+            <a:ext cx="3017520" cy="207749"/>
           </a:xfrm>
           <a:prstGeom prst="rect">
             <a:avLst/>
@@ -19645,7 +19792,7 @@
           <a:noFill/>
         </p:spPr>
         <p:txBody>
-          <a:bodyPr wrap="square" anchor="t" lIns="0" rIns="0" tIns="0" bIns="0">
+          <a:bodyPr wrap="square" lIns="0" tIns="0" rIns="0" bIns="0" anchor="t">
             <a:spAutoFit/>
           </a:bodyPr>
           <a:lstStyle/>
@@ -19656,7 +19803,7 @@
               </a:lnSpc>
             </a:pPr>
             <a:r>
-              <a:rPr sz="1350" b="0" i="0">
+              <a:rPr sz="1350" b="0" i="0" dirty="0">
                 <a:solidFill>
                   <a:srgbClr val="253439"/>
                 </a:solidFill>
@@ -19664,6 +19811,21 @@
               </a:rPr>
               <a:t>Every frame</a:t>
             </a:r>
+            <a:r>
+              <a:rPr lang="en-GB" sz="1350" b="0" i="0" dirty="0">
+                <a:solidFill>
+                  <a:srgbClr val="253439"/>
+                </a:solidFill>
+                <a:latin typeface="Segoe UI Semibold"/>
+              </a:rPr>
+              <a:t> captured</a:t>
+            </a:r>
+            <a:endParaRPr sz="1350" b="0" i="0" dirty="0">
+              <a:solidFill>
+                <a:srgbClr val="253439"/>
+              </a:solidFill>
+              <a:latin typeface="Segoe UI Semibold"/>
+            </a:endParaRPr>
           </a:p>
         </p:txBody>
       </p:sp>
@@ -19676,7 +19838,7 @@
         <p:spPr>
           <a:xfrm>
             <a:off x="8229600" y="5349240"/>
-            <a:ext cx="3017520" cy="777240"/>
+            <a:ext cx="3017520" cy="327397"/>
           </a:xfrm>
           <a:prstGeom prst="rect">
             <a:avLst/>
@@ -19684,7 +19846,7 @@
           <a:noFill/>
         </p:spPr>
         <p:txBody>
-          <a:bodyPr wrap="square" anchor="t" lIns="0" rIns="0" tIns="0" bIns="0">
+          <a:bodyPr wrap="square" lIns="0" tIns="0" rIns="0" bIns="0" anchor="t">
             <a:spAutoFit/>
           </a:bodyPr>
           <a:lstStyle/>
@@ -19695,13 +19857,49 @@
               </a:lnSpc>
             </a:pPr>
             <a:r>
-              <a:rPr sz="1050" b="0" i="0">
+              <a:rPr sz="1050" b="0" i="0" dirty="0">
                 <a:solidFill>
                   <a:srgbClr val="253439"/>
                 </a:solidFill>
                 <a:latin typeface="Segoe UI"/>
               </a:rPr>
-              <a:t>35 measurements per second, live on screen while the test runs</a:t>
+              <a:t>35 </a:t>
+            </a:r>
+            <a:r>
+              <a:rPr lang="en-GB" sz="1050" b="0" i="0" dirty="0">
+                <a:solidFill>
+                  <a:srgbClr val="253439"/>
+                </a:solidFill>
+                <a:latin typeface="Segoe UI"/>
+              </a:rPr>
+              <a:t>frames</a:t>
+            </a:r>
+            <a:r>
+              <a:rPr sz="1050" b="0" i="0" dirty="0">
+                <a:solidFill>
+                  <a:srgbClr val="253439"/>
+                </a:solidFill>
+                <a:latin typeface="Segoe UI"/>
+              </a:rPr>
+              <a:t> per second</a:t>
+            </a:r>
+            <a:r>
+              <a:rPr lang="en-GB" sz="1050" b="0" i="0" dirty="0">
+                <a:solidFill>
+                  <a:srgbClr val="253439"/>
+                </a:solidFill>
+                <a:latin typeface="Segoe UI"/>
+              </a:rPr>
+              <a:t> (FPS)</a:t>
+            </a:r>
+            <a:r>
+              <a:rPr sz="1050" b="0" i="0" dirty="0">
+                <a:solidFill>
+                  <a:srgbClr val="253439"/>
+                </a:solidFill>
+                <a:latin typeface="Segoe UI"/>
+              </a:rPr>
+              <a:t>, live on screen while the test runs</a:t>
             </a:r>
           </a:p>
         </p:txBody>
@@ -19875,7 +20073,7 @@
           <p:nvPr/>
         </p:nvPicPr>
         <p:blipFill>
-          <a:blip r:embed="rId2"/>
+          <a:blip r:embed="rId3"/>
           <a:stretch>
             <a:fillRect/>
           </a:stretch>
@@ -20372,7 +20570,7 @@
           <p:nvPr/>
         </p:nvPicPr>
         <p:blipFill>
-          <a:blip r:embed="rId3"/>
+          <a:blip r:embed="rId4"/>
           <a:stretch>
             <a:fillRect/>
           </a:stretch>
@@ -20496,7 +20694,7 @@
               </a:spcAft>
             </a:pPr>
             <a:r>
-              <a:rPr sz="1100" b="1" i="0">
+              <a:rPr sz="1100" b="1" i="0" dirty="0">
                 <a:solidFill>
                   <a:srgbClr val="B29E84"/>
                 </a:solidFill>
@@ -20505,13 +20703,31 @@
               <a:t>▪  </a:t>
             </a:r>
             <a:r>
-              <a:rPr sz="1100" b="0" i="0">
+              <a:rPr sz="1100" b="0" i="0" dirty="0">
                 <a:solidFill>
                   <a:srgbClr val="253439"/>
                 </a:solidFill>
                 <a:latin typeface="Segoe UI"/>
               </a:rPr>
-              <a:t>twin ball-screw frame, 4.5 kN load cell</a:t>
+              <a:t>twin ball-screw frame, 4.5 </a:t>
+            </a:r>
+            <a:r>
+              <a:rPr sz="1100" b="0" i="0" dirty="0" err="1">
+                <a:solidFill>
+                  <a:srgbClr val="253439"/>
+                </a:solidFill>
+                <a:latin typeface="Segoe UI"/>
+              </a:rPr>
+              <a:t>kN</a:t>
+            </a:r>
+            <a:r>
+              <a:rPr sz="1100" b="0" i="0" dirty="0">
+                <a:solidFill>
+                  <a:srgbClr val="253439"/>
+                </a:solidFill>
+                <a:latin typeface="Segoe UI"/>
+              </a:rPr>
+              <a:t> load cell</a:t>
             </a:r>
           </a:p>
           <a:p>
@@ -20524,7 +20740,7 @@
               </a:spcAft>
             </a:pPr>
             <a:r>
-              <a:rPr sz="1100" b="1" i="0">
+              <a:rPr sz="1100" b="1" i="0" dirty="0">
                 <a:solidFill>
                   <a:srgbClr val="B29E84"/>
                 </a:solidFill>
@@ -20533,7 +20749,7 @@
               <a:t>▪  </a:t>
             </a:r>
             <a:r>
-              <a:rPr sz="1100" b="0" i="0">
+              <a:rPr sz="1100" b="0" i="0" dirty="0">
                 <a:solidFill>
                   <a:srgbClr val="253439"/>
                 </a:solidFill>
@@ -20552,7 +20768,7 @@
               </a:spcAft>
             </a:pPr>
             <a:r>
-              <a:rPr sz="1100" b="1" i="0">
+              <a:rPr sz="1100" b="1" i="0" dirty="0">
                 <a:solidFill>
                   <a:srgbClr val="B29E84"/>
                 </a:solidFill>
@@ -20561,7 +20777,7 @@
               <a:t>▪  </a:t>
             </a:r>
             <a:r>
-              <a:rPr sz="1100" b="0" i="0">
+              <a:rPr sz="1100" b="0" i="0" dirty="0">
                 <a:solidFill>
                   <a:srgbClr val="253439"/>
                 </a:solidFill>
@@ -20642,7 +20858,7 @@
               </a:spcAft>
             </a:pPr>
             <a:r>
-              <a:rPr sz="1100" b="1" i="0">
+              <a:rPr sz="1100" b="1" i="0" dirty="0">
                 <a:solidFill>
                   <a:srgbClr val="B29E84"/>
                 </a:solidFill>
@@ -20651,7 +20867,7 @@
               <a:t>▪  </a:t>
             </a:r>
             <a:r>
-              <a:rPr sz="1100" b="0" i="0">
+              <a:rPr sz="1100" b="0" i="0" dirty="0">
                 <a:solidFill>
                   <a:srgbClr val="253439"/>
                 </a:solidFill>
@@ -20670,7 +20886,7 @@
               </a:spcAft>
             </a:pPr>
             <a:r>
-              <a:rPr sz="1100" b="1" i="0">
+              <a:rPr sz="1100" b="1" i="0" dirty="0">
                 <a:solidFill>
                   <a:srgbClr val="B29E84"/>
                 </a:solidFill>
@@ -20679,7 +20895,7 @@
               <a:t>▪  </a:t>
             </a:r>
             <a:r>
-              <a:rPr sz="1100" b="0" i="0">
+              <a:rPr sz="1100" b="0" i="0" dirty="0">
                 <a:solidFill>
                   <a:srgbClr val="253439"/>
                 </a:solidFill>
@@ -20698,7 +20914,7 @@
               </a:spcAft>
             </a:pPr>
             <a:r>
-              <a:rPr sz="1100" b="1" i="0">
+              <a:rPr sz="1100" b="1" i="0" dirty="0">
                 <a:solidFill>
                   <a:srgbClr val="B29E84"/>
                 </a:solidFill>
@@ -20707,7 +20923,7 @@
               <a:t>▪  </a:t>
             </a:r>
             <a:r>
-              <a:rPr sz="1100" b="0" i="0">
+              <a:rPr sz="1100" b="0" i="0" dirty="0">
                 <a:solidFill>
                   <a:srgbClr val="253439"/>
                 </a:solidFill>
@@ -20726,7 +20942,7 @@
               </a:spcAft>
             </a:pPr>
             <a:r>
-              <a:rPr sz="1100" b="1" i="0">
+              <a:rPr sz="1100" b="1" i="0" dirty="0">
                 <a:solidFill>
                   <a:srgbClr val="B29E84"/>
                 </a:solidFill>
@@ -20735,7 +20951,7 @@
               <a:t>▪  </a:t>
             </a:r>
             <a:r>
-              <a:rPr sz="1100" b="0" i="0">
+              <a:rPr sz="1100" b="0" i="0" dirty="0">
                 <a:solidFill>
                   <a:srgbClr val="253439"/>
                 </a:solidFill>

--- a/documentation/decks/PPD_Final_Presentation.pptx
+++ b/documentation/decks/PPD_Final_Presentation.pptx
@@ -968,6 +968,76 @@
         <p14:creationId xmlns:p14="http://schemas.microsoft.com/office/powerpoint/2010/main" val="1100821083"/>
       </p:ext>
     </p:extLst>
+  </p:cSld>
+  <p:clrMapOvr>
+    <a:masterClrMapping/>
+  </p:clrMapOvr>
+</p:notes>
+</file>
+
+<file path=ppt/notesSlides/notesSlide3.xml><?xml version="1.0" encoding="utf-8"?>
+<p:notes xmlns:a="http://schemas.openxmlformats.org/drawingml/2006/main" xmlns:p="http://schemas.openxmlformats.org/presentationml/2006/main" xmlns:r="http://schemas.openxmlformats.org/officeDocument/2006/relationships">
+  <p:cSld>
+    <p:spTree>
+      <p:nvGrpSpPr>
+        <p:cNvPr id="1" name=""/>
+        <p:cNvGrpSpPr/>
+        <p:nvPr/>
+      </p:nvGrpSpPr>
+      <p:grpSpPr>
+        <a:xfrm>
+          <a:off x="0" y="0"/>
+          <a:ext cx="0" cy="0"/>
+          <a:chOff x="0" y="0"/>
+          <a:chExt cx="0" cy="0"/>
+        </a:xfrm>
+      </p:grpSpPr>
+      <p:sp>
+        <p:nvSpPr>
+          <p:cNvPr id="2" name="Slide Image Placeholder 1"/>
+          <p:cNvSpPr>
+            <a:spLocks noGrp="1"/>
+          </p:cNvSpPr>
+          <p:nvPr>
+            <p:ph type="sldImg" idx="2"/>
+          </p:nvPr>
+        </p:nvSpPr>
+        <p:spPr/>
+      </p:sp>
+      <p:sp>
+        <p:nvSpPr>
+          <p:cNvPr id="3" name="Notes Placeholder 2"/>
+          <p:cNvSpPr>
+            <a:spLocks noGrp="1"/>
+          </p:cNvSpPr>
+          <p:nvPr>
+            <p:ph type="body" idx="3" sz="quarter"/>
+          </p:nvPr>
+        </p:nvSpPr>
+        <p:spPr/>
+        <p:txBody>
+          <a:bodyPr/>
+          <a:lstStyle/>
+          <a:p>
+            <a:r>
+              <a:t>glued = strain gauge, clipped = extensometer, camera = video extensometer (XT-205, and our rig)</a:t>
+            </a:r>
+          </a:p>
+        </p:txBody>
+      </p:sp>
+      <p:sp>
+        <p:nvSpPr>
+          <p:cNvPr id="4" name="Slide Number Placeholder 3"/>
+          <p:cNvSpPr>
+            <a:spLocks noGrp="1"/>
+          </p:cNvSpPr>
+          <p:nvPr>
+            <p:ph type="sldNum" idx="5" sz="quarter"/>
+          </p:nvPr>
+        </p:nvSpPr>
+        <p:spPr/>
+      </p:sp>
+    </p:spTree>
   </p:cSld>
   <p:clrMapOvr>
     <a:masterClrMapping/>
